--- a/presentations/02_Brokerage_Owners_Executive_Brief_RU.pptx
+++ b/presentations/02_Brokerage_Owners_Executive_Brief_RU.pptx
@@ -16,9 +16,12 @@
     <p:sldId id="264" r:id="rId10"/>
     <p:sldId id="265" r:id="rId11"/>
     <p:sldId id="266" r:id="rId12"/>
+    <p:sldId id="267" r:id="rId13"/>
+    <p:sldId id="268" r:id="rId14"/>
+    <p:sldId id="269" r:id="rId15"/>
   </p:sldIdLst>
   <p:notesMasterIdLst>
-    <p:notesMasterId r:id="rId13"/>
+    <p:notesMasterId r:id="rId16"/>
   </p:notesMasterIdLst>
   <p:sldSz cx="9144000" cy="5143500"/>
   <p:notesSz cx="5143500" cy="9144000"/>
@@ -117,7 +120,7 @@
   <p:extLst>
     <p:ext uri="{521415D9-36F7-43E2-AB2F-B90AF26B5E84}">
       <p14:sectionLst xmlns:p14="http://schemas.microsoft.com/office/powerpoint/2010/main">
-        <p14:section name="Предложение" id="{b201e6c5-2962-2aac-948f-a4b09c6c9e64}">
+        <p14:section name="Предложение" id="{64ddcc58-961f-b2ec-3d59-1450e0e4daed}">
           <p14:sldIdLst>
             <p14:sldId id="256"/>
             <p14:sldId id="257"/>
@@ -130,6 +133,9 @@
             <p14:sldId id="264"/>
             <p14:sldId id="265"/>
             <p14:sldId id="266"/>
+            <p14:sldId id="267"/>
+            <p14:sldId id="268"/>
+            <p14:sldId id="269"/>
           </p14:sldIdLst>
         </p14:section>
       </p14:sectionLst>
@@ -139,6 +145,293 @@
     </p:ext>
   </p:extLst>
 </p:presentation>
+</file>
+
+<file path=ppt/charts/chart9.xml><?xml version="1.0" encoding="utf-8"?>
+<c:chartSpace xmlns:c="http://schemas.openxmlformats.org/drawingml/2006/chart" xmlns:a="http://schemas.openxmlformats.org/drawingml/2006/main" xmlns:r="http://schemas.openxmlformats.org/officeDocument/2006/relationships">
+  <c:date1904 val="0"/>
+  <c:roundedCorners val="1"/>
+  <c:chart>
+    <c:title>
+      <c:tx>
+        <c:rich>
+          <a:bodyPr/>
+          <a:lstStyle/>
+          <a:p>
+            <a:pPr>
+              <a:defRPr sz="1200" b="0" i="0" u="none" strike="noStrike">
+                <a:solidFill>
+                  <a:srgbClr val="0E2238"/>
+                </a:solidFill>
+                <a:latin typeface="+mj-lt"/>
+              </a:defRPr>
+            </a:pPr>
+            <a:r>
+              <a:rPr sz="1200" b="0" i="0" u="none" strike="noStrike">
+                <a:solidFill>
+                  <a:srgbClr val="0E2238"/>
+                </a:solidFill>
+                <a:latin typeface="+mj-lt"/>
+              </a:rPr>
+              <a:t>Число зарегистрированных завещаний</a:t>
+            </a:r>
+          </a:p>
+        </c:rich>
+      </c:tx>
+      <c:layout/>
+      <c:overlay val="0"/>
+    </c:title>
+    <c:autoTitleDeleted val="0"/>
+    <c:plotArea>
+      <c:layout/>
+      <c:barChart>
+        <c:barDir val="col"/>
+        <c:grouping val="clustered"/>
+        <c:varyColors val="0"/>
+        <c:ser>
+          <c:idx val="0"/>
+          <c:order val="0"/>
+          <c:tx>
+            <c:strRef>
+              <c:f>Sheet1!$B$1</c:f>
+              <c:strCache>
+                <c:ptCount val="1"/>
+                <c:pt idx="0">
+                  <c:v>Зарегистрировано завещаний</c:v>
+                </c:pt>
+              </c:strCache>
+            </c:strRef>
+          </c:tx>
+          <c:spPr>
+            <a:solidFill>
+              <a:srgbClr val="B5723B"/>
+            </a:solidFill>
+            <a:effectLst/>
+          </c:spPr>
+          <c:invertIfNegative val="0"/>
+          <c:dLbls>
+            <c:numFmt formatCode="#,##0" sourceLinked="0"/>
+            <c:txPr>
+              <a:bodyPr/>
+              <a:lstStyle/>
+              <a:p>
+                <a:pPr>
+                  <a:defRPr b="1" i="0" strike="noStrike" sz="1000" u="none">
+                    <a:solidFill>
+                      <a:srgbClr val="0E2238"/>
+                    </a:solidFill>
+                    <a:latin typeface="+mn-lt"/>
+                  </a:defRPr>
+                </a:pPr>
+              </a:p>
+            </c:txPr>
+            <c:showLegendKey val="0"/>
+            <c:showVal val="1"/>
+            <c:showCatName val="0"/>
+            <c:showSerName val="0"/>
+            <c:showPercent val="0"/>
+            <c:showBubbleSize val="0"/>
+            <c:showLeaderLines val="0"/>
+          </c:dLbls>
+          <c:cat>
+            <c:multiLvlStrRef>
+              <c:f>Sheet1!$A$2:$A$7</c:f>
+              <c:multiLvlStrCache>
+                <c:ptCount val="6"/>
+                <c:lvl>
+                  <c:pt idx="0">
+                    <c:v>1 пол. 2023*</c:v>
+                  </c:pt>
+                  <c:pt idx="1">
+                    <c:v>1 пол. 2024</c:v>
+                  </c:pt>
+                  <c:pt idx="2">
+                    <c:v>1 пол. 2025</c:v>
+                  </c:pt>
+                  <c:pt idx="3">
+                    <c:v>2024 год*</c:v>
+                  </c:pt>
+                  <c:pt idx="4">
+                    <c:v>2025 год</c:v>
+                  </c:pt>
+                  <c:pt idx="5">
+                    <c:v>1 кв. 2026</c:v>
+                  </c:pt>
+                </c:lvl>
+              </c:multiLvlStrCache>
+            </c:multiLvlStrRef>
+          </c:cat>
+          <c:val>
+            <c:numRef>
+              <c:f>Sheet1!$B$2:$B$7</c:f>
+              <c:numCache>
+                <c:formatCode>General</c:formatCode>
+                <c:ptCount val="6"/>
+                <c:pt idx="0">
+                  <c:v>764</c:v>
+                </c:pt>
+                <c:pt idx="1">
+                  <c:v>810</c:v>
+                </c:pt>
+                <c:pt idx="2">
+                  <c:v>922</c:v>
+                </c:pt>
+                <c:pt idx="3">
+                  <c:v>1820</c:v>
+                </c:pt>
+                <c:pt idx="4">
+                  <c:v>2220</c:v>
+                </c:pt>
+                <c:pt idx="5">
+                  <c:v>883</c:v>
+                </c:pt>
+              </c:numCache>
+            </c:numRef>
+          </c:val>
+        </c:ser>
+        <c:dLbls>
+          <c:numFmt formatCode="#,##0" sourceLinked="0"/>
+          <c:txPr>
+            <a:bodyPr/>
+            <a:lstStyle/>
+            <a:p>
+              <a:pPr>
+                <a:defRPr b="1" i="0" strike="noStrike" sz="1000" u="none">
+                  <a:solidFill>
+                    <a:srgbClr val="0E2238"/>
+                  </a:solidFill>
+                  <a:latin typeface="+mn-lt"/>
+                </a:defRPr>
+              </a:pPr>
+            </a:p>
+          </c:txPr>
+          <c:showLegendKey val="0"/>
+          <c:showVal val="1"/>
+          <c:showCatName val="0"/>
+          <c:showSerName val="0"/>
+          <c:showPercent val="0"/>
+          <c:showBubbleSize val="0"/>
+          <c:showLeaderLines val="0"/>
+        </c:dLbls>
+        <c:gapWidth val="60"/>
+        <c:overlap val="0"/>
+        <c:axId val="2094734554"/>
+        <c:axId val="2094734552"/>
+        <c:axId val="2094734556"/>
+      </c:barChart>
+      <c:catAx>
+        <c:axId val="2094734554"/>
+        <c:scaling>
+          <c:orientation val="minMax"/>
+        </c:scaling>
+        <c:delete val="0"/>
+        <c:axPos val="b"/>
+        <c:numFmt formatCode="General" sourceLinked="1"/>
+        <c:majorTickMark val="out"/>
+        <c:minorTickMark val="none"/>
+        <c:tickLblPos val="low"/>
+        <c:spPr>
+          <a:ln w="12700" cap="flat">
+            <a:solidFill>
+              <a:srgbClr val="888888"/>
+            </a:solidFill>
+            <a:prstDash val="solid"/>
+            <a:round/>
+          </a:ln>
+        </c:spPr>
+        <c:txPr>
+          <a:bodyPr/>
+          <a:lstStyle/>
+          <a:p>
+            <a:pPr>
+              <a:defRPr sz="1000" b="0" i="0" u="none" strike="noStrike">
+                <a:solidFill>
+                  <a:srgbClr val="0E2238"/>
+                </a:solidFill>
+                <a:latin typeface="+mn-lt"/>
+              </a:defRPr>
+            </a:pPr>
+            <a:endParaRPr lang="en-US"/>
+          </a:p>
+        </c:txPr>
+        <c:crossAx val="2094734552"/>
+        <c:crosses val="autoZero"/>
+        <c:auto val="1"/>
+        <c:lblAlgn val="ctr"/>
+        <c:noMultiLvlLbl val="1"/>
+      </c:catAx>
+      <c:valAx>
+        <c:axId val="2094734552"/>
+        <c:scaling>
+          <c:orientation val="minMax"/>
+        </c:scaling>
+        <c:delete val="0"/>
+        <c:axPos val="l"/>
+        <c:majorGridlines>
+          <c:spPr>
+            <a:ln w="6350" cap="flat">
+              <a:solidFill>
+                <a:srgbClr val="E6E1D8"/>
+              </a:solidFill>
+              <a:prstDash val="solid"/>
+              <a:round/>
+            </a:ln>
+          </c:spPr>
+        </c:majorGridlines>
+        <c:numFmt formatCode="#,##0" sourceLinked="0"/>
+        <c:majorTickMark val="out"/>
+        <c:minorTickMark val="none"/>
+        <c:tickLblPos val="nextTo"/>
+        <c:spPr>
+          <a:ln w="12700" cap="flat">
+            <a:solidFill>
+              <a:srgbClr val="888888"/>
+            </a:solidFill>
+            <a:prstDash val="solid"/>
+            <a:round/>
+          </a:ln>
+        </c:spPr>
+        <c:txPr>
+          <a:bodyPr/>
+          <a:lstStyle/>
+          <a:p>
+            <a:pPr>
+              <a:defRPr sz="900" b="0" i="0" u="none" strike="noStrike">
+                <a:solidFill>
+                  <a:srgbClr val="0E2238"/>
+                </a:solidFill>
+                <a:latin typeface="+mn-lt"/>
+              </a:defRPr>
+            </a:pPr>
+            <a:endParaRPr lang="en-US"/>
+          </a:p>
+        </c:txPr>
+        <c:crossAx val="2094734554"/>
+        <c:crosses val="autoZero"/>
+        <c:crossBetween val="between"/>
+      </c:valAx>
+      <c:spPr>
+        <a:noFill/>
+        <a:ln>
+          <a:noFill/>
+        </a:ln>
+        <a:effectLst/>
+      </c:spPr>
+    </c:plotArea>
+    <c:plotVisOnly val="1"/>
+    <c:dispBlanksAs val="span"/>
+  </c:chart>
+  <c:spPr>
+    <a:noFill/>
+    <a:ln>
+      <a:noFill/>
+    </a:ln>
+    <a:effectLst/>
+  </c:spPr>
+  <c:externalData r:id="rId1">
+    <c:autoUpdate val="0"/>
+  </c:externalData>
+</c:chartSpace>
 </file>
 
 <file path=ppt/notesMasters/notesMaster1.xml><?xml version="1.0" encoding="utf-8"?>
@@ -736,6 +1029,270 @@
             <a:fld id="{F7021451-1387-4CA6-816F-3879F97B5CBC}" type="slidenum">
               <a:rPr lang="en-US"/>
               <a:t>11</a:t>
+            </a:fld>
+            <a:endParaRPr lang="en-US"/>
+          </a:p>
+        </p:txBody>
+      </p:sp>
+    </p:spTree>
+    <p:extLst>
+      <p:ext uri="{BB962C8B-B14F-4D97-AF65-F5344CB8AC3E}">
+        <p14:creationId xmlns:p14="http://schemas.microsoft.com/office/powerpoint/2010/main" val="1024086991"/>
+      </p:ext>
+    </p:extLst>
+  </p:cSld>
+  <p:clrMapOvr>
+    <a:masterClrMapping/>
+  </p:clrMapOvr>
+</p:notes>
+</file>
+
+<file path=ppt/notesSlides/notesSlide12.xml><?xml version="1.0" encoding="utf-8"?>
+<p:notes xmlns:a="http://schemas.openxmlformats.org/drawingml/2006/main" xmlns:r="http://schemas.openxmlformats.org/officeDocument/2006/relationships" xmlns:p="http://schemas.openxmlformats.org/presentationml/2006/main">
+  <p:cSld>
+    <p:spTree>
+      <p:nvGrpSpPr>
+        <p:cNvPr id="1" name=""/>
+        <p:cNvGrpSpPr/>
+        <p:nvPr/>
+      </p:nvGrpSpPr>
+      <p:grpSpPr>
+        <a:xfrm>
+          <a:off x="0" y="0"/>
+          <a:ext cx="0" cy="0"/>
+          <a:chOff x="0" y="0"/>
+          <a:chExt cx="0" cy="0"/>
+        </a:xfrm>
+      </p:grpSpPr>
+      <p:sp>
+        <p:nvSpPr>
+          <p:cNvPr id="2" name="Slide Image Placeholder 1"/>
+          <p:cNvSpPr>
+            <a:spLocks noGrp="1" noRot="1" noChangeAspect="1"/>
+          </p:cNvSpPr>
+          <p:nvPr>
+            <p:ph type="sldImg"/>
+          </p:nvPr>
+        </p:nvSpPr>
+        <p:spPr/>
+      </p:sp>
+      <p:sp>
+        <p:nvSpPr>
+          <p:cNvPr id="3" name="Notes Placeholder 2"/>
+          <p:cNvSpPr>
+            <a:spLocks noGrp="1"/>
+          </p:cNvSpPr>
+          <p:nvPr>
+            <p:ph type="body" idx="1"/>
+          </p:nvPr>
+        </p:nvSpPr>
+        <p:spPr/>
+        <p:txBody>
+          <a:bodyPr/>
+          <a:lstStyle/>
+          <a:p>
+            <a:r>
+              <a:rPr lang="en-US" dirty="0"/>
+              <a:t/>
+            </a:r>
+            <a:endParaRPr lang="en-US" dirty="0"/>
+          </a:p>
+        </p:txBody>
+      </p:sp>
+      <p:sp>
+        <p:nvSpPr>
+          <p:cNvPr id="4" name="Slide Number Placeholder 3"/>
+          <p:cNvSpPr>
+            <a:spLocks noGrp="1"/>
+          </p:cNvSpPr>
+          <p:nvPr>
+            <p:ph type="sldNum" sz="quarter" idx="10"/>
+          </p:nvPr>
+        </p:nvSpPr>
+        <p:spPr/>
+        <p:txBody>
+          <a:bodyPr/>
+          <a:lstStyle/>
+          <a:p>
+            <a:fld id="{F7021451-1387-4CA6-816F-3879F97B5CBC}" type="slidenum">
+              <a:rPr lang="en-US"/>
+              <a:t>12</a:t>
+            </a:fld>
+            <a:endParaRPr lang="en-US"/>
+          </a:p>
+        </p:txBody>
+      </p:sp>
+    </p:spTree>
+    <p:extLst>
+      <p:ext uri="{BB962C8B-B14F-4D97-AF65-F5344CB8AC3E}">
+        <p14:creationId xmlns:p14="http://schemas.microsoft.com/office/powerpoint/2010/main" val="1024086991"/>
+      </p:ext>
+    </p:extLst>
+  </p:cSld>
+  <p:clrMapOvr>
+    <a:masterClrMapping/>
+  </p:clrMapOvr>
+</p:notes>
+</file>
+
+<file path=ppt/notesSlides/notesSlide13.xml><?xml version="1.0" encoding="utf-8"?>
+<p:notes xmlns:a="http://schemas.openxmlformats.org/drawingml/2006/main" xmlns:r="http://schemas.openxmlformats.org/officeDocument/2006/relationships" xmlns:p="http://schemas.openxmlformats.org/presentationml/2006/main">
+  <p:cSld>
+    <p:spTree>
+      <p:nvGrpSpPr>
+        <p:cNvPr id="1" name=""/>
+        <p:cNvGrpSpPr/>
+        <p:nvPr/>
+      </p:nvGrpSpPr>
+      <p:grpSpPr>
+        <a:xfrm>
+          <a:off x="0" y="0"/>
+          <a:ext cx="0" cy="0"/>
+          <a:chOff x="0" y="0"/>
+          <a:chExt cx="0" cy="0"/>
+        </a:xfrm>
+      </p:grpSpPr>
+      <p:sp>
+        <p:nvSpPr>
+          <p:cNvPr id="2" name="Slide Image Placeholder 1"/>
+          <p:cNvSpPr>
+            <a:spLocks noGrp="1" noRot="1" noChangeAspect="1"/>
+          </p:cNvSpPr>
+          <p:nvPr>
+            <p:ph type="sldImg"/>
+          </p:nvPr>
+        </p:nvSpPr>
+        <p:spPr/>
+      </p:sp>
+      <p:sp>
+        <p:nvSpPr>
+          <p:cNvPr id="3" name="Notes Placeholder 2"/>
+          <p:cNvSpPr>
+            <a:spLocks noGrp="1"/>
+          </p:cNvSpPr>
+          <p:nvPr>
+            <p:ph type="body" idx="1"/>
+          </p:nvPr>
+        </p:nvSpPr>
+        <p:spPr/>
+        <p:txBody>
+          <a:bodyPr/>
+          <a:lstStyle/>
+          <a:p>
+            <a:r>
+              <a:rPr lang="en-US" dirty="0"/>
+              <a:t/>
+            </a:r>
+            <a:endParaRPr lang="en-US" dirty="0"/>
+          </a:p>
+        </p:txBody>
+      </p:sp>
+      <p:sp>
+        <p:nvSpPr>
+          <p:cNvPr id="4" name="Slide Number Placeholder 3"/>
+          <p:cNvSpPr>
+            <a:spLocks noGrp="1"/>
+          </p:cNvSpPr>
+          <p:nvPr>
+            <p:ph type="sldNum" sz="quarter" idx="10"/>
+          </p:nvPr>
+        </p:nvSpPr>
+        <p:spPr/>
+        <p:txBody>
+          <a:bodyPr/>
+          <a:lstStyle/>
+          <a:p>
+            <a:fld id="{F7021451-1387-4CA6-816F-3879F97B5CBC}" type="slidenum">
+              <a:rPr lang="en-US"/>
+              <a:t>13</a:t>
+            </a:fld>
+            <a:endParaRPr lang="en-US"/>
+          </a:p>
+        </p:txBody>
+      </p:sp>
+    </p:spTree>
+    <p:extLst>
+      <p:ext uri="{BB962C8B-B14F-4D97-AF65-F5344CB8AC3E}">
+        <p14:creationId xmlns:p14="http://schemas.microsoft.com/office/powerpoint/2010/main" val="1024086991"/>
+      </p:ext>
+    </p:extLst>
+  </p:cSld>
+  <p:clrMapOvr>
+    <a:masterClrMapping/>
+  </p:clrMapOvr>
+</p:notes>
+</file>
+
+<file path=ppt/notesSlides/notesSlide14.xml><?xml version="1.0" encoding="utf-8"?>
+<p:notes xmlns:a="http://schemas.openxmlformats.org/drawingml/2006/main" xmlns:r="http://schemas.openxmlformats.org/officeDocument/2006/relationships" xmlns:p="http://schemas.openxmlformats.org/presentationml/2006/main">
+  <p:cSld>
+    <p:spTree>
+      <p:nvGrpSpPr>
+        <p:cNvPr id="1" name=""/>
+        <p:cNvGrpSpPr/>
+        <p:nvPr/>
+      </p:nvGrpSpPr>
+      <p:grpSpPr>
+        <a:xfrm>
+          <a:off x="0" y="0"/>
+          <a:ext cx="0" cy="0"/>
+          <a:chOff x="0" y="0"/>
+          <a:chExt cx="0" cy="0"/>
+        </a:xfrm>
+      </p:grpSpPr>
+      <p:sp>
+        <p:nvSpPr>
+          <p:cNvPr id="2" name="Slide Image Placeholder 1"/>
+          <p:cNvSpPr>
+            <a:spLocks noGrp="1" noRot="1" noChangeAspect="1"/>
+          </p:cNvSpPr>
+          <p:nvPr>
+            <p:ph type="sldImg"/>
+          </p:nvPr>
+        </p:nvSpPr>
+        <p:spPr/>
+      </p:sp>
+      <p:sp>
+        <p:nvSpPr>
+          <p:cNvPr id="3" name="Notes Placeholder 2"/>
+          <p:cNvSpPr>
+            <a:spLocks noGrp="1"/>
+          </p:cNvSpPr>
+          <p:nvPr>
+            <p:ph type="body" idx="1"/>
+          </p:nvPr>
+        </p:nvSpPr>
+        <p:spPr/>
+        <p:txBody>
+          <a:bodyPr/>
+          <a:lstStyle/>
+          <a:p>
+            <a:r>
+              <a:rPr lang="en-US" dirty="0"/>
+              <a:t/>
+            </a:r>
+            <a:endParaRPr lang="en-US" dirty="0"/>
+          </a:p>
+        </p:txBody>
+      </p:sp>
+      <p:sp>
+        <p:nvSpPr>
+          <p:cNvPr id="4" name="Slide Number Placeholder 3"/>
+          <p:cNvSpPr>
+            <a:spLocks noGrp="1"/>
+          </p:cNvSpPr>
+          <p:nvPr>
+            <p:ph type="sldNum" sz="quarter" idx="10"/>
+          </p:nvPr>
+        </p:nvSpPr>
+        <p:spPr/>
+        <p:txBody>
+          <a:bodyPr/>
+          <a:lstStyle/>
+          <a:p>
+            <a:fld id="{F7021451-1387-4CA6-816F-3879F97B5CBC}" type="slidenum">
+              <a:rPr lang="en-US"/>
+              <a:t>14</a:t>
             </a:fld>
             <a:endParaRPr lang="en-US"/>
           </a:p>
@@ -2332,19 +2889,277 @@
       </p:grpSpPr>
       <p:sp>
         <p:nvSpPr>
-          <p:cNvPr id="2" name="Shape 0"/>
+          <p:cNvPr id="2" name="Text 0"/>
+          <p:cNvSpPr txBox="1"/>
+          <p:nvPr/>
+        </p:nvSpPr>
+        <p:spPr>
+          <a:xfrm>
+            <a:off x="457200" y="402336"/>
+            <a:ext cx="8229600" cy="749808"/>
+          </a:xfrm>
+          <a:prstGeom prst="rect">
+            <a:avLst/>
+          </a:prstGeom>
+          <a:noFill/>
+          <a:ln/>
+        </p:spPr>
+        <p:txBody>
+          <a:bodyPr wrap="square" lIns="0" tIns="0" rIns="0" bIns="0" rtlCol="0" anchor="t"/>
+          <a:lstStyle/>
+          <a:p>
+            <a:pPr algn="l" indent="0" marL="0">
+              <a:buNone/>
+            </a:pPr>
+            <a:r>
+              <a:rPr lang="ru-RU" altLang="en-US" sz="2600" b="1" dirty="0">
+                <a:solidFill>
+                  <a:schemeClr val="tx1"/>
+                </a:solidFill>
+                <a:latin typeface="Cambria" pitchFamily="34" charset="0"/>
+                <a:ea typeface="Cambria" pitchFamily="34" charset="-122"/>
+                <a:cs typeface="Cambria" pitchFamily="34" charset="-120"/>
+              </a:rPr>
+              <a:t>Ваша роль и наша</a:t>
+            </a:r>
+            <a:endParaRPr lang="ru-RU" sz="2600" dirty="0"/>
+          </a:p>
+        </p:txBody>
+      </p:sp>
+      <p:sp>
+        <p:nvSpPr>
+          <p:cNvPr id="3" name="Text 1"/>
+          <p:cNvSpPr txBox="1"/>
+          <p:nvPr/>
+        </p:nvSpPr>
+        <p:spPr>
+          <a:xfrm>
+            <a:off x="457200" y="146304"/>
+            <a:ext cx="8229600" cy="237744"/>
+          </a:xfrm>
+          <a:prstGeom prst="rect">
+            <a:avLst/>
+          </a:prstGeom>
+          <a:noFill/>
+          <a:ln/>
+        </p:spPr>
+        <p:txBody>
+          <a:bodyPr wrap="square" lIns="0" tIns="0" rIns="0" bIns="0" rtlCol="0" anchor="ctr"/>
+          <a:lstStyle/>
+          <a:p>
+            <a:pPr algn="l" indent="0" marL="0">
+              <a:buNone/>
+            </a:pPr>
+            <a:r>
+              <a:rPr lang="ru-RU" altLang="en-US" sz="1000" b="1" spc="300" kern="0" dirty="0">
+                <a:solidFill>
+                  <a:schemeClr val="accent1"/>
+                </a:solidFill>
+              </a:rPr>
+              <a:t>РАСПРЕДЕЛЕНИЕ РОЛЕЙ</a:t>
+            </a:r>
+            <a:endParaRPr lang="ru-RU" sz="1000" dirty="0"/>
+          </a:p>
+        </p:txBody>
+      </p:sp>
+      <p:sp>
+        <p:nvSpPr>
+          <p:cNvPr id="4" name="Shape 2"/>
           <p:cNvSpPr/>
           <p:nvPr/>
         </p:nvSpPr>
         <p:spPr>
           <a:xfrm>
-            <a:off x="457200" y="457200"/>
-            <a:ext cx="8229600" cy="4023360"/>
-          </a:xfrm>
-          <a:prstGeom prst="rect">
-            <a:avLst/>
-          </a:prstGeom>
-          <a:ln w="9525">
+            <a:off x="457200" y="1188720"/>
+            <a:ext cx="4000500" cy="548640"/>
+          </a:xfrm>
+          <a:prstGeom prst="rect">
+            <a:avLst/>
+          </a:prstGeom>
+          <a:solidFill>
+            <a:srgbClr val="0E2238"/>
+          </a:solidFill>
+          <a:ln w="12700">
+            <a:solidFill>
+              <a:srgbClr val="0E2238"/>
+            </a:solidFill>
+            <a:prstDash val="solid"/>
+          </a:ln>
+        </p:spPr>
+      </p:sp>
+      <p:sp>
+        <p:nvSpPr>
+          <p:cNvPr id="5" name="Text 3"/>
+          <p:cNvSpPr txBox="1"/>
+          <p:nvPr/>
+        </p:nvSpPr>
+        <p:spPr>
+          <a:xfrm>
+            <a:off x="594360" y="1188720"/>
+            <a:ext cx="3726180" cy="548640"/>
+          </a:xfrm>
+          <a:prstGeom prst="rect">
+            <a:avLst/>
+          </a:prstGeom>
+          <a:noFill/>
+          <a:ln/>
+        </p:spPr>
+        <p:txBody>
+          <a:bodyPr wrap="square" lIns="0" tIns="0" rIns="0" bIns="0" rtlCol="0" anchor="ctr"/>
+          <a:lstStyle/>
+          <a:p>
+            <a:pPr algn="l" indent="0" marL="0">
+              <a:buNone/>
+            </a:pPr>
+            <a:r>
+              <a:rPr lang="ru-RU" altLang="en-US" sz="1300" b="1" dirty="0">
+                <a:solidFill>
+                  <a:schemeClr val="accent2"/>
+                </a:solidFill>
+              </a:rPr>
+              <a:t>Агентство</a:t>
+            </a:r>
+            <a:endParaRPr lang="ru-RU" sz="1300" dirty="0"/>
+          </a:p>
+        </p:txBody>
+      </p:sp>
+      <p:sp>
+        <p:nvSpPr>
+          <p:cNvPr id="6" name="Shape 4"/>
+          <p:cNvSpPr/>
+          <p:nvPr/>
+        </p:nvSpPr>
+        <p:spPr>
+          <a:xfrm>
+            <a:off x="457200" y="1737360"/>
+            <a:ext cx="4000500" cy="2697480"/>
+          </a:xfrm>
+          <a:prstGeom prst="rect">
+            <a:avLst/>
+          </a:prstGeom>
+          <a:solidFill>
+            <a:srgbClr val="F4F1EB"/>
+          </a:solidFill>
+          <a:ln w="12700">
+            <a:solidFill>
+              <a:srgbClr val="F4F1EB"/>
+            </a:solidFill>
+            <a:prstDash val="solid"/>
+          </a:ln>
+        </p:spPr>
+      </p:sp>
+      <p:sp>
+        <p:nvSpPr>
+          <p:cNvPr id="7" name="Text 5"/>
+          <p:cNvSpPr txBox="1"/>
+          <p:nvPr/>
+        </p:nvSpPr>
+        <p:spPr>
+          <a:xfrm>
+            <a:off x="594360" y="1874520"/>
+            <a:ext cx="3726180" cy="2468880"/>
+          </a:xfrm>
+          <a:prstGeom prst="rect">
+            <a:avLst/>
+          </a:prstGeom>
+          <a:noFill/>
+          <a:ln/>
+        </p:spPr>
+        <p:txBody>
+          <a:bodyPr wrap="square" lIns="0" tIns="0" rIns="0" bIns="0" rtlCol="0" anchor="t"/>
+          <a:lstStyle/>
+          <a:p>
+            <a:pPr algn="l" marL="152400" indent="-152400">
+              <a:spcAft>
+                <a:spcPts val="500"/>
+              </a:spcAft>
+              <a:buSzPct val="100000"/>
+              <a:buChar char="•"/>
+            </a:pPr>
+            <a:r>
+              <a:rPr lang="ru-RU" altLang="en-US" sz="1100" dirty="0">
+                <a:solidFill>
+                  <a:schemeClr val="tx2"/>
+                </a:solidFill>
+              </a:rPr>
+              <a:t>Представляет услугу и направляет клиента</a:t>
+            </a:r>
+            <a:endParaRPr lang="ru-RU" sz="1100" dirty="0"/>
+          </a:p>
+          <a:p>
+            <a:pPr algn="l" marL="152400" indent="-152400">
+              <a:spcAft>
+                <a:spcPts val="500"/>
+              </a:spcAft>
+              <a:buSzPct val="100000"/>
+              <a:buChar char="•"/>
+            </a:pPr>
+            <a:r>
+              <a:rPr lang="ru-RU" altLang="en-US" sz="1100" dirty="0">
+                <a:solidFill>
+                  <a:schemeClr val="tx2"/>
+                </a:solidFill>
+              </a:rPr>
+              <a:t>Представляет её как дополнительную ценность в своём предложении</a:t>
+            </a:r>
+            <a:endParaRPr lang="ru-RU" sz="1100" dirty="0"/>
+          </a:p>
+          <a:p>
+            <a:pPr algn="l" marL="152400" indent="-152400">
+              <a:spcAft>
+                <a:spcPts val="500"/>
+              </a:spcAft>
+              <a:buSzPct val="100000"/>
+              <a:buChar char="•"/>
+            </a:pPr>
+            <a:r>
+              <a:rPr lang="ru-RU" altLang="en-US" sz="1100" dirty="0">
+                <a:solidFill>
+                  <a:schemeClr val="tx2"/>
+                </a:solidFill>
+              </a:rPr>
+              <a:t>Не даёт юридических консультаций и не гарантирует результатов</a:t>
+            </a:r>
+            <a:endParaRPr lang="ru-RU" sz="1100" dirty="0"/>
+          </a:p>
+          <a:p>
+            <a:pPr algn="l" marL="152400" indent="-152400">
+              <a:spcAft>
+                <a:spcPts val="500"/>
+              </a:spcAft>
+              <a:buSzPct val="100000"/>
+              <a:buChar char="•"/>
+            </a:pPr>
+            <a:r>
+              <a:rPr lang="ru-RU" altLang="en-US" sz="1100" dirty="0">
+                <a:solidFill>
+                  <a:schemeClr val="tx2"/>
+                </a:solidFill>
+              </a:rPr>
+              <a:t>Получает реферальное вознаграждение</a:t>
+            </a:r>
+            <a:endParaRPr lang="ru-RU" sz="1100" dirty="0"/>
+          </a:p>
+        </p:txBody>
+      </p:sp>
+      <p:sp>
+        <p:nvSpPr>
+          <p:cNvPr id="8" name="Shape 6"/>
+          <p:cNvSpPr/>
+          <p:nvPr/>
+        </p:nvSpPr>
+        <p:spPr>
+          <a:xfrm>
+            <a:off x="4686300" y="1188720"/>
+            <a:ext cx="4000500" cy="548640"/>
+          </a:xfrm>
+          <a:prstGeom prst="rect">
+            <a:avLst/>
+          </a:prstGeom>
+          <a:solidFill>
+            <a:srgbClr val="B5723B"/>
+          </a:solidFill>
+          <a:ln w="12700">
             <a:solidFill>
               <a:srgbClr val="B5723B"/>
             </a:solidFill>
@@ -2354,14 +3169,75 @@
       </p:sp>
       <p:sp>
         <p:nvSpPr>
-          <p:cNvPr id="3" name="Text 1"/>
+          <p:cNvPr id="9" name="Text 7"/>
           <p:cNvSpPr txBox="1"/>
           <p:nvPr/>
         </p:nvSpPr>
         <p:spPr>
           <a:xfrm>
-            <a:off x="822960" y="640080"/>
-            <a:ext cx="914400" cy="1005840"/>
+            <a:off x="4823460" y="1188720"/>
+            <a:ext cx="3726180" cy="548640"/>
+          </a:xfrm>
+          <a:prstGeom prst="rect">
+            <a:avLst/>
+          </a:prstGeom>
+          <a:noFill/>
+          <a:ln/>
+        </p:spPr>
+        <p:txBody>
+          <a:bodyPr wrap="square" lIns="0" tIns="0" rIns="0" bIns="0" rtlCol="0" anchor="ctr"/>
+          <a:lstStyle/>
+          <a:p>
+            <a:pPr algn="l" indent="0" marL="0">
+              <a:buNone/>
+            </a:pPr>
+            <a:r>
+              <a:rPr lang="ru-RU" altLang="en-US" sz="1300" b="1" dirty="0">
+                <a:solidFill>
+                  <a:schemeClr val="tx1"/>
+                </a:solidFill>
+              </a:rPr>
+              <a:t>Rashid Alkaitoob Advocates</a:t>
+            </a:r>
+            <a:endParaRPr lang="ru-RU" sz="1300" dirty="0"/>
+          </a:p>
+        </p:txBody>
+      </p:sp>
+      <p:sp>
+        <p:nvSpPr>
+          <p:cNvPr id="10" name="Shape 8"/>
+          <p:cNvSpPr/>
+          <p:nvPr/>
+        </p:nvSpPr>
+        <p:spPr>
+          <a:xfrm>
+            <a:off x="4686300" y="1737360"/>
+            <a:ext cx="4000500" cy="2697480"/>
+          </a:xfrm>
+          <a:prstGeom prst="rect">
+            <a:avLst/>
+          </a:prstGeom>
+          <a:solidFill>
+            <a:srgbClr val="F4F1EB"/>
+          </a:solidFill>
+          <a:ln w="12700">
+            <a:solidFill>
+              <a:srgbClr val="F4F1EB"/>
+            </a:solidFill>
+            <a:prstDash val="solid"/>
+          </a:ln>
+        </p:spPr>
+      </p:sp>
+      <p:sp>
+        <p:nvSpPr>
+          <p:cNvPr id="11" name="Text 9"/>
+          <p:cNvSpPr txBox="1"/>
+          <p:nvPr/>
+        </p:nvSpPr>
+        <p:spPr>
+          <a:xfrm>
+            <a:off x="4823460" y="1874520"/>
+            <a:ext cx="3726180" cy="2468880"/>
           </a:xfrm>
           <a:prstGeom prst="rect">
             <a:avLst/>
@@ -2373,96 +3249,106 @@
           <a:bodyPr wrap="square" lIns="0" tIns="0" rIns="0" bIns="0" rtlCol="0" anchor="t"/>
           <a:lstStyle/>
           <a:p>
-            <a:pPr algn="l" indent="0" marL="0">
-              <a:buNone/>
-            </a:pPr>
-            <a:r>
-              <a:rPr lang="en-US" sz="7200" dirty="0">
-                <a:solidFill>
-                  <a:schemeClr val="accent1"/>
-                </a:solidFill>
-                <a:latin typeface="Cambria" pitchFamily="34" charset="0"/>
-                <a:ea typeface="Cambria" pitchFamily="34" charset="-122"/>
-                <a:cs typeface="Cambria" pitchFamily="34" charset="-120"/>
-              </a:rPr>
-              <a:t>“</a:t>
-            </a:r>
-            <a:endParaRPr lang="en-US" sz="7200" dirty="0"/>
-          </a:p>
-        </p:txBody>
-      </p:sp>
-      <p:sp>
-        <p:nvSpPr>
-          <p:cNvPr id="4" name="Text 2"/>
-          <p:cNvSpPr txBox="1"/>
-          <p:nvPr/>
-        </p:nvSpPr>
-        <p:spPr>
-          <a:xfrm>
-            <a:off x="914400" y="1463040"/>
-            <a:ext cx="7315200" cy="2011680"/>
-          </a:xfrm>
-          <a:prstGeom prst="rect">
-            <a:avLst/>
-          </a:prstGeom>
-          <a:noFill/>
-          <a:ln/>
-        </p:spPr>
-        <p:txBody>
-          <a:bodyPr wrap="square" lIns="0" tIns="0" rIns="0" bIns="0" rtlCol="0" anchor="ctr"/>
-          <a:lstStyle/>
-          <a:p>
-            <a:pPr algn="l" indent="0" marL="0">
-              <a:buNone/>
-            </a:pPr>
-            <a:r>
-              <a:rPr lang="ru-RU" altLang="en-US" sz="2200" i="1" dirty="0">
-                <a:solidFill>
-                  <a:schemeClr val="bg1"/>
-                </a:solidFill>
-                <a:latin typeface="Cambria" pitchFamily="34" charset="0"/>
-                <a:ea typeface="Cambria" pitchFamily="34" charset="-122"/>
-                <a:cs typeface="Cambria" pitchFamily="34" charset="-120"/>
-              </a:rPr>
-              <a:t>Мы не продаём «завещание». Мы помогаем вам защищать клиентов, повышать ценность ваших услуг и укреплять доверие инвесторов к вам.</a:t>
-            </a:r>
-            <a:endParaRPr lang="ru-RU" sz="2200" dirty="0"/>
-          </a:p>
-        </p:txBody>
-      </p:sp>
-      <p:sp>
-        <p:nvSpPr>
-          <p:cNvPr id="5" name="Text 3"/>
-          <p:cNvSpPr txBox="1"/>
-          <p:nvPr/>
-        </p:nvSpPr>
-        <p:spPr>
-          <a:xfrm>
-            <a:off x="914400" y="3566160"/>
-            <a:ext cx="7315200" cy="457200"/>
-          </a:xfrm>
-          <a:prstGeom prst="rect">
-            <a:avLst/>
-          </a:prstGeom>
-          <a:noFill/>
-          <a:ln/>
-        </p:spPr>
-        <p:txBody>
-          <a:bodyPr wrap="square" lIns="0" tIns="0" rIns="0" bIns="0" rtlCol="0" anchor="ctr"/>
-          <a:lstStyle/>
-          <a:p>
-            <a:pPr algn="l" indent="0" marL="0">
-              <a:buNone/>
-            </a:pPr>
-            <a:r>
-              <a:rPr lang="ru-RU" altLang="en-US" sz="1200" dirty="0">
-                <a:solidFill>
-                  <a:schemeClr val="accent2"/>
-                </a:solidFill>
-              </a:rPr>
-              <a:t>Rashid Alkaitoob Advocates &amp; Legal Consultants</a:t>
-            </a:r>
-            <a:endParaRPr lang="ru-RU" sz="1200" dirty="0"/>
+            <a:pPr algn="l" marL="152400" indent="-152400">
+              <a:spcAft>
+                <a:spcPts val="500"/>
+              </a:spcAft>
+              <a:buSzPct val="100000"/>
+              <a:buChar char="•"/>
+            </a:pPr>
+            <a:r>
+              <a:rPr lang="ru-RU" altLang="en-US" sz="1100" dirty="0">
+                <a:solidFill>
+                  <a:schemeClr val="tx2"/>
+                </a:solidFill>
+              </a:rPr>
+              <a:t>Юридическая консультация и составление завещания</a:t>
+            </a:r>
+            <a:endParaRPr lang="ru-RU" sz="1100" dirty="0"/>
+          </a:p>
+          <a:p>
+            <a:pPr algn="l" marL="152400" indent="-152400">
+              <a:spcAft>
+                <a:spcPts val="500"/>
+              </a:spcAft>
+              <a:buSzPct val="100000"/>
+              <a:buChar char="•"/>
+            </a:pPr>
+            <a:r>
+              <a:rPr lang="ru-RU" altLang="en-US" sz="1100" dirty="0">
+                <a:solidFill>
+                  <a:schemeClr val="tx2"/>
+                </a:solidFill>
+              </a:rPr>
+              <a:t>Регистрация и взаимодействие с органами</a:t>
+            </a:r>
+            <a:endParaRPr lang="ru-RU" sz="1100" dirty="0"/>
+          </a:p>
+          <a:p>
+            <a:pPr algn="l" marL="152400" indent="-152400">
+              <a:spcAft>
+                <a:spcPts val="500"/>
+              </a:spcAft>
+              <a:buSzPct val="100000"/>
+              <a:buChar char="•"/>
+            </a:pPr>
+            <a:r>
+              <a:rPr lang="ru-RU" altLang="en-US" sz="1100" dirty="0">
+                <a:solidFill>
+                  <a:schemeClr val="tx2"/>
+                </a:solidFill>
+              </a:rPr>
+              <a:t>Защищает брокера от любой юридической ответственности</a:t>
+            </a:r>
+            <a:endParaRPr lang="ru-RU" sz="1100" dirty="0"/>
+          </a:p>
+          <a:p>
+            <a:pPr algn="l" marL="152400" indent="-152400">
+              <a:spcAft>
+                <a:spcPts val="500"/>
+              </a:spcAft>
+              <a:buSzPct val="100000"/>
+              <a:buChar char="•"/>
+            </a:pPr>
+            <a:r>
+              <a:rPr lang="ru-RU" altLang="en-US" sz="1100" dirty="0">
+                <a:solidFill>
+                  <a:schemeClr val="tx2"/>
+                </a:solidFill>
+              </a:rPr>
+              <a:t>Сервис уровня консьерж на четырёх языках</a:t>
+            </a:r>
+            <a:endParaRPr lang="ru-RU" sz="1100" dirty="0"/>
+          </a:p>
+        </p:txBody>
+      </p:sp>
+      <p:sp>
+        <p:nvSpPr>
+          <p:cNvPr id="12" name="Text 0"/>
+          <p:cNvSpPr/>
+          <p:nvPr>
+            <p:ph idx="101" type="title" hasCustomPrompt="1"/>
+          </p:nvPr>
+        </p:nvSpPr>
+        <p:spPr>
+          <a:xfrm>
+            <a:off x="457200" y="420624"/>
+            <a:ext cx="8229600" cy="731520"/>
+          </a:xfrm>
+          <a:prstGeom prst="rect">
+            <a:avLst/>
+          </a:prstGeom>
+          <a:noFill/>
+          <a:ln/>
+        </p:spPr>
+        <p:txBody>
+          <a:bodyPr wrap="square" lIns="0" tIns="0" rIns="0" bIns="0" rtlCol="0" anchor="t"/>
+          <a:lstStyle/>
+          <a:p>
+            <a:pPr algn="l" indent="0" marL="0">
+              <a:buNone/>
+            </a:pPr>
+            <a:endParaRPr lang="en-US" sz="2600" dirty="0"/>
           </a:p>
         </p:txBody>
       </p:sp>
@@ -2496,7 +3382,7 @@
             <a:lvl1pPr>
               <a:defRPr sz="900">
                 <a:solidFill>
-                  <a:srgbClr val="D9B38C"/>
+                  <a:srgbClr val="6E7B88"/>
                 </a:solidFill>
               </a:defRPr>
             </a:lvl1pPr>
@@ -2538,104 +3424,107 @@
       </p:grpSpPr>
       <p:sp>
         <p:nvSpPr>
-          <p:cNvPr id="2" name="Shape 0"/>
+          <p:cNvPr id="2" name="Text 0"/>
+          <p:cNvSpPr txBox="1"/>
+          <p:nvPr/>
+        </p:nvSpPr>
+        <p:spPr>
+          <a:xfrm>
+            <a:off x="457200" y="402336"/>
+            <a:ext cx="8229600" cy="749808"/>
+          </a:xfrm>
+          <a:prstGeom prst="rect">
+            <a:avLst/>
+          </a:prstGeom>
+          <a:noFill/>
+          <a:ln/>
+        </p:spPr>
+        <p:txBody>
+          <a:bodyPr wrap="square" lIns="0" tIns="0" rIns="0" bIns="0" rtlCol="0" anchor="t"/>
+          <a:lstStyle/>
+          <a:p>
+            <a:pPr algn="l" indent="0" marL="0">
+              <a:buNone/>
+            </a:pPr>
+            <a:r>
+              <a:rPr lang="ru-RU" altLang="en-US" sz="2600" b="1" dirty="0">
+                <a:solidFill>
+                  <a:schemeClr val="tx1"/>
+                </a:solidFill>
+                <a:latin typeface="Cambria" pitchFamily="34" charset="0"/>
+                <a:ea typeface="Cambria" pitchFamily="34" charset="-122"/>
+                <a:cs typeface="Cambria" pitchFamily="34" charset="-120"/>
+              </a:rPr>
+              <a:t>Мы запускаем вас сразу</a:t>
+            </a:r>
+            <a:endParaRPr lang="ru-RU" sz="2600" dirty="0"/>
+          </a:p>
+        </p:txBody>
+      </p:sp>
+      <p:sp>
+        <p:nvSpPr>
+          <p:cNvPr id="3" name="Text 1"/>
+          <p:cNvSpPr txBox="1"/>
+          <p:nvPr/>
+        </p:nvSpPr>
+        <p:spPr>
+          <a:xfrm>
+            <a:off x="457200" y="146304"/>
+            <a:ext cx="8229600" cy="237744"/>
+          </a:xfrm>
+          <a:prstGeom prst="rect">
+            <a:avLst/>
+          </a:prstGeom>
+          <a:noFill/>
+          <a:ln/>
+        </p:spPr>
+        <p:txBody>
+          <a:bodyPr wrap="square" lIns="0" tIns="0" rIns="0" bIns="0" rtlCol="0" anchor="ctr"/>
+          <a:lstStyle/>
+          <a:p>
+            <a:pPr algn="l" indent="0" marL="0">
+              <a:buNone/>
+            </a:pPr>
+            <a:r>
+              <a:rPr lang="ru-RU" altLang="en-US" sz="1000" b="1" spc="300" kern="0" dirty="0">
+                <a:solidFill>
+                  <a:schemeClr val="accent1"/>
+                </a:solidFill>
+              </a:rPr>
+              <a:t>ЧТО МЫ ДАЁМ ВАШЕЙ КОМАНДЕ</a:t>
+            </a:r>
+            <a:endParaRPr lang="ru-RU" sz="1000" dirty="0"/>
+          </a:p>
+        </p:txBody>
+      </p:sp>
+      <p:sp>
+        <p:nvSpPr>
+          <p:cNvPr id="4" name="Shape 2"/>
           <p:cNvSpPr/>
           <p:nvPr/>
         </p:nvSpPr>
         <p:spPr>
           <a:xfrm>
-            <a:off x="457200" y="457200"/>
-            <a:ext cx="8229600" cy="4229100"/>
-          </a:xfrm>
-          <a:prstGeom prst="rect">
-            <a:avLst/>
-          </a:prstGeom>
-          <a:ln w="9525">
+            <a:off x="457200" y="1188720"/>
+            <a:ext cx="457200" cy="457200"/>
+          </a:xfrm>
+          <a:prstGeom prst="ellipse">
+            <a:avLst/>
+          </a:prstGeom>
+          <a:solidFill>
+            <a:srgbClr val="F4F1EB"/>
+          </a:solidFill>
+          <a:ln w="12700">
             <a:solidFill>
-              <a:srgbClr val="B5723B"/>
+              <a:srgbClr val="F4F1EB"/>
             </a:solidFill>
             <a:prstDash val="solid"/>
           </a:ln>
         </p:spPr>
       </p:sp>
-      <p:sp>
-        <p:nvSpPr>
-          <p:cNvPr id="3" name="Text 1"/>
-          <p:cNvSpPr txBox="1"/>
-          <p:nvPr/>
-        </p:nvSpPr>
-        <p:spPr>
-          <a:xfrm>
-            <a:off x="868680" y="777240"/>
-            <a:ext cx="7406640" cy="822960"/>
-          </a:xfrm>
-          <a:prstGeom prst="rect">
-            <a:avLst/>
-          </a:prstGeom>
-          <a:noFill/>
-          <a:ln/>
-        </p:spPr>
-        <p:txBody>
-          <a:bodyPr wrap="square" lIns="0" tIns="0" rIns="0" bIns="0" rtlCol="0" anchor="ctr"/>
-          <a:lstStyle/>
-          <a:p>
-            <a:pPr algn="l" indent="0" marL="0">
-              <a:buNone/>
-            </a:pPr>
-            <a:r>
-              <a:rPr lang="ru-RU" altLang="en-US" sz="2800" b="1" dirty="0">
-                <a:solidFill>
-                  <a:schemeClr val="bg1"/>
-                </a:solidFill>
-                <a:latin typeface="Cambria" pitchFamily="34" charset="0"/>
-                <a:ea typeface="Cambria" pitchFamily="34" charset="-122"/>
-                <a:cs typeface="Cambria" pitchFamily="34" charset="-120"/>
-              </a:rPr>
-              <a:t>Следующий шаг</a:t>
-            </a:r>
-            <a:endParaRPr lang="ru-RU" sz="2800" dirty="0"/>
-          </a:p>
-        </p:txBody>
-      </p:sp>
-      <p:sp>
-        <p:nvSpPr>
-          <p:cNvPr id="4" name="Text 2"/>
-          <p:cNvSpPr txBox="1"/>
-          <p:nvPr/>
-        </p:nvSpPr>
-        <p:spPr>
-          <a:xfrm>
-            <a:off x="868680" y="1554480"/>
-            <a:ext cx="7406640" cy="457200"/>
-          </a:xfrm>
-          <a:prstGeom prst="rect">
-            <a:avLst/>
-          </a:prstGeom>
-          <a:noFill/>
-          <a:ln/>
-        </p:spPr>
-        <p:txBody>
-          <a:bodyPr wrap="square" lIns="0" tIns="0" rIns="0" bIns="0" rtlCol="0" anchor="ctr"/>
-          <a:lstStyle/>
-          <a:p>
-            <a:pPr algn="l" indent="0" marL="0">
-              <a:buNone/>
-            </a:pPr>
-            <a:r>
-              <a:rPr lang="ru-RU" altLang="en-US" sz="1300" dirty="0">
-                <a:solidFill>
-                  <a:schemeClr val="accent2"/>
-                </a:solidFill>
-              </a:rPr>
-              <a:t>Короткая встреча для подписания соглашения о сотрудничестве и назначения семинара для вашего отдела продаж</a:t>
-            </a:r>
-            <a:endParaRPr lang="ru-RU" sz="1300" dirty="0"/>
-          </a:p>
-        </p:txBody>
-      </p:sp>
       <p:pic>
         <p:nvPicPr>
-          <p:cNvPr id="5" name="icon FaLocationDot" descr="preencoded.png">    </p:cNvPr>
+          <p:cNvPr id="5" name="icon FaChalkboardUser" descr="preencoded.png">    </p:cNvPr>
           <p:cNvPicPr>
             <a:picLocks noChangeAspect="1"/>
           </p:cNvPicPr>
@@ -2649,7 +3538,7 @@
         </p:blipFill>
         <p:spPr>
           <a:xfrm>
-            <a:off x="868680" y="2286000"/>
+            <a:off x="548640" y="1280160"/>
             <a:ext cx="274320" cy="274320"/>
           </a:xfrm>
           <a:prstGeom prst="rect">
@@ -2665,37 +3554,82 @@
         </p:nvSpPr>
         <p:spPr>
           <a:xfrm>
-            <a:off x="1325880" y="2240280"/>
-            <a:ext cx="6949440" cy="365760"/>
-          </a:xfrm>
-          <a:prstGeom prst="rect">
-            <a:avLst/>
-          </a:prstGeom>
-          <a:noFill/>
-          <a:ln/>
-        </p:spPr>
-        <p:txBody>
-          <a:bodyPr wrap="square" lIns="0" tIns="0" rIns="0" bIns="0" rtlCol="0" anchor="ctr"/>
-          <a:lstStyle/>
-          <a:p>
-            <a:pPr algn="l" indent="0" marL="0">
-              <a:buNone/>
-            </a:pPr>
-            <a:r>
-              <a:rPr lang="ru-RU" altLang="en-US" sz="1200" dirty="0">
-                <a:solidFill>
-                  <a:schemeClr val="bg2"/>
-                </a:solidFill>
-              </a:rPr>
-              <a:t>Шейх Зайед Роуд, Saeed Tower 2, офис 501, Дубай, ОАЭ</a:t>
-            </a:r>
-            <a:endParaRPr lang="ru-RU" sz="1200" dirty="0"/>
-          </a:p>
-        </p:txBody>
+            <a:off x="1097280" y="1170432"/>
+            <a:ext cx="4480560" cy="749808"/>
+          </a:xfrm>
+          <a:prstGeom prst="rect">
+            <a:avLst/>
+          </a:prstGeom>
+          <a:noFill/>
+          <a:ln/>
+        </p:spPr>
+        <p:txBody>
+          <a:bodyPr wrap="square" lIns="0" tIns="0" rIns="0" bIns="0" rtlCol="0" anchor="t"/>
+          <a:lstStyle/>
+          <a:p>
+            <a:pPr algn="l" indent="0" marL="0">
+              <a:spcAft>
+                <a:spcPts val="200"/>
+              </a:spcAft>
+              <a:buNone/>
+            </a:pPr>
+            <a:r>
+              <a:rPr lang="ru-RU" altLang="en-US" sz="1300" b="1" dirty="0">
+                <a:solidFill>
+                  <a:schemeClr val="tx1"/>
+                </a:solidFill>
+              </a:rPr>
+              <a:t>Бесплатный семинар для вашего отдела продаж</a:t>
+            </a:r>
+            <a:endParaRPr lang="ru-RU" sz="1300" dirty="0"/>
+          </a:p>
+          <a:p>
+            <a:pPr algn="l" indent="0" marL="0">
+              <a:spcAft>
+                <a:spcPts val="200"/>
+              </a:spcAft>
+              <a:buNone/>
+            </a:pPr>
+            <a:r>
+              <a:rPr lang="ru-RU" altLang="en-US" sz="1100" dirty="0">
+                <a:solidFill>
+                  <a:schemeClr val="accent3"/>
+                </a:solidFill>
+              </a:rPr>
+              <a:t>Под названием «Как защитить иностранных инвесторов в ОАЭ».</a:t>
+            </a:r>
+            <a:endParaRPr lang="ru-RU" sz="1300" dirty="0"/>
+          </a:p>
+        </p:txBody>
+      </p:sp>
+      <p:sp>
+        <p:nvSpPr>
+          <p:cNvPr id="7" name="Shape 4"/>
+          <p:cNvSpPr/>
+          <p:nvPr/>
+        </p:nvSpPr>
+        <p:spPr>
+          <a:xfrm>
+            <a:off x="457200" y="2011680"/>
+            <a:ext cx="457200" cy="457200"/>
+          </a:xfrm>
+          <a:prstGeom prst="ellipse">
+            <a:avLst/>
+          </a:prstGeom>
+          <a:solidFill>
+            <a:srgbClr val="F4F1EB"/>
+          </a:solidFill>
+          <a:ln w="12700">
+            <a:solidFill>
+              <a:srgbClr val="F4F1EB"/>
+            </a:solidFill>
+            <a:prstDash val="solid"/>
+          </a:ln>
+        </p:spPr>
       </p:sp>
       <p:pic>
         <p:nvPicPr>
-          <p:cNvPr id="7" name="icon FaPhone" descr="preencoded.png">    </p:cNvPr>
+          <p:cNvPr id="8" name="icon FaComments" descr="preencoded.png">    </p:cNvPr>
           <p:cNvPicPr>
             <a:picLocks noChangeAspect="1"/>
           </p:cNvPicPr>
@@ -2709,7 +3643,7 @@
         </p:blipFill>
         <p:spPr>
           <a:xfrm>
-            <a:off x="868680" y="2788920"/>
+            <a:off x="548640" y="2103120"/>
             <a:ext cx="274320" cy="274320"/>
           </a:xfrm>
           <a:prstGeom prst="rect">
@@ -2719,43 +3653,88 @@
       </p:pic>
       <p:sp>
         <p:nvSpPr>
-          <p:cNvPr id="8" name="Text 4"/>
+          <p:cNvPr id="9" name="Text 5"/>
           <p:cNvSpPr txBox="1"/>
           <p:nvPr/>
         </p:nvSpPr>
         <p:spPr>
           <a:xfrm>
-            <a:off x="1325880" y="2743200"/>
-            <a:ext cx="6949440" cy="365760"/>
-          </a:xfrm>
-          <a:prstGeom prst="rect">
-            <a:avLst/>
-          </a:prstGeom>
-          <a:noFill/>
-          <a:ln/>
-        </p:spPr>
-        <p:txBody>
-          <a:bodyPr wrap="square" lIns="0" tIns="0" rIns="0" bIns="0" rtlCol="0" anchor="ctr"/>
-          <a:lstStyle/>
-          <a:p>
-            <a:pPr algn="l" indent="0" marL="0">
-              <a:buNone/>
-            </a:pPr>
-            <a:r>
-              <a:rPr lang="ru-RU" altLang="en-US" sz="1200" dirty="0">
-                <a:solidFill>
-                  <a:schemeClr val="bg2"/>
-                </a:solidFill>
-              </a:rPr>
-              <a:t>+971 4 359 5552  |  Моб. и WhatsApp: +971 52 107 4972</a:t>
-            </a:r>
-            <a:endParaRPr lang="ru-RU" sz="1200" dirty="0"/>
-          </a:p>
-        </p:txBody>
+            <a:off x="1097280" y="1993392"/>
+            <a:ext cx="4480560" cy="749808"/>
+          </a:xfrm>
+          <a:prstGeom prst="rect">
+            <a:avLst/>
+          </a:prstGeom>
+          <a:noFill/>
+          <a:ln/>
+        </p:spPr>
+        <p:txBody>
+          <a:bodyPr wrap="square" lIns="0" tIns="0" rIns="0" bIns="0" rtlCol="0" anchor="t"/>
+          <a:lstStyle/>
+          <a:p>
+            <a:pPr algn="l" indent="0" marL="0">
+              <a:spcAft>
+                <a:spcPts val="200"/>
+              </a:spcAft>
+              <a:buNone/>
+            </a:pPr>
+            <a:r>
+              <a:rPr lang="ru-RU" altLang="en-US" sz="1300" b="1" dirty="0">
+                <a:solidFill>
+                  <a:schemeClr val="tx1"/>
+                </a:solidFill>
+              </a:rPr>
+              <a:t>Бесплатная первая консультация для ваших клиентов</a:t>
+            </a:r>
+            <a:endParaRPr lang="ru-RU" sz="1300" dirty="0"/>
+          </a:p>
+          <a:p>
+            <a:pPr algn="l" indent="0" marL="0">
+              <a:spcAft>
+                <a:spcPts val="200"/>
+              </a:spcAft>
+              <a:buNone/>
+            </a:pPr>
+            <a:r>
+              <a:rPr lang="ru-RU" altLang="en-US" sz="1100" dirty="0">
+                <a:solidFill>
+                  <a:schemeClr val="accent3"/>
+                </a:solidFill>
+              </a:rPr>
+              <a:t>Чтобы объяснить варианты, подходящие каждому клиенту.</a:t>
+            </a:r>
+            <a:endParaRPr lang="ru-RU" sz="1300" dirty="0"/>
+          </a:p>
+        </p:txBody>
+      </p:sp>
+      <p:sp>
+        <p:nvSpPr>
+          <p:cNvPr id="10" name="Shape 6"/>
+          <p:cNvSpPr/>
+          <p:nvPr/>
+        </p:nvSpPr>
+        <p:spPr>
+          <a:xfrm>
+            <a:off x="457200" y="2834640"/>
+            <a:ext cx="457200" cy="457200"/>
+          </a:xfrm>
+          <a:prstGeom prst="ellipse">
+            <a:avLst/>
+          </a:prstGeom>
+          <a:solidFill>
+            <a:srgbClr val="F4F1EB"/>
+          </a:solidFill>
+          <a:ln w="12700">
+            <a:solidFill>
+              <a:srgbClr val="F4F1EB"/>
+            </a:solidFill>
+            <a:prstDash val="solid"/>
+          </a:ln>
+        </p:spPr>
       </p:sp>
       <p:pic>
         <p:nvPicPr>
-          <p:cNvPr id="9" name="icon FaEnvelope" descr="preencoded.png">    </p:cNvPr>
+          <p:cNvPr id="11" name="icon FaFolderOpen" descr="preencoded.png">    </p:cNvPr>
           <p:cNvPicPr>
             <a:picLocks noChangeAspect="1"/>
           </p:cNvPicPr>
@@ -2769,7 +3748,7 @@
         </p:blipFill>
         <p:spPr>
           <a:xfrm>
-            <a:off x="868680" y="3291840"/>
+            <a:off x="548640" y="2926080"/>
             <a:ext cx="274320" cy="274320"/>
           </a:xfrm>
           <a:prstGeom prst="rect">
@@ -2779,43 +3758,88 @@
       </p:pic>
       <p:sp>
         <p:nvSpPr>
-          <p:cNvPr id="10" name="Text 5"/>
+          <p:cNvPr id="12" name="Text 7"/>
           <p:cNvSpPr txBox="1"/>
           <p:nvPr/>
         </p:nvSpPr>
         <p:spPr>
           <a:xfrm>
-            <a:off x="1325880" y="3246120"/>
-            <a:ext cx="6949440" cy="365760"/>
-          </a:xfrm>
-          <a:prstGeom prst="rect">
-            <a:avLst/>
-          </a:prstGeom>
-          <a:noFill/>
-          <a:ln/>
-        </p:spPr>
-        <p:txBody>
-          <a:bodyPr wrap="square" lIns="0" tIns="0" rIns="0" bIns="0" rtlCol="0" anchor="ctr"/>
-          <a:lstStyle/>
-          <a:p>
-            <a:pPr algn="l" indent="0" marL="0">
-              <a:buNone/>
-            </a:pPr>
-            <a:r>
-              <a:rPr lang="ru-RU" altLang="en-US" sz="1200" dirty="0">
-                <a:solidFill>
-                  <a:schemeClr val="bg2"/>
-                </a:solidFill>
-              </a:rPr>
-              <a:t>ward.shueibi@rk-advocates.com  |  rk-advocates.com</a:t>
-            </a:r>
-            <a:endParaRPr lang="ru-RU" sz="1200" dirty="0"/>
-          </a:p>
-        </p:txBody>
+            <a:off x="1097280" y="2816352"/>
+            <a:ext cx="4480560" cy="749808"/>
+          </a:xfrm>
+          <a:prstGeom prst="rect">
+            <a:avLst/>
+          </a:prstGeom>
+          <a:noFill/>
+          <a:ln/>
+        </p:spPr>
+        <p:txBody>
+          <a:bodyPr wrap="square" lIns="0" tIns="0" rIns="0" bIns="0" rtlCol="0" anchor="t"/>
+          <a:lstStyle/>
+          <a:p>
+            <a:pPr algn="l" indent="0" marL="0">
+              <a:spcAft>
+                <a:spcPts val="200"/>
+              </a:spcAft>
+              <a:buNone/>
+            </a:pPr>
+            <a:r>
+              <a:rPr lang="ru-RU" altLang="en-US" sz="1300" b="1" dirty="0">
+                <a:solidFill>
+                  <a:schemeClr val="tx1"/>
+                </a:solidFill>
+              </a:rPr>
+              <a:t>Готовые маркетинговые материалы</a:t>
+            </a:r>
+            <a:endParaRPr lang="ru-RU" sz="1300" dirty="0"/>
+          </a:p>
+          <a:p>
+            <a:pPr algn="l" indent="0" marL="0">
+              <a:spcAft>
+                <a:spcPts val="200"/>
+              </a:spcAft>
+              <a:buNone/>
+            </a:pPr>
+            <a:r>
+              <a:rPr lang="ru-RU" altLang="en-US" sz="1100" dirty="0">
+                <a:solidFill>
+                  <a:schemeClr val="accent3"/>
+                </a:solidFill>
+              </a:rPr>
+              <a:t>Брошюра, текст для WhatsApp, FAQ и презентация.</a:t>
+            </a:r>
+            <a:endParaRPr lang="ru-RU" sz="1300" dirty="0"/>
+          </a:p>
+        </p:txBody>
+      </p:sp>
+      <p:sp>
+        <p:nvSpPr>
+          <p:cNvPr id="13" name="Shape 8"/>
+          <p:cNvSpPr/>
+          <p:nvPr/>
+        </p:nvSpPr>
+        <p:spPr>
+          <a:xfrm>
+            <a:off x="457200" y="3657600"/>
+            <a:ext cx="457200" cy="457200"/>
+          </a:xfrm>
+          <a:prstGeom prst="ellipse">
+            <a:avLst/>
+          </a:prstGeom>
+          <a:solidFill>
+            <a:srgbClr val="F4F1EB"/>
+          </a:solidFill>
+          <a:ln w="12700">
+            <a:solidFill>
+              <a:srgbClr val="F4F1EB"/>
+            </a:solidFill>
+            <a:prstDash val="solid"/>
+          </a:ln>
+        </p:spPr>
       </p:sp>
       <p:pic>
         <p:nvPicPr>
-          <p:cNvPr id="11" name="icon FaClock" descr="preencoded.png">    </p:cNvPr>
+          <p:cNvPr id="14" name="icon FaCrown" descr="preencoded.png">    </p:cNvPr>
           <p:cNvPicPr>
             <a:picLocks noChangeAspect="1"/>
           </p:cNvPicPr>
@@ -2829,7 +3853,7 @@
         </p:blipFill>
         <p:spPr>
           <a:xfrm>
-            <a:off x="868680" y="3794760"/>
+            <a:off x="548640" y="3749040"/>
             <a:ext cx="274320" cy="274320"/>
           </a:xfrm>
           <a:prstGeom prst="rect">
@@ -2839,37 +3863,209 @@
       </p:pic>
       <p:sp>
         <p:nvSpPr>
-          <p:cNvPr id="12" name="Text 6"/>
+          <p:cNvPr id="15" name="Text 9"/>
           <p:cNvSpPr txBox="1"/>
           <p:nvPr/>
         </p:nvSpPr>
         <p:spPr>
           <a:xfrm>
-            <a:off x="1325880" y="3749040"/>
-            <a:ext cx="6949440" cy="365760"/>
-          </a:xfrm>
-          <a:prstGeom prst="rect">
-            <a:avLst/>
-          </a:prstGeom>
-          <a:noFill/>
-          <a:ln/>
-        </p:spPr>
-        <p:txBody>
-          <a:bodyPr wrap="square" lIns="0" tIns="0" rIns="0" bIns="0" rtlCol="0" anchor="ctr"/>
-          <a:lstStyle/>
-          <a:p>
-            <a:pPr algn="l" indent="0" marL="0">
-              <a:buNone/>
-            </a:pPr>
-            <a:r>
-              <a:rPr lang="ru-RU" altLang="en-US" sz="1200" dirty="0">
+            <a:off x="1097280" y="3639312"/>
+            <a:ext cx="4480560" cy="749808"/>
+          </a:xfrm>
+          <a:prstGeom prst="rect">
+            <a:avLst/>
+          </a:prstGeom>
+          <a:noFill/>
+          <a:ln/>
+        </p:spPr>
+        <p:txBody>
+          <a:bodyPr wrap="square" lIns="0" tIns="0" rIns="0" bIns="0" rtlCol="0" anchor="t"/>
+          <a:lstStyle/>
+          <a:p>
+            <a:pPr algn="l" indent="0" marL="0">
+              <a:spcAft>
+                <a:spcPts val="200"/>
+              </a:spcAft>
+              <a:buNone/>
+            </a:pPr>
+            <a:r>
+              <a:rPr lang="ru-RU" altLang="en-US" sz="1300" b="1" dirty="0">
+                <a:solidFill>
+                  <a:schemeClr val="tx1"/>
+                </a:solidFill>
+              </a:rPr>
+              <a:t>Консьерж-сервис для ваших ключевых клиентов</a:t>
+            </a:r>
+            <a:endParaRPr lang="ru-RU" sz="1300" dirty="0"/>
+          </a:p>
+          <a:p>
+            <a:pPr algn="l" indent="0" marL="0">
+              <a:spcAft>
+                <a:spcPts val="200"/>
+              </a:spcAft>
+              <a:buNone/>
+            </a:pPr>
+            <a:r>
+              <a:rPr lang="ru-RU" altLang="en-US" sz="1100" dirty="0">
+                <a:solidFill>
+                  <a:schemeClr val="accent3"/>
+                </a:solidFill>
+              </a:rPr>
+              <a:t>Встречи в офисе или дома у клиента, VIP-сопровождение, ускоренная регистрация.</a:t>
+            </a:r>
+            <a:endParaRPr lang="ru-RU" sz="1300" dirty="0"/>
+          </a:p>
+        </p:txBody>
+      </p:sp>
+      <p:sp>
+        <p:nvSpPr>
+          <p:cNvPr id="16" name="Shape 10"/>
+          <p:cNvSpPr/>
+          <p:nvPr/>
+        </p:nvSpPr>
+        <p:spPr>
+          <a:xfrm>
+            <a:off x="5943600" y="1188720"/>
+            <a:ext cx="2743200" cy="3246120"/>
+          </a:xfrm>
+          <a:prstGeom prst="rect">
+            <a:avLst/>
+          </a:prstGeom>
+          <a:solidFill>
+            <a:srgbClr val="0E2238"/>
+          </a:solidFill>
+          <a:ln w="12700">
+            <a:solidFill>
+              <a:srgbClr val="0E2238"/>
+            </a:solidFill>
+            <a:prstDash val="solid"/>
+          </a:ln>
+        </p:spPr>
+      </p:sp>
+      <p:sp>
+        <p:nvSpPr>
+          <p:cNvPr id="17" name="Shape 11"/>
+          <p:cNvSpPr/>
+          <p:nvPr/>
+        </p:nvSpPr>
+        <p:spPr>
+          <a:xfrm>
+            <a:off x="6053328" y="1298448"/>
+            <a:ext cx="2523744" cy="3026664"/>
+          </a:xfrm>
+          <a:prstGeom prst="rect">
+            <a:avLst/>
+          </a:prstGeom>
+          <a:ln w="9525">
+            <a:solidFill>
+              <a:srgbClr val="B5723B"/>
+            </a:solidFill>
+            <a:prstDash val="solid"/>
+          </a:ln>
+        </p:spPr>
+      </p:sp>
+      <p:sp>
+        <p:nvSpPr>
+          <p:cNvPr id="18" name="Text 12"/>
+          <p:cNvSpPr txBox="1"/>
+          <p:nvPr/>
+        </p:nvSpPr>
+        <p:spPr>
+          <a:xfrm>
+            <a:off x="6263640" y="1508760"/>
+            <a:ext cx="2103120" cy="640080"/>
+          </a:xfrm>
+          <a:prstGeom prst="rect">
+            <a:avLst/>
+          </a:prstGeom>
+          <a:noFill/>
+          <a:ln/>
+        </p:spPr>
+        <p:txBody>
+          <a:bodyPr wrap="square" lIns="0" tIns="0" rIns="0" bIns="0" rtlCol="0" anchor="t"/>
+          <a:lstStyle/>
+          <a:p>
+            <a:pPr algn="l" indent="0" marL="0">
+              <a:buNone/>
+            </a:pPr>
+            <a:r>
+              <a:rPr lang="ru-RU" altLang="en-US" sz="1600" b="1" dirty="0">
+                <a:solidFill>
+                  <a:schemeClr val="accent1"/>
+                </a:solidFill>
+                <a:latin typeface="Cambria" pitchFamily="34" charset="0"/>
+                <a:ea typeface="Cambria" pitchFamily="34" charset="-122"/>
+                <a:cs typeface="Cambria" pitchFamily="34" charset="-120"/>
+              </a:rPr>
+              <a:t>Лучший момент</a:t>
+            </a:r>
+            <a:endParaRPr lang="ru-RU" sz="1600" dirty="0"/>
+          </a:p>
+        </p:txBody>
+      </p:sp>
+      <p:sp>
+        <p:nvSpPr>
+          <p:cNvPr id="19" name="Text 13"/>
+          <p:cNvSpPr txBox="1"/>
+          <p:nvPr/>
+        </p:nvSpPr>
+        <p:spPr>
+          <a:xfrm>
+            <a:off x="6263640" y="2194560"/>
+            <a:ext cx="2103120" cy="2011680"/>
+          </a:xfrm>
+          <a:prstGeom prst="rect">
+            <a:avLst/>
+          </a:prstGeom>
+          <a:noFill/>
+          <a:ln/>
+        </p:spPr>
+        <p:txBody>
+          <a:bodyPr wrap="square" lIns="0" tIns="0" rIns="0" bIns="0" rtlCol="0" anchor="t"/>
+          <a:lstStyle/>
+          <a:p>
+            <a:pPr algn="l" indent="0" marL="0">
+              <a:buNone/>
+            </a:pPr>
+            <a:r>
+              <a:rPr lang="ru-RU" altLang="en-US" sz="1150" dirty="0">
                 <a:solidFill>
                   <a:schemeClr val="bg2"/>
                 </a:solidFill>
               </a:rPr>
-              <a:t>Пн – Пт, 8:30 – 17:30  |  Арабский · Английский · Китайский · Русский</a:t>
-            </a:r>
-            <a:endParaRPr lang="ru-RU" sz="1200" dirty="0"/>
+              <a:t>После бронирования, при подписании SPA, после передачи объекта или при обсуждении долгосрочных инвестиций.</a:t>
+            </a:r>
+            <a:endParaRPr lang="ru-RU" sz="1150" dirty="0"/>
+          </a:p>
+        </p:txBody>
+      </p:sp>
+      <p:sp>
+        <p:nvSpPr>
+          <p:cNvPr id="20" name="Text 0"/>
+          <p:cNvSpPr/>
+          <p:nvPr>
+            <p:ph idx="101" type="title" hasCustomPrompt="1"/>
+          </p:nvPr>
+        </p:nvSpPr>
+        <p:spPr>
+          <a:xfrm>
+            <a:off x="457200" y="420624"/>
+            <a:ext cx="8229600" cy="731520"/>
+          </a:xfrm>
+          <a:prstGeom prst="rect">
+            <a:avLst/>
+          </a:prstGeom>
+          <a:noFill/>
+          <a:ln/>
+        </p:spPr>
+        <p:txBody>
+          <a:bodyPr wrap="square" lIns="0" tIns="0" rIns="0" bIns="0" rtlCol="0" anchor="t"/>
+          <a:lstStyle/>
+          <a:p>
+            <a:pPr algn="l" indent="0" marL="0">
+              <a:buNone/>
+            </a:pPr>
+            <a:endParaRPr lang="en-US" sz="2600" dirty="0"/>
           </a:p>
         </p:txBody>
       </p:sp>
@@ -2903,7 +4099,7 @@
             <a:lvl1pPr>
               <a:defRPr sz="900">
                 <a:solidFill>
-                  <a:srgbClr val="D9B38C"/>
+                  <a:srgbClr val="6E7B88"/>
                 </a:solidFill>
               </a:defRPr>
             </a:lvl1pPr>
@@ -2913,6 +4109,1319 @@
             <a:fld id="{F7021451-1387-4CA6-816F-3879F97B5CBC}" type="slidenum">
               <a:rPr b="0" lang="en-US"/>
               <a:t>11</a:t>
+            </a:fld>
+            <a:endParaRPr lang="en-US"/>
+          </a:p>
+        </p:txBody>
+      </p:sp>
+    </p:spTree>
+  </p:cSld>
+  <p:clrMapOvr>
+    <a:masterClrMapping/>
+  </p:clrMapOvr>
+</p:sld>
+</file>
+
+<file path=ppt/slides/slide12.xml><?xml version="1.0" encoding="utf-8"?>
+<p:sld xmlns:a="http://schemas.openxmlformats.org/drawingml/2006/main" xmlns:r="http://schemas.openxmlformats.org/officeDocument/2006/relationships" xmlns:p="http://schemas.openxmlformats.org/presentationml/2006/main">
+  <p:cSld name="Slide 12">
+    <p:spTree>
+      <p:nvGrpSpPr>
+        <p:cNvPr id="1" name=""/>
+        <p:cNvGrpSpPr/>
+        <p:nvPr/>
+      </p:nvGrpSpPr>
+      <p:grpSpPr>
+        <a:xfrm>
+          <a:off x="0" y="0"/>
+          <a:ext cx="0" cy="0"/>
+          <a:chOff x="0" y="0"/>
+          <a:chExt cx="0" cy="0"/>
+        </a:xfrm>
+      </p:grpSpPr>
+      <p:sp>
+        <p:nvSpPr>
+          <p:cNvPr id="2" name="Text 0"/>
+          <p:cNvSpPr txBox="1"/>
+          <p:nvPr/>
+        </p:nvSpPr>
+        <p:spPr>
+          <a:xfrm>
+            <a:off x="457200" y="402336"/>
+            <a:ext cx="8229600" cy="749808"/>
+          </a:xfrm>
+          <a:prstGeom prst="rect">
+            <a:avLst/>
+          </a:prstGeom>
+          <a:noFill/>
+          <a:ln/>
+        </p:spPr>
+        <p:txBody>
+          <a:bodyPr wrap="square" lIns="0" tIns="0" rIns="0" bIns="0" rtlCol="0" anchor="t"/>
+          <a:lstStyle/>
+          <a:p>
+            <a:pPr algn="l" indent="0" marL="0">
+              <a:buNone/>
+            </a:pPr>
+            <a:r>
+              <a:rPr lang="ru-RU" altLang="en-US" sz="2600" b="1" dirty="0">
+                <a:solidFill>
+                  <a:schemeClr val="tx1"/>
+                </a:solidFill>
+                <a:latin typeface="Cambria" pitchFamily="34" charset="0"/>
+                <a:ea typeface="Cambria" pitchFamily="34" charset="-122"/>
+                <a:cs typeface="Cambria" pitchFamily="34" charset="-120"/>
+              </a:rPr>
+              <a:t>Соглашение вкратце</a:t>
+            </a:r>
+            <a:endParaRPr lang="ru-RU" sz="2600" dirty="0"/>
+          </a:p>
+        </p:txBody>
+      </p:sp>
+      <p:sp>
+        <p:nvSpPr>
+          <p:cNvPr id="3" name="Text 1"/>
+          <p:cNvSpPr txBox="1"/>
+          <p:nvPr/>
+        </p:nvSpPr>
+        <p:spPr>
+          <a:xfrm>
+            <a:off x="457200" y="146304"/>
+            <a:ext cx="8229600" cy="237744"/>
+          </a:xfrm>
+          <a:prstGeom prst="rect">
+            <a:avLst/>
+          </a:prstGeom>
+          <a:noFill/>
+          <a:ln/>
+        </p:spPr>
+        <p:txBody>
+          <a:bodyPr wrap="square" lIns="0" tIns="0" rIns="0" bIns="0" rtlCol="0" anchor="ctr"/>
+          <a:lstStyle/>
+          <a:p>
+            <a:pPr algn="l" indent="0" marL="0">
+              <a:buNone/>
+            </a:pPr>
+            <a:r>
+              <a:rPr lang="ru-RU" altLang="en-US" sz="1000" b="1" spc="300" kern="0" dirty="0">
+                <a:solidFill>
+                  <a:schemeClr val="accent1"/>
+                </a:solidFill>
+              </a:rPr>
+              <a:t>ПРАВОВАЯ СТРУКТУРА</a:t>
+            </a:r>
+            <a:endParaRPr lang="ru-RU" sz="1000" dirty="0"/>
+          </a:p>
+        </p:txBody>
+      </p:sp>
+      <p:sp>
+        <p:nvSpPr>
+          <p:cNvPr id="4" name="Shape 2"/>
+          <p:cNvSpPr/>
+          <p:nvPr/>
+        </p:nvSpPr>
+        <p:spPr>
+          <a:xfrm>
+            <a:off x="457200" y="1188720"/>
+            <a:ext cx="457200" cy="457200"/>
+          </a:xfrm>
+          <a:prstGeom prst="ellipse">
+            <a:avLst/>
+          </a:prstGeom>
+          <a:solidFill>
+            <a:srgbClr val="F4F1EB"/>
+          </a:solidFill>
+          <a:ln w="12700">
+            <a:solidFill>
+              <a:srgbClr val="F4F1EB"/>
+            </a:solidFill>
+            <a:prstDash val="solid"/>
+          </a:ln>
+        </p:spPr>
+      </p:sp>
+      <p:pic>
+        <p:nvPicPr>
+          <p:cNvPr id="5" name="icon FaArrowRightArrowLeft" descr="preencoded.png">    </p:cNvPr>
+          <p:cNvPicPr>
+            <a:picLocks noChangeAspect="1"/>
+          </p:cNvPicPr>
+          <p:nvPr/>
+        </p:nvPicPr>
+        <p:blipFill>
+          <a:blip r:embed="rId1"/>
+          <a:stretch>
+            <a:fillRect/>
+          </a:stretch>
+        </p:blipFill>
+        <p:spPr>
+          <a:xfrm>
+            <a:off x="548640" y="1280160"/>
+            <a:ext cx="274320" cy="274320"/>
+          </a:xfrm>
+          <a:prstGeom prst="rect">
+            <a:avLst/>
+          </a:prstGeom>
+        </p:spPr>
+      </p:pic>
+      <p:sp>
+        <p:nvSpPr>
+          <p:cNvPr id="6" name="Text 3"/>
+          <p:cNvSpPr txBox="1"/>
+          <p:nvPr/>
+        </p:nvSpPr>
+        <p:spPr>
+          <a:xfrm>
+            <a:off x="1097280" y="1170432"/>
+            <a:ext cx="7589520" cy="585216"/>
+          </a:xfrm>
+          <a:prstGeom prst="rect">
+            <a:avLst/>
+          </a:prstGeom>
+          <a:noFill/>
+          <a:ln/>
+        </p:spPr>
+        <p:txBody>
+          <a:bodyPr wrap="square" lIns="0" tIns="0" rIns="0" bIns="0" rtlCol="0" anchor="t"/>
+          <a:lstStyle/>
+          <a:p>
+            <a:pPr algn="l" indent="0" marL="0">
+              <a:spcAft>
+                <a:spcPts val="200"/>
+              </a:spcAft>
+              <a:buNone/>
+            </a:pPr>
+            <a:r>
+              <a:rPr lang="ru-RU" altLang="en-US" sz="1300" b="1" dirty="0">
+                <a:solidFill>
+                  <a:schemeClr val="tx1"/>
+                </a:solidFill>
+              </a:rPr>
+              <a:t>Механизм направления клиентов</a:t>
+            </a:r>
+            <a:endParaRPr lang="ru-RU" sz="1300" dirty="0"/>
+          </a:p>
+          <a:p>
+            <a:pPr algn="l" indent="0" marL="0">
+              <a:spcAft>
+                <a:spcPts val="200"/>
+              </a:spcAft>
+              <a:buNone/>
+            </a:pPr>
+            <a:r>
+              <a:rPr lang="ru-RU" altLang="en-US" sz="1100" dirty="0">
+                <a:solidFill>
+                  <a:schemeClr val="accent3"/>
+                </a:solidFill>
+              </a:rPr>
+              <a:t>Стандартное представление и контакт с нашей стороны в течение одного рабочего дня.</a:t>
+            </a:r>
+            <a:endParaRPr lang="ru-RU" sz="1300" dirty="0"/>
+          </a:p>
+        </p:txBody>
+      </p:sp>
+      <p:sp>
+        <p:nvSpPr>
+          <p:cNvPr id="7" name="Shape 4"/>
+          <p:cNvSpPr/>
+          <p:nvPr/>
+        </p:nvSpPr>
+        <p:spPr>
+          <a:xfrm>
+            <a:off x="457200" y="1847088"/>
+            <a:ext cx="457200" cy="457200"/>
+          </a:xfrm>
+          <a:prstGeom prst="ellipse">
+            <a:avLst/>
+          </a:prstGeom>
+          <a:solidFill>
+            <a:srgbClr val="F4F1EB"/>
+          </a:solidFill>
+          <a:ln w="12700">
+            <a:solidFill>
+              <a:srgbClr val="F4F1EB"/>
+            </a:solidFill>
+            <a:prstDash val="solid"/>
+          </a:ln>
+        </p:spPr>
+      </p:sp>
+      <p:pic>
+        <p:nvPicPr>
+          <p:cNvPr id="8" name="icon FaPercent" descr="preencoded.png">    </p:cNvPr>
+          <p:cNvPicPr>
+            <a:picLocks noChangeAspect="1"/>
+          </p:cNvPicPr>
+          <p:nvPr/>
+        </p:nvPicPr>
+        <p:blipFill>
+          <a:blip r:embed="rId2"/>
+          <a:stretch>
+            <a:fillRect/>
+          </a:stretch>
+        </p:blipFill>
+        <p:spPr>
+          <a:xfrm>
+            <a:off x="548640" y="1938528"/>
+            <a:ext cx="274320" cy="274320"/>
+          </a:xfrm>
+          <a:prstGeom prst="rect">
+            <a:avLst/>
+          </a:prstGeom>
+        </p:spPr>
+      </p:pic>
+      <p:sp>
+        <p:nvSpPr>
+          <p:cNvPr id="9" name="Text 5"/>
+          <p:cNvSpPr txBox="1"/>
+          <p:nvPr/>
+        </p:nvSpPr>
+        <p:spPr>
+          <a:xfrm>
+            <a:off x="1097280" y="1828800"/>
+            <a:ext cx="7589520" cy="585216"/>
+          </a:xfrm>
+          <a:prstGeom prst="rect">
+            <a:avLst/>
+          </a:prstGeom>
+          <a:noFill/>
+          <a:ln/>
+        </p:spPr>
+        <p:txBody>
+          <a:bodyPr wrap="square" lIns="0" tIns="0" rIns="0" bIns="0" rtlCol="0" anchor="t"/>
+          <a:lstStyle/>
+          <a:p>
+            <a:pPr algn="l" indent="0" marL="0">
+              <a:spcAft>
+                <a:spcPts val="200"/>
+              </a:spcAft>
+              <a:buNone/>
+            </a:pPr>
+            <a:r>
+              <a:rPr lang="ru-RU" altLang="en-US" sz="1300" b="1" dirty="0">
+                <a:solidFill>
+                  <a:schemeClr val="tx1"/>
+                </a:solidFill>
+              </a:rPr>
+              <a:t>Размер комиссии и выплата</a:t>
+            </a:r>
+            <a:endParaRPr lang="ru-RU" sz="1300" dirty="0"/>
+          </a:p>
+          <a:p>
+            <a:pPr algn="l" indent="0" marL="0">
+              <a:spcAft>
+                <a:spcPts val="200"/>
+              </a:spcAft>
+              <a:buNone/>
+            </a:pPr>
+            <a:r>
+              <a:rPr lang="ru-RU" altLang="en-US" sz="1100" dirty="0">
+                <a:solidFill>
+                  <a:schemeClr val="accent3"/>
+                </a:solidFill>
+              </a:rPr>
+              <a:t>Фиксированный процент или сумма за клиента, выплачивается ежемесячно.</a:t>
+            </a:r>
+            <a:endParaRPr lang="ru-RU" sz="1300" dirty="0"/>
+          </a:p>
+        </p:txBody>
+      </p:sp>
+      <p:sp>
+        <p:nvSpPr>
+          <p:cNvPr id="10" name="Shape 6"/>
+          <p:cNvSpPr/>
+          <p:nvPr/>
+        </p:nvSpPr>
+        <p:spPr>
+          <a:xfrm>
+            <a:off x="457200" y="2505456"/>
+            <a:ext cx="457200" cy="457200"/>
+          </a:xfrm>
+          <a:prstGeom prst="ellipse">
+            <a:avLst/>
+          </a:prstGeom>
+          <a:solidFill>
+            <a:srgbClr val="F4F1EB"/>
+          </a:solidFill>
+          <a:ln w="12700">
+            <a:solidFill>
+              <a:srgbClr val="F4F1EB"/>
+            </a:solidFill>
+            <a:prstDash val="solid"/>
+          </a:ln>
+        </p:spPr>
+      </p:sp>
+      <p:pic>
+        <p:nvPicPr>
+          <p:cNvPr id="11" name="icon FaLock" descr="preencoded.png">    </p:cNvPr>
+          <p:cNvPicPr>
+            <a:picLocks noChangeAspect="1"/>
+          </p:cNvPicPr>
+          <p:nvPr/>
+        </p:nvPicPr>
+        <p:blipFill>
+          <a:blip r:embed="rId3"/>
+          <a:stretch>
+            <a:fillRect/>
+          </a:stretch>
+        </p:blipFill>
+        <p:spPr>
+          <a:xfrm>
+            <a:off x="548640" y="2596896"/>
+            <a:ext cx="274320" cy="274320"/>
+          </a:xfrm>
+          <a:prstGeom prst="rect">
+            <a:avLst/>
+          </a:prstGeom>
+        </p:spPr>
+      </p:pic>
+      <p:sp>
+        <p:nvSpPr>
+          <p:cNvPr id="12" name="Text 7"/>
+          <p:cNvSpPr txBox="1"/>
+          <p:nvPr/>
+        </p:nvSpPr>
+        <p:spPr>
+          <a:xfrm>
+            <a:off x="1097280" y="2487168"/>
+            <a:ext cx="7589520" cy="585216"/>
+          </a:xfrm>
+          <a:prstGeom prst="rect">
+            <a:avLst/>
+          </a:prstGeom>
+          <a:noFill/>
+          <a:ln/>
+        </p:spPr>
+        <p:txBody>
+          <a:bodyPr wrap="square" lIns="0" tIns="0" rIns="0" bIns="0" rtlCol="0" anchor="t"/>
+          <a:lstStyle/>
+          <a:p>
+            <a:pPr algn="l" indent="0" marL="0">
+              <a:spcAft>
+                <a:spcPts val="200"/>
+              </a:spcAft>
+              <a:buNone/>
+            </a:pPr>
+            <a:r>
+              <a:rPr lang="ru-RU" altLang="en-US" sz="1300" b="1" dirty="0">
+                <a:solidFill>
+                  <a:schemeClr val="tx1"/>
+                </a:solidFill>
+              </a:rPr>
+              <a:t>Конфиденциальность и защита данных</a:t>
+            </a:r>
+            <a:endParaRPr lang="ru-RU" sz="1300" dirty="0"/>
+          </a:p>
+          <a:p>
+            <a:pPr algn="l" indent="0" marL="0">
+              <a:spcAft>
+                <a:spcPts val="200"/>
+              </a:spcAft>
+              <a:buNone/>
+            </a:pPr>
+            <a:r>
+              <a:rPr lang="ru-RU" altLang="en-US" sz="1100" dirty="0">
+                <a:solidFill>
+                  <a:schemeClr val="accent3"/>
+                </a:solidFill>
+              </a:rPr>
+              <a:t>NDA и полная защита данных ваших клиентов.</a:t>
+            </a:r>
+            <a:endParaRPr lang="ru-RU" sz="1300" dirty="0"/>
+          </a:p>
+        </p:txBody>
+      </p:sp>
+      <p:sp>
+        <p:nvSpPr>
+          <p:cNvPr id="13" name="Shape 8"/>
+          <p:cNvSpPr/>
+          <p:nvPr/>
+        </p:nvSpPr>
+        <p:spPr>
+          <a:xfrm>
+            <a:off x="457200" y="3163824"/>
+            <a:ext cx="457200" cy="457200"/>
+          </a:xfrm>
+          <a:prstGeom prst="ellipse">
+            <a:avLst/>
+          </a:prstGeom>
+          <a:solidFill>
+            <a:srgbClr val="F4F1EB"/>
+          </a:solidFill>
+          <a:ln w="12700">
+            <a:solidFill>
+              <a:srgbClr val="F4F1EB"/>
+            </a:solidFill>
+            <a:prstDash val="solid"/>
+          </a:ln>
+        </p:spPr>
+      </p:sp>
+      <p:pic>
+        <p:nvPicPr>
+          <p:cNvPr id="14" name="icon FaUserShield" descr="preencoded.png">    </p:cNvPr>
+          <p:cNvPicPr>
+            <a:picLocks noChangeAspect="1"/>
+          </p:cNvPicPr>
+          <p:nvPr/>
+        </p:nvPicPr>
+        <p:blipFill>
+          <a:blip r:embed="rId4"/>
+          <a:stretch>
+            <a:fillRect/>
+          </a:stretch>
+        </p:blipFill>
+        <p:spPr>
+          <a:xfrm>
+            <a:off x="548640" y="3255264"/>
+            <a:ext cx="274320" cy="274320"/>
+          </a:xfrm>
+          <a:prstGeom prst="rect">
+            <a:avLst/>
+          </a:prstGeom>
+        </p:spPr>
+      </p:pic>
+      <p:sp>
+        <p:nvSpPr>
+          <p:cNvPr id="15" name="Text 9"/>
+          <p:cNvSpPr txBox="1"/>
+          <p:nvPr/>
+        </p:nvSpPr>
+        <p:spPr>
+          <a:xfrm>
+            <a:off x="1097280" y="3145536"/>
+            <a:ext cx="7589520" cy="585216"/>
+          </a:xfrm>
+          <a:prstGeom prst="rect">
+            <a:avLst/>
+          </a:prstGeom>
+          <a:noFill/>
+          <a:ln/>
+        </p:spPr>
+        <p:txBody>
+          <a:bodyPr wrap="square" lIns="0" tIns="0" rIns="0" bIns="0" rtlCol="0" anchor="t"/>
+          <a:lstStyle/>
+          <a:p>
+            <a:pPr algn="l" indent="0" marL="0">
+              <a:spcAft>
+                <a:spcPts val="200"/>
+              </a:spcAft>
+              <a:buNone/>
+            </a:pPr>
+            <a:r>
+              <a:rPr lang="ru-RU" altLang="en-US" sz="1300" b="1" dirty="0">
+                <a:solidFill>
+                  <a:schemeClr val="tx1"/>
+                </a:solidFill>
+              </a:rPr>
+              <a:t>Никакой юридической ответственности для вас</a:t>
+            </a:r>
+            <a:endParaRPr lang="ru-RU" sz="1300" dirty="0"/>
+          </a:p>
+          <a:p>
+            <a:pPr algn="l" indent="0" marL="0">
+              <a:spcAft>
+                <a:spcPts val="200"/>
+              </a:spcAft>
+              <a:buNone/>
+            </a:pPr>
+            <a:r>
+              <a:rPr lang="ru-RU" altLang="en-US" sz="1100" dirty="0">
+                <a:solidFill>
+                  <a:schemeClr val="accent3"/>
+                </a:solidFill>
+              </a:rPr>
+              <a:t>Вы не даёте юридических консультаций; всю профессиональную ответственность несём мы.</a:t>
+            </a:r>
+            <a:endParaRPr lang="ru-RU" sz="1300" dirty="0"/>
+          </a:p>
+        </p:txBody>
+      </p:sp>
+      <p:sp>
+        <p:nvSpPr>
+          <p:cNvPr id="16" name="Shape 10"/>
+          <p:cNvSpPr/>
+          <p:nvPr/>
+        </p:nvSpPr>
+        <p:spPr>
+          <a:xfrm>
+            <a:off x="457200" y="3822192"/>
+            <a:ext cx="457200" cy="457200"/>
+          </a:xfrm>
+          <a:prstGeom prst="ellipse">
+            <a:avLst/>
+          </a:prstGeom>
+          <a:solidFill>
+            <a:srgbClr val="F4F1EB"/>
+          </a:solidFill>
+          <a:ln w="12700">
+            <a:solidFill>
+              <a:srgbClr val="F4F1EB"/>
+            </a:solidFill>
+            <a:prstDash val="solid"/>
+          </a:ln>
+        </p:spPr>
+      </p:sp>
+      <p:pic>
+        <p:nvPicPr>
+          <p:cNvPr id="17" name="icon FaBan" descr="preencoded.png">    </p:cNvPr>
+          <p:cNvPicPr>
+            <a:picLocks noChangeAspect="1"/>
+          </p:cNvPicPr>
+          <p:nvPr/>
+        </p:nvPicPr>
+        <p:blipFill>
+          <a:blip r:embed="rId5"/>
+          <a:stretch>
+            <a:fillRect/>
+          </a:stretch>
+        </p:blipFill>
+        <p:spPr>
+          <a:xfrm>
+            <a:off x="548640" y="3913632"/>
+            <a:ext cx="274320" cy="274320"/>
+          </a:xfrm>
+          <a:prstGeom prst="rect">
+            <a:avLst/>
+          </a:prstGeom>
+        </p:spPr>
+      </p:pic>
+      <p:sp>
+        <p:nvSpPr>
+          <p:cNvPr id="18" name="Text 11"/>
+          <p:cNvSpPr txBox="1"/>
+          <p:nvPr/>
+        </p:nvSpPr>
+        <p:spPr>
+          <a:xfrm>
+            <a:off x="1097280" y="3803904"/>
+            <a:ext cx="7589520" cy="585216"/>
+          </a:xfrm>
+          <a:prstGeom prst="rect">
+            <a:avLst/>
+          </a:prstGeom>
+          <a:noFill/>
+          <a:ln/>
+        </p:spPr>
+        <p:txBody>
+          <a:bodyPr wrap="square" lIns="0" tIns="0" rIns="0" bIns="0" rtlCol="0" anchor="t"/>
+          <a:lstStyle/>
+          <a:p>
+            <a:pPr algn="l" indent="0" marL="0">
+              <a:spcAft>
+                <a:spcPts val="200"/>
+              </a:spcAft>
+              <a:buNone/>
+            </a:pPr>
+            <a:r>
+              <a:rPr lang="ru-RU" altLang="en-US" sz="1300" b="1" dirty="0">
+                <a:solidFill>
+                  <a:schemeClr val="tx1"/>
+                </a:solidFill>
+              </a:rPr>
+              <a:t>Запрет обхода (non-circumvention)</a:t>
+            </a:r>
+            <a:endParaRPr lang="ru-RU" sz="1300" dirty="0"/>
+          </a:p>
+          <a:p>
+            <a:pPr algn="l" indent="0" marL="0">
+              <a:spcAft>
+                <a:spcPts val="200"/>
+              </a:spcAft>
+              <a:buNone/>
+            </a:pPr>
+            <a:r>
+              <a:rPr lang="ru-RU" altLang="en-US" sz="1100" dirty="0">
+                <a:solidFill>
+                  <a:schemeClr val="accent3"/>
+                </a:solidFill>
+              </a:rPr>
+              <a:t>Ваши отношения с клиентами защищены на протяжении всего партнёрства.</a:t>
+            </a:r>
+            <a:endParaRPr lang="ru-RU" sz="1300" dirty="0"/>
+          </a:p>
+        </p:txBody>
+      </p:sp>
+      <p:sp>
+        <p:nvSpPr>
+          <p:cNvPr id="19" name="Text 0"/>
+          <p:cNvSpPr/>
+          <p:nvPr>
+            <p:ph idx="101" type="title" hasCustomPrompt="1"/>
+          </p:nvPr>
+        </p:nvSpPr>
+        <p:spPr>
+          <a:xfrm>
+            <a:off x="457200" y="420624"/>
+            <a:ext cx="8229600" cy="731520"/>
+          </a:xfrm>
+          <a:prstGeom prst="rect">
+            <a:avLst/>
+          </a:prstGeom>
+          <a:noFill/>
+          <a:ln/>
+        </p:spPr>
+        <p:txBody>
+          <a:bodyPr wrap="square" lIns="0" tIns="0" rIns="0" bIns="0" rtlCol="0" anchor="t"/>
+          <a:lstStyle/>
+          <a:p>
+            <a:pPr algn="l" indent="0" marL="0">
+              <a:buNone/>
+            </a:pPr>
+            <a:endParaRPr lang="en-US" sz="2600" dirty="0"/>
+          </a:p>
+        </p:txBody>
+      </p:sp>
+      <p:sp>
+        <p:nvSpPr>
+          <p:cNvPr id="25" name="Slide Number Placeholder 0"/>
+          <p:cNvSpPr>
+            <a:spLocks noGrp="1"/>
+          </p:cNvSpPr>
+          <p:nvPr>
+            <p:ph type="sldNum" sz="quarter" idx="4294967295"/>
+          </p:nvPr>
+        </p:nvSpPr>
+        <p:spPr>
+          <a:xfrm>
+            <a:off x="8229600" y="4626864"/>
+            <a:ext cx="548640" cy="384048"/>
+          </a:xfrm>
+          <a:prstGeom prst="rect">
+            <a:avLst/>
+          </a:prstGeom>
+          <a:extLst>
+            <a:ext uri="{C572A759-6A51-4108-AA02-DFA0A04FC94B}">
+              <ma14:wrappingTextBoxFlag xmlns:ma14="http://schemas.microsoft.com/office/mac/drawingml/2011/main" val="0"/>
+            </a:ext>
+          </a:extLst>
+        </p:spPr>
+        <p:txBody>
+          <a:bodyPr anchor="ctr"/>
+          <a:lstStyle>
+            <a:lvl1pPr>
+              <a:defRPr sz="900">
+                <a:solidFill>
+                  <a:srgbClr val="6E7B88"/>
+                </a:solidFill>
+              </a:defRPr>
+            </a:lvl1pPr>
+          </a:lstStyle>
+          <a:p>
+            <a:pPr algn="r"/>
+            <a:fld id="{F7021451-1387-4CA6-816F-3879F97B5CBC}" type="slidenum">
+              <a:rPr b="0" lang="en-US"/>
+              <a:t>12</a:t>
+            </a:fld>
+            <a:endParaRPr lang="en-US"/>
+          </a:p>
+        </p:txBody>
+      </p:sp>
+    </p:spTree>
+  </p:cSld>
+  <p:clrMapOvr>
+    <a:masterClrMapping/>
+  </p:clrMapOvr>
+</p:sld>
+</file>
+
+<file path=ppt/slides/slide13.xml><?xml version="1.0" encoding="utf-8"?>
+<p:sld xmlns:a="http://schemas.openxmlformats.org/drawingml/2006/main" xmlns:r="http://schemas.openxmlformats.org/officeDocument/2006/relationships" xmlns:p="http://schemas.openxmlformats.org/presentationml/2006/main">
+  <p:cSld name="Slide 13">
+    <p:spTree>
+      <p:nvGrpSpPr>
+        <p:cNvPr id="1" name=""/>
+        <p:cNvGrpSpPr/>
+        <p:nvPr/>
+      </p:nvGrpSpPr>
+      <p:grpSpPr>
+        <a:xfrm>
+          <a:off x="0" y="0"/>
+          <a:ext cx="0" cy="0"/>
+          <a:chOff x="0" y="0"/>
+          <a:chExt cx="0" cy="0"/>
+        </a:xfrm>
+      </p:grpSpPr>
+      <p:sp>
+        <p:nvSpPr>
+          <p:cNvPr id="2" name="Shape 0"/>
+          <p:cNvSpPr/>
+          <p:nvPr/>
+        </p:nvSpPr>
+        <p:spPr>
+          <a:xfrm>
+            <a:off x="457200" y="457200"/>
+            <a:ext cx="8229600" cy="4023360"/>
+          </a:xfrm>
+          <a:prstGeom prst="rect">
+            <a:avLst/>
+          </a:prstGeom>
+          <a:ln w="9525">
+            <a:solidFill>
+              <a:srgbClr val="B5723B"/>
+            </a:solidFill>
+            <a:prstDash val="solid"/>
+          </a:ln>
+        </p:spPr>
+      </p:sp>
+      <p:sp>
+        <p:nvSpPr>
+          <p:cNvPr id="3" name="Text 1"/>
+          <p:cNvSpPr txBox="1"/>
+          <p:nvPr/>
+        </p:nvSpPr>
+        <p:spPr>
+          <a:xfrm>
+            <a:off x="822960" y="640080"/>
+            <a:ext cx="914400" cy="1005840"/>
+          </a:xfrm>
+          <a:prstGeom prst="rect">
+            <a:avLst/>
+          </a:prstGeom>
+          <a:noFill/>
+          <a:ln/>
+        </p:spPr>
+        <p:txBody>
+          <a:bodyPr wrap="square" lIns="0" tIns="0" rIns="0" bIns="0" rtlCol="0" anchor="t"/>
+          <a:lstStyle/>
+          <a:p>
+            <a:pPr algn="l" indent="0" marL="0">
+              <a:buNone/>
+            </a:pPr>
+            <a:r>
+              <a:rPr lang="en-US" sz="7200" dirty="0">
+                <a:solidFill>
+                  <a:schemeClr val="accent1"/>
+                </a:solidFill>
+                <a:latin typeface="Cambria" pitchFamily="34" charset="0"/>
+                <a:ea typeface="Cambria" pitchFamily="34" charset="-122"/>
+                <a:cs typeface="Cambria" pitchFamily="34" charset="-120"/>
+              </a:rPr>
+              <a:t>“</a:t>
+            </a:r>
+            <a:endParaRPr lang="en-US" sz="7200" dirty="0"/>
+          </a:p>
+        </p:txBody>
+      </p:sp>
+      <p:sp>
+        <p:nvSpPr>
+          <p:cNvPr id="4" name="Text 2"/>
+          <p:cNvSpPr txBox="1"/>
+          <p:nvPr/>
+        </p:nvSpPr>
+        <p:spPr>
+          <a:xfrm>
+            <a:off x="914400" y="1463040"/>
+            <a:ext cx="7315200" cy="2011680"/>
+          </a:xfrm>
+          <a:prstGeom prst="rect">
+            <a:avLst/>
+          </a:prstGeom>
+          <a:noFill/>
+          <a:ln/>
+        </p:spPr>
+        <p:txBody>
+          <a:bodyPr wrap="square" lIns="0" tIns="0" rIns="0" bIns="0" rtlCol="0" anchor="ctr"/>
+          <a:lstStyle/>
+          <a:p>
+            <a:pPr algn="l" indent="0" marL="0">
+              <a:buNone/>
+            </a:pPr>
+            <a:r>
+              <a:rPr lang="ru-RU" altLang="en-US" sz="2200" i="1" dirty="0">
+                <a:solidFill>
+                  <a:schemeClr val="bg1"/>
+                </a:solidFill>
+                <a:latin typeface="Cambria" pitchFamily="34" charset="0"/>
+                <a:ea typeface="Cambria" pitchFamily="34" charset="-122"/>
+                <a:cs typeface="Cambria" pitchFamily="34" charset="-120"/>
+              </a:rPr>
+              <a:t>Мы не продаём «завещание». Мы помогаем вам защищать клиентов, повышать ценность ваших услуг и укреплять доверие инвесторов к вам.</a:t>
+            </a:r>
+            <a:endParaRPr lang="ru-RU" sz="2200" dirty="0"/>
+          </a:p>
+        </p:txBody>
+      </p:sp>
+      <p:sp>
+        <p:nvSpPr>
+          <p:cNvPr id="5" name="Text 3"/>
+          <p:cNvSpPr txBox="1"/>
+          <p:nvPr/>
+        </p:nvSpPr>
+        <p:spPr>
+          <a:xfrm>
+            <a:off x="914400" y="3566160"/>
+            <a:ext cx="7315200" cy="457200"/>
+          </a:xfrm>
+          <a:prstGeom prst="rect">
+            <a:avLst/>
+          </a:prstGeom>
+          <a:noFill/>
+          <a:ln/>
+        </p:spPr>
+        <p:txBody>
+          <a:bodyPr wrap="square" lIns="0" tIns="0" rIns="0" bIns="0" rtlCol="0" anchor="ctr"/>
+          <a:lstStyle/>
+          <a:p>
+            <a:pPr algn="l" indent="0" marL="0">
+              <a:buNone/>
+            </a:pPr>
+            <a:r>
+              <a:rPr lang="ru-RU" altLang="en-US" sz="1200" dirty="0">
+                <a:solidFill>
+                  <a:schemeClr val="accent2"/>
+                </a:solidFill>
+              </a:rPr>
+              <a:t>Rashid Alkaitoob Advocates &amp; Legal Consultants</a:t>
+            </a:r>
+            <a:endParaRPr lang="ru-RU" sz="1200" dirty="0"/>
+          </a:p>
+        </p:txBody>
+      </p:sp>
+      <p:sp>
+        <p:nvSpPr>
+          <p:cNvPr id="25" name="Slide Number Placeholder 0"/>
+          <p:cNvSpPr>
+            <a:spLocks noGrp="1"/>
+          </p:cNvSpPr>
+          <p:nvPr>
+            <p:ph type="sldNum" sz="quarter" idx="4294967295"/>
+          </p:nvPr>
+        </p:nvSpPr>
+        <p:spPr>
+          <a:xfrm>
+            <a:off x="8229600" y="4626864"/>
+            <a:ext cx="548640" cy="384048"/>
+          </a:xfrm>
+          <a:prstGeom prst="rect">
+            <a:avLst/>
+          </a:prstGeom>
+          <a:extLst>
+            <a:ext uri="{C572A759-6A51-4108-AA02-DFA0A04FC94B}">
+              <ma14:wrappingTextBoxFlag xmlns:ma14="http://schemas.microsoft.com/office/mac/drawingml/2011/main" val="0"/>
+            </a:ext>
+          </a:extLst>
+        </p:spPr>
+        <p:txBody>
+          <a:bodyPr anchor="ctr"/>
+          <a:lstStyle>
+            <a:lvl1pPr>
+              <a:defRPr sz="900">
+                <a:solidFill>
+                  <a:srgbClr val="D9B38C"/>
+                </a:solidFill>
+              </a:defRPr>
+            </a:lvl1pPr>
+          </a:lstStyle>
+          <a:p>
+            <a:pPr algn="r"/>
+            <a:fld id="{F7021451-1387-4CA6-816F-3879F97B5CBC}" type="slidenum">
+              <a:rPr b="0" lang="en-US"/>
+              <a:t>13</a:t>
+            </a:fld>
+            <a:endParaRPr lang="en-US"/>
+          </a:p>
+        </p:txBody>
+      </p:sp>
+    </p:spTree>
+  </p:cSld>
+  <p:clrMapOvr>
+    <a:masterClrMapping/>
+  </p:clrMapOvr>
+</p:sld>
+</file>
+
+<file path=ppt/slides/slide14.xml><?xml version="1.0" encoding="utf-8"?>
+<p:sld xmlns:a="http://schemas.openxmlformats.org/drawingml/2006/main" xmlns:r="http://schemas.openxmlformats.org/officeDocument/2006/relationships" xmlns:p="http://schemas.openxmlformats.org/presentationml/2006/main">
+  <p:cSld name="Slide 14">
+    <p:spTree>
+      <p:nvGrpSpPr>
+        <p:cNvPr id="1" name=""/>
+        <p:cNvGrpSpPr/>
+        <p:nvPr/>
+      </p:nvGrpSpPr>
+      <p:grpSpPr>
+        <a:xfrm>
+          <a:off x="0" y="0"/>
+          <a:ext cx="0" cy="0"/>
+          <a:chOff x="0" y="0"/>
+          <a:chExt cx="0" cy="0"/>
+        </a:xfrm>
+      </p:grpSpPr>
+      <p:sp>
+        <p:nvSpPr>
+          <p:cNvPr id="2" name="Shape 0"/>
+          <p:cNvSpPr/>
+          <p:nvPr/>
+        </p:nvSpPr>
+        <p:spPr>
+          <a:xfrm>
+            <a:off x="457200" y="457200"/>
+            <a:ext cx="8229600" cy="4229100"/>
+          </a:xfrm>
+          <a:prstGeom prst="rect">
+            <a:avLst/>
+          </a:prstGeom>
+          <a:ln w="9525">
+            <a:solidFill>
+              <a:srgbClr val="B5723B"/>
+            </a:solidFill>
+            <a:prstDash val="solid"/>
+          </a:ln>
+        </p:spPr>
+      </p:sp>
+      <p:sp>
+        <p:nvSpPr>
+          <p:cNvPr id="3" name="Text 1"/>
+          <p:cNvSpPr txBox="1"/>
+          <p:nvPr/>
+        </p:nvSpPr>
+        <p:spPr>
+          <a:xfrm>
+            <a:off x="868680" y="777240"/>
+            <a:ext cx="7406640" cy="822960"/>
+          </a:xfrm>
+          <a:prstGeom prst="rect">
+            <a:avLst/>
+          </a:prstGeom>
+          <a:noFill/>
+          <a:ln/>
+        </p:spPr>
+        <p:txBody>
+          <a:bodyPr wrap="square" lIns="0" tIns="0" rIns="0" bIns="0" rtlCol="0" anchor="ctr"/>
+          <a:lstStyle/>
+          <a:p>
+            <a:pPr algn="l" indent="0" marL="0">
+              <a:buNone/>
+            </a:pPr>
+            <a:r>
+              <a:rPr lang="ru-RU" altLang="en-US" sz="2800" b="1" dirty="0">
+                <a:solidFill>
+                  <a:schemeClr val="bg1"/>
+                </a:solidFill>
+                <a:latin typeface="Cambria" pitchFamily="34" charset="0"/>
+                <a:ea typeface="Cambria" pitchFamily="34" charset="-122"/>
+                <a:cs typeface="Cambria" pitchFamily="34" charset="-120"/>
+              </a:rPr>
+              <a:t>Следующий шаг</a:t>
+            </a:r>
+            <a:endParaRPr lang="ru-RU" sz="2800" dirty="0"/>
+          </a:p>
+        </p:txBody>
+      </p:sp>
+      <p:sp>
+        <p:nvSpPr>
+          <p:cNvPr id="4" name="Text 2"/>
+          <p:cNvSpPr txBox="1"/>
+          <p:nvPr/>
+        </p:nvSpPr>
+        <p:spPr>
+          <a:xfrm>
+            <a:off x="868680" y="1554480"/>
+            <a:ext cx="7406640" cy="457200"/>
+          </a:xfrm>
+          <a:prstGeom prst="rect">
+            <a:avLst/>
+          </a:prstGeom>
+          <a:noFill/>
+          <a:ln/>
+        </p:spPr>
+        <p:txBody>
+          <a:bodyPr wrap="square" lIns="0" tIns="0" rIns="0" bIns="0" rtlCol="0" anchor="ctr"/>
+          <a:lstStyle/>
+          <a:p>
+            <a:pPr algn="l" indent="0" marL="0">
+              <a:buNone/>
+            </a:pPr>
+            <a:r>
+              <a:rPr lang="ru-RU" altLang="en-US" sz="1300" dirty="0">
+                <a:solidFill>
+                  <a:schemeClr val="accent2"/>
+                </a:solidFill>
+              </a:rPr>
+              <a:t>Короткая встреча для подписания соглашения о сотрудничестве и назначения семинара для вашего отдела продаж</a:t>
+            </a:r>
+            <a:endParaRPr lang="ru-RU" sz="1300" dirty="0"/>
+          </a:p>
+        </p:txBody>
+      </p:sp>
+      <p:pic>
+        <p:nvPicPr>
+          <p:cNvPr id="5" name="icon FaLocationDot" descr="preencoded.png">    </p:cNvPr>
+          <p:cNvPicPr>
+            <a:picLocks noChangeAspect="1"/>
+          </p:cNvPicPr>
+          <p:nvPr/>
+        </p:nvPicPr>
+        <p:blipFill>
+          <a:blip r:embed="rId1"/>
+          <a:stretch>
+            <a:fillRect/>
+          </a:stretch>
+        </p:blipFill>
+        <p:spPr>
+          <a:xfrm>
+            <a:off x="868680" y="2286000"/>
+            <a:ext cx="274320" cy="274320"/>
+          </a:xfrm>
+          <a:prstGeom prst="rect">
+            <a:avLst/>
+          </a:prstGeom>
+        </p:spPr>
+      </p:pic>
+      <p:sp>
+        <p:nvSpPr>
+          <p:cNvPr id="6" name="Text 3"/>
+          <p:cNvSpPr txBox="1"/>
+          <p:nvPr/>
+        </p:nvSpPr>
+        <p:spPr>
+          <a:xfrm>
+            <a:off x="1325880" y="2240280"/>
+            <a:ext cx="6949440" cy="365760"/>
+          </a:xfrm>
+          <a:prstGeom prst="rect">
+            <a:avLst/>
+          </a:prstGeom>
+          <a:noFill/>
+          <a:ln/>
+        </p:spPr>
+        <p:txBody>
+          <a:bodyPr wrap="square" lIns="0" tIns="0" rIns="0" bIns="0" rtlCol="0" anchor="ctr"/>
+          <a:lstStyle/>
+          <a:p>
+            <a:pPr algn="l" indent="0" marL="0">
+              <a:buNone/>
+            </a:pPr>
+            <a:r>
+              <a:rPr lang="ru-RU" altLang="en-US" sz="1200" dirty="0">
+                <a:solidFill>
+                  <a:schemeClr val="bg2"/>
+                </a:solidFill>
+              </a:rPr>
+              <a:t>Шейх Зайед Роуд, Saeed Tower 2, офис 501, Дубай, ОАЭ</a:t>
+            </a:r>
+            <a:endParaRPr lang="ru-RU" sz="1200" dirty="0"/>
+          </a:p>
+        </p:txBody>
+      </p:sp>
+      <p:pic>
+        <p:nvPicPr>
+          <p:cNvPr id="7" name="icon FaPhone" descr="preencoded.png">    </p:cNvPr>
+          <p:cNvPicPr>
+            <a:picLocks noChangeAspect="1"/>
+          </p:cNvPicPr>
+          <p:nvPr/>
+        </p:nvPicPr>
+        <p:blipFill>
+          <a:blip r:embed="rId2"/>
+          <a:stretch>
+            <a:fillRect/>
+          </a:stretch>
+        </p:blipFill>
+        <p:spPr>
+          <a:xfrm>
+            <a:off x="868680" y="2788920"/>
+            <a:ext cx="274320" cy="274320"/>
+          </a:xfrm>
+          <a:prstGeom prst="rect">
+            <a:avLst/>
+          </a:prstGeom>
+        </p:spPr>
+      </p:pic>
+      <p:sp>
+        <p:nvSpPr>
+          <p:cNvPr id="8" name="Text 4"/>
+          <p:cNvSpPr txBox="1"/>
+          <p:nvPr/>
+        </p:nvSpPr>
+        <p:spPr>
+          <a:xfrm>
+            <a:off x="1325880" y="2743200"/>
+            <a:ext cx="6949440" cy="365760"/>
+          </a:xfrm>
+          <a:prstGeom prst="rect">
+            <a:avLst/>
+          </a:prstGeom>
+          <a:noFill/>
+          <a:ln/>
+        </p:spPr>
+        <p:txBody>
+          <a:bodyPr wrap="square" lIns="0" tIns="0" rIns="0" bIns="0" rtlCol="0" anchor="ctr"/>
+          <a:lstStyle/>
+          <a:p>
+            <a:pPr algn="l" indent="0" marL="0">
+              <a:buNone/>
+            </a:pPr>
+            <a:r>
+              <a:rPr lang="ru-RU" altLang="en-US" sz="1200" dirty="0">
+                <a:solidFill>
+                  <a:schemeClr val="bg2"/>
+                </a:solidFill>
+              </a:rPr>
+              <a:t>+971 4 359 5552  |  Моб. и WhatsApp: +971 52 107 4972</a:t>
+            </a:r>
+            <a:endParaRPr lang="ru-RU" sz="1200" dirty="0"/>
+          </a:p>
+        </p:txBody>
+      </p:sp>
+      <p:pic>
+        <p:nvPicPr>
+          <p:cNvPr id="9" name="icon FaEnvelope" descr="preencoded.png">    </p:cNvPr>
+          <p:cNvPicPr>
+            <a:picLocks noChangeAspect="1"/>
+          </p:cNvPicPr>
+          <p:nvPr/>
+        </p:nvPicPr>
+        <p:blipFill>
+          <a:blip r:embed="rId3"/>
+          <a:stretch>
+            <a:fillRect/>
+          </a:stretch>
+        </p:blipFill>
+        <p:spPr>
+          <a:xfrm>
+            <a:off x="868680" y="3291840"/>
+            <a:ext cx="274320" cy="274320"/>
+          </a:xfrm>
+          <a:prstGeom prst="rect">
+            <a:avLst/>
+          </a:prstGeom>
+        </p:spPr>
+      </p:pic>
+      <p:sp>
+        <p:nvSpPr>
+          <p:cNvPr id="10" name="Text 5"/>
+          <p:cNvSpPr txBox="1"/>
+          <p:nvPr/>
+        </p:nvSpPr>
+        <p:spPr>
+          <a:xfrm>
+            <a:off x="1325880" y="3246120"/>
+            <a:ext cx="6949440" cy="365760"/>
+          </a:xfrm>
+          <a:prstGeom prst="rect">
+            <a:avLst/>
+          </a:prstGeom>
+          <a:noFill/>
+          <a:ln/>
+        </p:spPr>
+        <p:txBody>
+          <a:bodyPr wrap="square" lIns="0" tIns="0" rIns="0" bIns="0" rtlCol="0" anchor="ctr"/>
+          <a:lstStyle/>
+          <a:p>
+            <a:pPr algn="l" indent="0" marL="0">
+              <a:buNone/>
+            </a:pPr>
+            <a:r>
+              <a:rPr lang="ru-RU" altLang="en-US" sz="1200" dirty="0">
+                <a:solidFill>
+                  <a:schemeClr val="bg2"/>
+                </a:solidFill>
+              </a:rPr>
+              <a:t>ward.shueibi@rk-advocates.com  |  rk-advocates.com</a:t>
+            </a:r>
+            <a:endParaRPr lang="ru-RU" sz="1200" dirty="0"/>
+          </a:p>
+        </p:txBody>
+      </p:sp>
+      <p:pic>
+        <p:nvPicPr>
+          <p:cNvPr id="11" name="icon FaClock" descr="preencoded.png">    </p:cNvPr>
+          <p:cNvPicPr>
+            <a:picLocks noChangeAspect="1"/>
+          </p:cNvPicPr>
+          <p:nvPr/>
+        </p:nvPicPr>
+        <p:blipFill>
+          <a:blip r:embed="rId4"/>
+          <a:stretch>
+            <a:fillRect/>
+          </a:stretch>
+        </p:blipFill>
+        <p:spPr>
+          <a:xfrm>
+            <a:off x="868680" y="3794760"/>
+            <a:ext cx="274320" cy="274320"/>
+          </a:xfrm>
+          <a:prstGeom prst="rect">
+            <a:avLst/>
+          </a:prstGeom>
+        </p:spPr>
+      </p:pic>
+      <p:sp>
+        <p:nvSpPr>
+          <p:cNvPr id="12" name="Text 6"/>
+          <p:cNvSpPr txBox="1"/>
+          <p:nvPr/>
+        </p:nvSpPr>
+        <p:spPr>
+          <a:xfrm>
+            <a:off x="1325880" y="3749040"/>
+            <a:ext cx="6949440" cy="365760"/>
+          </a:xfrm>
+          <a:prstGeom prst="rect">
+            <a:avLst/>
+          </a:prstGeom>
+          <a:noFill/>
+          <a:ln/>
+        </p:spPr>
+        <p:txBody>
+          <a:bodyPr wrap="square" lIns="0" tIns="0" rIns="0" bIns="0" rtlCol="0" anchor="ctr"/>
+          <a:lstStyle/>
+          <a:p>
+            <a:pPr algn="l" indent="0" marL="0">
+              <a:buNone/>
+            </a:pPr>
+            <a:r>
+              <a:rPr lang="ru-RU" altLang="en-US" sz="1200" dirty="0">
+                <a:solidFill>
+                  <a:schemeClr val="bg2"/>
+                </a:solidFill>
+              </a:rPr>
+              <a:t>Пн – Пт, 8:30 – 17:30  |  Арабский · Английский · Китайский · Русский</a:t>
+            </a:r>
+            <a:endParaRPr lang="ru-RU" sz="1200" dirty="0"/>
+          </a:p>
+        </p:txBody>
+      </p:sp>
+      <p:sp>
+        <p:nvSpPr>
+          <p:cNvPr id="25" name="Slide Number Placeholder 0"/>
+          <p:cNvSpPr>
+            <a:spLocks noGrp="1"/>
+          </p:cNvSpPr>
+          <p:nvPr>
+            <p:ph type="sldNum" sz="quarter" idx="4294967295"/>
+          </p:nvPr>
+        </p:nvSpPr>
+        <p:spPr>
+          <a:xfrm>
+            <a:off x="8229600" y="4626864"/>
+            <a:ext cx="548640" cy="384048"/>
+          </a:xfrm>
+          <a:prstGeom prst="rect">
+            <a:avLst/>
+          </a:prstGeom>
+          <a:extLst>
+            <a:ext uri="{C572A759-6A51-4108-AA02-DFA0A04FC94B}">
+              <ma14:wrappingTextBoxFlag xmlns:ma14="http://schemas.microsoft.com/office/mac/drawingml/2011/main" val="0"/>
+            </a:ext>
+          </a:extLst>
+        </p:spPr>
+        <p:txBody>
+          <a:bodyPr anchor="ctr"/>
+          <a:lstStyle>
+            <a:lvl1pPr>
+              <a:defRPr sz="900">
+                <a:solidFill>
+                  <a:srgbClr val="D9B38C"/>
+                </a:solidFill>
+              </a:defRPr>
+            </a:lvl1pPr>
+          </a:lstStyle>
+          <a:p>
+            <a:pPr algn="r"/>
+            <a:fld id="{F7021451-1387-4CA6-816F-3879F97B5CBC}" type="slidenum">
+              <a:rPr b="0" lang="en-US"/>
+              <a:t>14</a:t>
             </a:fld>
             <a:endParaRPr lang="en-US"/>
           </a:p>
@@ -3976,7 +6485,7 @@
                 <a:ea typeface="Cambria" pitchFamily="34" charset="-122"/>
                 <a:cs typeface="Cambria" pitchFamily="34" charset="-120"/>
               </a:rPr>
-              <a:t>Что получает ваш клиент</a:t>
+              <a:t>Реальность в четырёх цифрах</a:t>
             </a:r>
             <a:endParaRPr lang="ru-RU" sz="2600" dirty="0"/>
           </a:p>
@@ -4012,7 +6521,7 @@
                   <a:schemeClr val="accent1"/>
                 </a:solidFill>
               </a:rPr>
-              <a:t>УСЛУГА</a:t>
+              <a:t>ЦИФРЫ</a:t>
             </a:r>
             <a:endParaRPr lang="ru-RU" sz="1000" dirty="0"/>
           </a:p>
@@ -4027,7 +6536,7 @@
         <p:spPr>
           <a:xfrm>
             <a:off x="457200" y="1188720"/>
-            <a:ext cx="1885950" cy="3246120"/>
+            <a:ext cx="1906524" cy="2926080"/>
           </a:xfrm>
           <a:prstGeom prst="rect">
             <a:avLst/>
@@ -4043,40 +6552,55 @@
           </a:ln>
         </p:spPr>
       </p:sp>
-      <p:pic>
-        <p:nvPicPr>
-          <p:cNvPr id="5" name="icon FaFileSignature" descr="preencoded.png">    </p:cNvPr>
-          <p:cNvPicPr>
-            <a:picLocks noChangeAspect="1"/>
-          </p:cNvPicPr>
-          <p:nvPr/>
-        </p:nvPicPr>
-        <p:blipFill>
-          <a:blip r:embed="rId1"/>
-          <a:stretch>
-            <a:fillRect/>
-          </a:stretch>
-        </p:blipFill>
-        <p:spPr>
-          <a:xfrm>
-            <a:off x="658368" y="1389888"/>
-            <a:ext cx="310896" cy="310896"/>
-          </a:xfrm>
-          <a:prstGeom prst="rect">
-            <a:avLst/>
-          </a:prstGeom>
-        </p:spPr>
-      </p:pic>
-      <p:sp>
-        <p:nvSpPr>
-          <p:cNvPr id="6" name="Text 3"/>
+      <p:sp>
+        <p:nvSpPr>
+          <p:cNvPr id="5" name="Text 3"/>
           <p:cNvSpPr txBox="1"/>
           <p:nvPr/>
         </p:nvSpPr>
         <p:spPr>
           <a:xfrm>
-            <a:off x="658368" y="1828800"/>
-            <a:ext cx="1483614" cy="2450592"/>
+            <a:off x="640080" y="1325880"/>
+            <a:ext cx="1540764" cy="914400"/>
+          </a:xfrm>
+          <a:prstGeom prst="rect">
+            <a:avLst/>
+          </a:prstGeom>
+          <a:noFill/>
+          <a:ln/>
+        </p:spPr>
+        <p:txBody>
+          <a:bodyPr wrap="square" lIns="0" tIns="0" rIns="0" bIns="0" rtlCol="0" anchor="ctr"/>
+          <a:lstStyle/>
+          <a:p>
+            <a:pPr algn="l" indent="0" marL="0">
+              <a:buNone/>
+            </a:pPr>
+            <a:r>
+              <a:rPr lang="ru-RU" altLang="en-US" sz="3600" b="1" dirty="0">
+                <a:solidFill>
+                  <a:schemeClr val="accent1"/>
+                </a:solidFill>
+                <a:latin typeface="Cambria" pitchFamily="34" charset="0"/>
+                <a:ea typeface="Cambria" pitchFamily="34" charset="-122"/>
+                <a:cs typeface="Cambria" pitchFamily="34" charset="-120"/>
+              </a:rPr>
+              <a:t>49%</a:t>
+            </a:r>
+            <a:endParaRPr lang="ru-RU" sz="3600" dirty="0"/>
+          </a:p>
+        </p:txBody>
+      </p:sp>
+      <p:sp>
+        <p:nvSpPr>
+          <p:cNvPr id="6" name="Text 4"/>
+          <p:cNvSpPr txBox="1"/>
+          <p:nvPr/>
+        </p:nvSpPr>
+        <p:spPr>
+          <a:xfrm>
+            <a:off x="640080" y="2286000"/>
+            <a:ext cx="1540764" cy="1737360"/>
           </a:xfrm>
           <a:prstGeom prst="rect">
             <a:avLst/>
@@ -4095,14 +6619,14 @@
               <a:buNone/>
             </a:pPr>
             <a:r>
-              <a:rPr lang="ru-RU" altLang="en-US" sz="1400" b="1" dirty="0">
+              <a:rPr lang="ru-RU" altLang="en-US" sz="1250" b="1" dirty="0">
                 <a:solidFill>
                   <a:schemeClr val="tx1"/>
                 </a:solidFill>
               </a:rPr>
-              <a:t>Действительное завещание, внесённое в реестр</a:t>
-            </a:r>
-            <a:endParaRPr lang="ru-RU" sz="1400" dirty="0"/>
+              <a:t>экспатов ОАЭ ещё не начали составлять завещание</a:t>
+            </a:r>
+            <a:endParaRPr lang="ru-RU" sz="1250" dirty="0"/>
           </a:p>
           <a:p>
             <a:pPr algn="l" indent="0" marL="0">
@@ -4112,27 +6636,27 @@
               <a:buNone/>
             </a:pPr>
             <a:r>
-              <a:rPr lang="ru-RU" altLang="en-US" sz="1150" dirty="0">
+              <a:rPr lang="ru-RU" altLang="en-US" sz="1000" dirty="0">
                 <a:solidFill>
                   <a:schemeClr val="accent3"/>
                 </a:solidFill>
               </a:rPr>
-              <a:t>Совместимое с судами Дубая, Абу-Даби, DIFC или ADGM в зависимости от случая.</a:t>
-            </a:r>
-            <a:endParaRPr lang="ru-RU" sz="1400" dirty="0"/>
-          </a:p>
-        </p:txBody>
-      </p:sp>
-      <p:sp>
-        <p:nvSpPr>
-          <p:cNvPr id="7" name="Shape 4"/>
+              <a:t>Опрос YouGov, сентябрь 2026</a:t>
+            </a:r>
+            <a:endParaRPr lang="ru-RU" sz="1250" dirty="0"/>
+          </a:p>
+        </p:txBody>
+      </p:sp>
+      <p:sp>
+        <p:nvSpPr>
+          <p:cNvPr id="7" name="Shape 5"/>
           <p:cNvSpPr/>
           <p:nvPr/>
         </p:nvSpPr>
         <p:spPr>
           <a:xfrm>
-            <a:off x="2571750" y="1188720"/>
-            <a:ext cx="1885950" cy="3246120"/>
+            <a:off x="2564892" y="1188720"/>
+            <a:ext cx="1906524" cy="2926080"/>
           </a:xfrm>
           <a:prstGeom prst="rect">
             <a:avLst/>
@@ -4148,40 +6672,55 @@
           </a:ln>
         </p:spPr>
       </p:sp>
-      <p:pic>
-        <p:nvPicPr>
-          <p:cNvPr id="8" name="icon FaHouse" descr="preencoded.png">    </p:cNvPr>
-          <p:cNvPicPr>
-            <a:picLocks noChangeAspect="1"/>
-          </p:cNvPicPr>
-          <p:nvPr/>
-        </p:nvPicPr>
-        <p:blipFill>
-          <a:blip r:embed="rId2"/>
-          <a:stretch>
-            <a:fillRect/>
-          </a:stretch>
-        </p:blipFill>
-        <p:spPr>
-          <a:xfrm>
-            <a:off x="2772918" y="1389888"/>
-            <a:ext cx="310896" cy="310896"/>
-          </a:xfrm>
-          <a:prstGeom prst="rect">
-            <a:avLst/>
-          </a:prstGeom>
-        </p:spPr>
-      </p:pic>
-      <p:sp>
-        <p:nvSpPr>
-          <p:cNvPr id="9" name="Text 5"/>
+      <p:sp>
+        <p:nvSpPr>
+          <p:cNvPr id="8" name="Text 6"/>
           <p:cNvSpPr txBox="1"/>
           <p:nvPr/>
         </p:nvSpPr>
         <p:spPr>
           <a:xfrm>
-            <a:off x="2772918" y="1828800"/>
-            <a:ext cx="1483614" cy="2450592"/>
+            <a:off x="2747772" y="1325880"/>
+            <a:ext cx="1540764" cy="914400"/>
+          </a:xfrm>
+          <a:prstGeom prst="rect">
+            <a:avLst/>
+          </a:prstGeom>
+          <a:noFill/>
+          <a:ln/>
+        </p:spPr>
+        <p:txBody>
+          <a:bodyPr wrap="square" lIns="0" tIns="0" rIns="0" bIns="0" rtlCol="0" anchor="ctr"/>
+          <a:lstStyle/>
+          <a:p>
+            <a:pPr algn="l" indent="0" marL="0">
+              <a:buNone/>
+            </a:pPr>
+            <a:r>
+              <a:rPr lang="ru-RU" altLang="en-US" sz="2400" b="1" dirty="0">
+                <a:solidFill>
+                  <a:schemeClr val="accent1"/>
+                </a:solidFill>
+                <a:latin typeface="Cambria" pitchFamily="34" charset="0"/>
+                <a:ea typeface="Cambria" pitchFamily="34" charset="-122"/>
+                <a:cs typeface="Cambria" pitchFamily="34" charset="-120"/>
+              </a:rPr>
+              <a:t>35,000+</a:t>
+            </a:r>
+            <a:endParaRPr lang="ru-RU" sz="2400" dirty="0"/>
+          </a:p>
+        </p:txBody>
+      </p:sp>
+      <p:sp>
+        <p:nvSpPr>
+          <p:cNvPr id="9" name="Text 7"/>
+          <p:cNvSpPr txBox="1"/>
+          <p:nvPr/>
+        </p:nvSpPr>
+        <p:spPr>
+          <a:xfrm>
+            <a:off x="2747772" y="2286000"/>
+            <a:ext cx="1540764" cy="1737360"/>
           </a:xfrm>
           <a:prstGeom prst="rect">
             <a:avLst/>
@@ -4200,14 +6739,14 @@
               <a:buNone/>
             </a:pPr>
             <a:r>
-              <a:rPr lang="ru-RU" altLang="en-US" sz="1400" b="1" dirty="0">
+              <a:rPr lang="ru-RU" altLang="en-US" sz="1250" b="1" dirty="0">
                 <a:solidFill>
                   <a:schemeClr val="tx1"/>
                 </a:solidFill>
               </a:rPr>
-              <a:t>Защищённые недвижимость и счета</a:t>
-            </a:r>
-            <a:endParaRPr lang="ru-RU" sz="1400" dirty="0"/>
+              <a:t>зарегистрированных завещаний немусульман с 2015 г.</a:t>
+            </a:r>
+            <a:endParaRPr lang="ru-RU" sz="1250" dirty="0"/>
           </a:p>
           <a:p>
             <a:pPr algn="l" indent="0" marL="0">
@@ -4217,27 +6756,27 @@
               <a:buNone/>
             </a:pPr>
             <a:r>
-              <a:rPr lang="ru-RU" altLang="en-US" sz="1150" dirty="0">
+              <a:rPr lang="ru-RU" altLang="en-US" sz="1000" dirty="0">
                 <a:solidFill>
                   <a:schemeClr val="accent3"/>
                 </a:solidFill>
               </a:rPr>
-              <a:t>Механизмы, предотвращающие заморозку и закрепляющие порядок наследования.</a:t>
-            </a:r>
-            <a:endParaRPr lang="ru-RU" sz="1400" dirty="0"/>
-          </a:p>
-        </p:txBody>
-      </p:sp>
-      <p:sp>
-        <p:nvSpPr>
-          <p:cNvPr id="10" name="Shape 6"/>
+              <a:t>DIFC (более 14 000) плюс Абу-Даби (21 000) при населении свыше 11 млн</a:t>
+            </a:r>
+            <a:endParaRPr lang="ru-RU" sz="1250" dirty="0"/>
+          </a:p>
+        </p:txBody>
+      </p:sp>
+      <p:sp>
+        <p:nvSpPr>
+          <p:cNvPr id="10" name="Shape 8"/>
           <p:cNvSpPr/>
           <p:nvPr/>
         </p:nvSpPr>
         <p:spPr>
           <a:xfrm>
-            <a:off x="4686300" y="1188720"/>
-            <a:ext cx="1885950" cy="3246120"/>
+            <a:off x="4672584" y="1188720"/>
+            <a:ext cx="1906524" cy="2926080"/>
           </a:xfrm>
           <a:prstGeom prst="rect">
             <a:avLst/>
@@ -4253,40 +6792,55 @@
           </a:ln>
         </p:spPr>
       </p:sp>
-      <p:pic>
-        <p:nvPicPr>
-          <p:cNvPr id="11" name="icon FaChildren" descr="preencoded.png">    </p:cNvPr>
-          <p:cNvPicPr>
-            <a:picLocks noChangeAspect="1"/>
-          </p:cNvPicPr>
-          <p:nvPr/>
-        </p:nvPicPr>
-        <p:blipFill>
-          <a:blip r:embed="rId3"/>
-          <a:stretch>
-            <a:fillRect/>
-          </a:stretch>
-        </p:blipFill>
-        <p:spPr>
-          <a:xfrm>
-            <a:off x="4887468" y="1389888"/>
-            <a:ext cx="310896" cy="310896"/>
-          </a:xfrm>
-          <a:prstGeom prst="rect">
-            <a:avLst/>
-          </a:prstGeom>
-        </p:spPr>
-      </p:pic>
-      <p:sp>
-        <p:nvSpPr>
-          <p:cNvPr id="12" name="Text 7"/>
+      <p:sp>
+        <p:nvSpPr>
+          <p:cNvPr id="11" name="Text 9"/>
           <p:cNvSpPr txBox="1"/>
           <p:nvPr/>
         </p:nvSpPr>
         <p:spPr>
           <a:xfrm>
-            <a:off x="4887468" y="1828800"/>
-            <a:ext cx="1483614" cy="2450592"/>
+            <a:off x="4855464" y="1325880"/>
+            <a:ext cx="1540764" cy="914400"/>
+          </a:xfrm>
+          <a:prstGeom prst="rect">
+            <a:avLst/>
+          </a:prstGeom>
+          <a:noFill/>
+          <a:ln/>
+        </p:spPr>
+        <p:txBody>
+          <a:bodyPr wrap="square" lIns="0" tIns="0" rIns="0" bIns="0" rtlCol="0" anchor="ctr"/>
+          <a:lstStyle/>
+          <a:p>
+            <a:pPr algn="l" indent="0" marL="0">
+              <a:buNone/>
+            </a:pPr>
+            <a:r>
+              <a:rPr lang="ru-RU" altLang="en-US" sz="3600" b="1" dirty="0">
+                <a:solidFill>
+                  <a:schemeClr val="accent1"/>
+                </a:solidFill>
+                <a:latin typeface="Cambria" pitchFamily="34" charset="0"/>
+                <a:ea typeface="Cambria" pitchFamily="34" charset="-122"/>
+                <a:cs typeface="Cambria" pitchFamily="34" charset="-120"/>
+              </a:rPr>
+              <a:t>13.8</a:t>
+            </a:r>
+            <a:endParaRPr lang="ru-RU" sz="3600" dirty="0"/>
+          </a:p>
+        </p:txBody>
+      </p:sp>
+      <p:sp>
+        <p:nvSpPr>
+          <p:cNvPr id="12" name="Text 10"/>
+          <p:cNvSpPr txBox="1"/>
+          <p:nvPr/>
+        </p:nvSpPr>
+        <p:spPr>
+          <a:xfrm>
+            <a:off x="4855464" y="2286000"/>
+            <a:ext cx="1540764" cy="1737360"/>
           </a:xfrm>
           <a:prstGeom prst="rect">
             <a:avLst/>
@@ -4305,14 +6859,14 @@
               <a:buNone/>
             </a:pPr>
             <a:r>
-              <a:rPr lang="ru-RU" altLang="en-US" sz="1400" b="1" dirty="0">
+              <a:rPr lang="ru-RU" altLang="en-US" sz="1250" b="1" dirty="0">
                 <a:solidFill>
                   <a:schemeClr val="tx1"/>
                 </a:solidFill>
               </a:rPr>
-              <a:t>Защищённые семья и дети</a:t>
-            </a:r>
-            <a:endParaRPr lang="ru-RU" sz="1400" dirty="0"/>
+              <a:t>рабочих дней: средний срок мирового урегулирования наследства в Дубае (2025)</a:t>
+            </a:r>
+            <a:endParaRPr lang="ru-RU" sz="1250" dirty="0"/>
           </a:p>
           <a:p>
             <a:pPr algn="l" indent="0" marL="0">
@@ -4322,27 +6876,27 @@
               <a:buNone/>
             </a:pPr>
             <a:r>
-              <a:rPr lang="ru-RU" altLang="en-US" sz="1150" dirty="0">
+              <a:rPr lang="ru-RU" altLang="en-US" sz="1000" dirty="0">
                 <a:solidFill>
                   <a:schemeClr val="accent3"/>
                 </a:solidFill>
               </a:rPr>
-              <a:t>Назначенные опекуны и определённые наследники в ОАЭ и за рубежом.</a:t>
-            </a:r>
-            <a:endParaRPr lang="ru-RU" sz="1400" dirty="0"/>
-          </a:p>
-        </p:txBody>
-      </p:sp>
-      <p:sp>
-        <p:nvSpPr>
-          <p:cNvPr id="13" name="Shape 8"/>
+              <a:t>против 24 дней в 2024 г. и 81 дня для судебных дел в 2023 г.</a:t>
+            </a:r>
+            <a:endParaRPr lang="ru-RU" sz="1250" dirty="0"/>
+          </a:p>
+        </p:txBody>
+      </p:sp>
+      <p:sp>
+        <p:nvSpPr>
+          <p:cNvPr id="13" name="Shape 11"/>
           <p:cNvSpPr/>
           <p:nvPr/>
         </p:nvSpPr>
         <p:spPr>
           <a:xfrm>
-            <a:off x="6800850" y="1188720"/>
-            <a:ext cx="1885950" cy="3246120"/>
+            <a:off x="6780276" y="1188720"/>
+            <a:ext cx="1906524" cy="2926080"/>
           </a:xfrm>
           <a:prstGeom prst="rect">
             <a:avLst/>
@@ -4358,40 +6912,55 @@
           </a:ln>
         </p:spPr>
       </p:sp>
-      <p:pic>
-        <p:nvPicPr>
-          <p:cNvPr id="14" name="icon FaSitemap" descr="preencoded.png">    </p:cNvPr>
-          <p:cNvPicPr>
-            <a:picLocks noChangeAspect="1"/>
-          </p:cNvPicPr>
-          <p:nvPr/>
-        </p:nvPicPr>
-        <p:blipFill>
-          <a:blip r:embed="rId4"/>
-          <a:stretch>
-            <a:fillRect/>
-          </a:stretch>
-        </p:blipFill>
-        <p:spPr>
-          <a:xfrm>
-            <a:off x="7002018" y="1389888"/>
-            <a:ext cx="310896" cy="310896"/>
-          </a:xfrm>
-          <a:prstGeom prst="rect">
-            <a:avLst/>
-          </a:prstGeom>
-        </p:spPr>
-      </p:pic>
-      <p:sp>
-        <p:nvSpPr>
-          <p:cNvPr id="15" name="Text 9"/>
+      <p:sp>
+        <p:nvSpPr>
+          <p:cNvPr id="14" name="Text 12"/>
           <p:cNvSpPr txBox="1"/>
           <p:nvPr/>
         </p:nvSpPr>
         <p:spPr>
           <a:xfrm>
-            <a:off x="7002018" y="1828800"/>
-            <a:ext cx="1483614" cy="2450592"/>
+            <a:off x="6963156" y="1325880"/>
+            <a:ext cx="1540764" cy="914400"/>
+          </a:xfrm>
+          <a:prstGeom prst="rect">
+            <a:avLst/>
+          </a:prstGeom>
+          <a:noFill/>
+          <a:ln/>
+        </p:spPr>
+        <p:txBody>
+          <a:bodyPr wrap="square" lIns="0" tIns="0" rIns="0" bIns="0" rtlCol="0" anchor="ctr"/>
+          <a:lstStyle/>
+          <a:p>
+            <a:pPr algn="l" indent="0" marL="0">
+              <a:buNone/>
+            </a:pPr>
+            <a:r>
+              <a:rPr lang="ru-RU" altLang="en-US" sz="2400" b="1" dirty="0">
+                <a:solidFill>
+                  <a:schemeClr val="accent1"/>
+                </a:solidFill>
+                <a:latin typeface="Cambria" pitchFamily="34" charset="0"/>
+                <a:ea typeface="Cambria" pitchFamily="34" charset="-122"/>
+                <a:cs typeface="Cambria" pitchFamily="34" charset="-120"/>
+              </a:rPr>
+              <a:t>$1 трлн</a:t>
+            </a:r>
+            <a:endParaRPr lang="ru-RU" sz="2400" dirty="0"/>
+          </a:p>
+        </p:txBody>
+      </p:sp>
+      <p:sp>
+        <p:nvSpPr>
+          <p:cNvPr id="15" name="Text 13"/>
+          <p:cNvSpPr txBox="1"/>
+          <p:nvPr/>
+        </p:nvSpPr>
+        <p:spPr>
+          <a:xfrm>
+            <a:off x="6963156" y="2286000"/>
+            <a:ext cx="1540764" cy="1737360"/>
           </a:xfrm>
           <a:prstGeom prst="rect">
             <a:avLst/>
@@ -4410,14 +6979,14 @@
               <a:buNone/>
             </a:pPr>
             <a:r>
-              <a:rPr lang="ru-RU" altLang="en-US" sz="1400" b="1" dirty="0">
+              <a:rPr lang="ru-RU" altLang="en-US" sz="1250" b="1" dirty="0">
                 <a:solidFill>
                   <a:schemeClr val="tx1"/>
                 </a:solidFill>
               </a:rPr>
-              <a:t>Корпоративное структурирование и структурирование активов</a:t>
-            </a:r>
-            <a:endParaRPr lang="ru-RU" sz="1400" dirty="0"/>
+              <a:t>активов семей стран Залива перейдёт следующему поколению к 2030 г.</a:t>
+            </a:r>
+            <a:endParaRPr lang="ru-RU" sz="1250" dirty="0"/>
           </a:p>
           <a:p>
             <a:pPr algn="l" indent="0" marL="0">
@@ -4427,20 +6996,56 @@
               <a:buNone/>
             </a:pPr>
             <a:r>
-              <a:rPr lang="ru-RU" altLang="en-US" sz="1150" dirty="0">
+              <a:rPr lang="ru-RU" altLang="en-US" sz="1000" dirty="0">
                 <a:solidFill>
                   <a:schemeClr val="accent3"/>
                 </a:solidFill>
               </a:rPr>
-              <a:t>Холдинг, SPV или фонд в зависимости от размера инвестиций.</a:t>
-            </a:r>
-            <a:endParaRPr lang="ru-RU" sz="1400" dirty="0"/>
-          </a:p>
-        </p:txBody>
-      </p:sp>
-      <p:sp>
-        <p:nvSpPr>
-          <p:cNvPr id="16" name="Text 0"/>
+              <a:t>и менее трети семейных компаний имеют план преемственности</a:t>
+            </a:r>
+            <a:endParaRPr lang="ru-RU" sz="1250" dirty="0"/>
+          </a:p>
+        </p:txBody>
+      </p:sp>
+      <p:sp>
+        <p:nvSpPr>
+          <p:cNvPr id="16" name="Text 14"/>
+          <p:cNvSpPr txBox="1"/>
+          <p:nvPr/>
+        </p:nvSpPr>
+        <p:spPr>
+          <a:xfrm>
+            <a:off x="457200" y="4187952"/>
+            <a:ext cx="8229600" cy="384048"/>
+          </a:xfrm>
+          <a:prstGeom prst="rect">
+            <a:avLst/>
+          </a:prstGeom>
+          <a:noFill/>
+          <a:ln/>
+        </p:spPr>
+        <p:txBody>
+          <a:bodyPr wrap="square" lIns="0" tIns="0" rIns="0" bIns="0" rtlCol="0" anchor="ctr"/>
+          <a:lstStyle/>
+          <a:p>
+            <a:pPr algn="l" indent="0" marL="0">
+              <a:buNone/>
+            </a:pPr>
+            <a:r>
+              <a:rPr lang="ru-RU" altLang="en-US" sz="800" i="1" dirty="0">
+                <a:solidFill>
+                  <a:schemeClr val="accent3"/>
+                </a:solidFill>
+              </a:rPr>
+              <a:t>Источники: DIFC Courts, Судебный департамент Абу-Даби, суды Дубая, опрос YouGov (сент. 2026), Khaleej Times / Gulf News. Полные ссылки в презентации «Завещания и наследство в ОАЭ: что говорят цифры».</a:t>
+            </a:r>
+            <a:endParaRPr lang="ru-RU" sz="800" dirty="0"/>
+          </a:p>
+        </p:txBody>
+      </p:sp>
+      <p:sp>
+        <p:nvSpPr>
+          <p:cNvPr id="17" name="Text 0"/>
           <p:cNvSpPr/>
           <p:nvPr>
             <p:ph idx="101" type="title" hasCustomPrompt="1"/>
@@ -4563,7 +7168,7 @@
               <a:buNone/>
             </a:pPr>
             <a:r>
-              <a:rPr lang="ru-RU" altLang="en-US" sz="2600" b="1" dirty="0">
+              <a:rPr lang="ru-RU" altLang="en-US" sz="2100" b="1" dirty="0">
                 <a:solidFill>
                   <a:schemeClr val="tx1"/>
                 </a:solidFill>
@@ -4571,9 +7176,9 @@
                 <a:ea typeface="Cambria" pitchFamily="34" charset="-122"/>
                 <a:cs typeface="Cambria" pitchFamily="34" charset="-120"/>
               </a:rPr>
-              <a:t>Что получает ваша компания</a:t>
-            </a:r>
-            <a:endParaRPr lang="ru-RU" sz="2600" dirty="0"/>
+              <a:t>DIFC: ежегодные регистрации ускоряются</a:t>
+            </a:r>
+            <a:endParaRPr lang="ru-RU" sz="2100" dirty="0"/>
           </a:p>
         </p:txBody>
       </p:sp>
@@ -4607,22 +7212,38 @@
                   <a:schemeClr val="accent1"/>
                 </a:solidFill>
               </a:rPr>
-              <a:t>ЦЕННОСТЬ ДЛЯ ПАРТНЁРА</a:t>
+              <a:t>ЦИФРЫ</a:t>
             </a:r>
             <a:endParaRPr lang="ru-RU" sz="1000" dirty="0"/>
           </a:p>
         </p:txBody>
       </p:sp>
-      <p:sp>
-        <p:nvSpPr>
-          <p:cNvPr id="4" name="Shape 2"/>
+      <p:graphicFrame>
+        <p:nvGraphicFramePr>
+          <p:cNvPr id="4" name="Chart 0" descr=""/>
+          <p:cNvGraphicFramePr/>
+          <p:nvPr/>
+        </p:nvGraphicFramePr>
+        <p:xfrm>
+          <a:off x="457200" y="1188720"/>
+          <a:ext cx="5212080" cy="3017520"/>
+        </p:xfrm>
+        <a:graphic xmlns:a="http://schemas.openxmlformats.org/drawingml/2006/main">
+          <a:graphicData uri="http://schemas.openxmlformats.org/drawingml/2006/chart">
+            <c:chart xmlns:c="http://schemas.openxmlformats.org/drawingml/2006/chart" r:id="rId1"/>
+          </a:graphicData>
+        </a:graphic>
+      </p:graphicFrame>
+      <p:sp>
+        <p:nvSpPr>
+          <p:cNvPr id="5" name="Shape 2"/>
           <p:cNvSpPr/>
           <p:nvPr/>
         </p:nvSpPr>
         <p:spPr>
           <a:xfrm>
-            <a:off x="457200" y="1188720"/>
-            <a:ext cx="1885950" cy="3246120"/>
+            <a:off x="5897880" y="1188720"/>
+            <a:ext cx="2788920" cy="3017520"/>
           </a:xfrm>
           <a:prstGeom prst="rect">
             <a:avLst/>
@@ -4640,14 +7261,14 @@
       </p:sp>
       <p:sp>
         <p:nvSpPr>
-          <p:cNvPr id="5" name="Text 3"/>
+          <p:cNvPr id="6" name="Text 3"/>
           <p:cNvSpPr txBox="1"/>
           <p:nvPr/>
         </p:nvSpPr>
         <p:spPr>
           <a:xfrm>
-            <a:off x="658368" y="1344168"/>
-            <a:ext cx="1483614" cy="457200"/>
+            <a:off x="6126480" y="1325880"/>
+            <a:ext cx="2331720" cy="731520"/>
           </a:xfrm>
           <a:prstGeom prst="rect">
             <a:avLst/>
@@ -4663,7 +7284,7 @@
               <a:buNone/>
             </a:pPr>
             <a:r>
-              <a:rPr lang="ru-RU" altLang="en-US" sz="2600" b="1" dirty="0">
+              <a:rPr lang="ru-RU" altLang="en-US" sz="3200" b="1" dirty="0">
                 <a:solidFill>
                   <a:schemeClr val="accent1"/>
                 </a:solidFill>
@@ -4671,22 +7292,22 @@
                 <a:ea typeface="Cambria" pitchFamily="34" charset="-122"/>
                 <a:cs typeface="Cambria" pitchFamily="34" charset="-120"/>
               </a:rPr>
-              <a:t>1</a:t>
-            </a:r>
-            <a:endParaRPr lang="ru-RU" sz="2600" dirty="0"/>
-          </a:p>
-        </p:txBody>
-      </p:sp>
-      <p:sp>
-        <p:nvSpPr>
-          <p:cNvPr id="6" name="Text 4"/>
+              <a:t>+120%</a:t>
+            </a:r>
+            <a:endParaRPr lang="ru-RU" sz="3200" dirty="0"/>
+          </a:p>
+        </p:txBody>
+      </p:sp>
+      <p:sp>
+        <p:nvSpPr>
+          <p:cNvPr id="7" name="Text 4"/>
           <p:cNvSpPr txBox="1"/>
           <p:nvPr/>
         </p:nvSpPr>
         <p:spPr>
           <a:xfrm>
-            <a:off x="658368" y="1847088"/>
-            <a:ext cx="1483614" cy="2432304"/>
+            <a:off x="6126480" y="2057400"/>
+            <a:ext cx="2331720" cy="512064"/>
           </a:xfrm>
           <a:prstGeom prst="rect">
             <a:avLst/>
@@ -4699,75 +7320,80 @@
           <a:lstStyle/>
           <a:p>
             <a:pPr algn="l" indent="0" marL="0">
-              <a:spcAft>
-                <a:spcPts val="300"/>
-              </a:spcAft>
-              <a:buNone/>
-            </a:pPr>
-            <a:r>
-              <a:rPr lang="ru-RU" altLang="en-US" sz="1400" b="1" dirty="0">
+              <a:buNone/>
+            </a:pPr>
+            <a:r>
+              <a:rPr lang="ru-RU" altLang="en-US" sz="1250" b="1" dirty="0">
                 <a:solidFill>
                   <a:schemeClr val="tx1"/>
                 </a:solidFill>
               </a:rPr>
-              <a:t>Доверие клиента</a:t>
-            </a:r>
-            <a:endParaRPr lang="ru-RU" sz="1400" dirty="0"/>
-          </a:p>
-          <a:p>
-            <a:pPr algn="l" indent="0" marL="0">
-              <a:spcAft>
-                <a:spcPts val="300"/>
-              </a:spcAft>
-              <a:buNone/>
-            </a:pPr>
-            <a:r>
-              <a:rPr lang="ru-RU" altLang="en-US" sz="1150" dirty="0">
+              <a:t>рост в 1 кв. 2026 к 1 кв. 2025</a:t>
+            </a:r>
+            <a:endParaRPr lang="ru-RU" sz="1250" dirty="0"/>
+          </a:p>
+        </p:txBody>
+      </p:sp>
+      <p:sp>
+        <p:nvSpPr>
+          <p:cNvPr id="8" name="Text 5"/>
+          <p:cNvSpPr txBox="1"/>
+          <p:nvPr/>
+        </p:nvSpPr>
+        <p:spPr>
+          <a:xfrm>
+            <a:off x="6126480" y="2615184"/>
+            <a:ext cx="2331720" cy="1545336"/>
+          </a:xfrm>
+          <a:prstGeom prst="rect">
+            <a:avLst/>
+          </a:prstGeom>
+          <a:noFill/>
+          <a:ln/>
+        </p:spPr>
+        <p:txBody>
+          <a:bodyPr wrap="square" lIns="0" tIns="0" rIns="0" bIns="0" rtlCol="0" anchor="t"/>
+          <a:lstStyle/>
+          <a:p>
+            <a:pPr algn="l" indent="0" marL="0">
+              <a:buNone/>
+            </a:pPr>
+            <a:r>
+              <a:rPr lang="ru-RU" altLang="en-US" sz="1000" dirty="0">
                 <a:solidFill>
                   <a:schemeClr val="accent3"/>
                 </a:solidFill>
               </a:rPr>
-              <a:t>Клиент видит брокера, который заботится о защите, а не только о продаже.</a:t>
-            </a:r>
-            <a:endParaRPr lang="ru-RU" sz="1400" dirty="0"/>
-          </a:p>
-        </p:txBody>
-      </p:sp>
-      <p:sp>
-        <p:nvSpPr>
-          <p:cNvPr id="7" name="Shape 5"/>
-          <p:cNvSpPr/>
-          <p:nvPr/>
-        </p:nvSpPr>
-        <p:spPr>
-          <a:xfrm>
-            <a:off x="2571750" y="1188720"/>
-            <a:ext cx="1885950" cy="3246120"/>
-          </a:xfrm>
-          <a:prstGeom prst="rect">
-            <a:avLst/>
-          </a:prstGeom>
-          <a:solidFill>
-            <a:srgbClr val="F4F1EB"/>
-          </a:solidFill>
-          <a:ln w="12700">
-            <a:solidFill>
-              <a:srgbClr val="F4F1EB"/>
-            </a:solidFill>
-            <a:prstDash val="solid"/>
-          </a:ln>
-        </p:spPr>
-      </p:sp>
-      <p:sp>
-        <p:nvSpPr>
-          <p:cNvPr id="8" name="Text 6"/>
+              <a:t>2025: 2 220 завещаний (+22%). Заявления об исполнении завещаний: 41 в 2025 г. (+37%), 27 приказов только за 1 пол. 2025.</a:t>
+            </a:r>
+            <a:endParaRPr lang="ru-RU" sz="1000" dirty="0"/>
+          </a:p>
+          <a:p>
+            <a:pPr algn="l" indent="0" marL="0">
+              <a:buNone/>
+            </a:pPr>
+            <a:r>
+              <a:rPr lang="ru-RU" altLang="en-US" sz="1000" dirty="0">
+                <a:solidFill>
+                  <a:schemeClr val="accent3"/>
+                </a:solidFill>
+              </a:rPr>
+              <a:t>* Рассчитано по объявленным темпам роста.</a:t>
+            </a:r>
+            <a:endParaRPr lang="ru-RU" sz="1000" dirty="0"/>
+          </a:p>
+        </p:txBody>
+      </p:sp>
+      <p:sp>
+        <p:nvSpPr>
+          <p:cNvPr id="9" name="Text 6"/>
           <p:cNvSpPr txBox="1"/>
           <p:nvPr/>
         </p:nvSpPr>
         <p:spPr>
           <a:xfrm>
-            <a:off x="2772918" y="1344168"/>
-            <a:ext cx="1483614" cy="457200"/>
+            <a:off x="457200" y="4187952"/>
+            <a:ext cx="8229600" cy="384048"/>
           </a:xfrm>
           <a:prstGeom prst="rect">
             <a:avLst/>
@@ -4783,319 +7409,20 @@
               <a:buNone/>
             </a:pPr>
             <a:r>
-              <a:rPr lang="ru-RU" altLang="en-US" sz="2600" b="1" dirty="0">
-                <a:solidFill>
-                  <a:schemeClr val="accent1"/>
-                </a:solidFill>
-                <a:latin typeface="Cambria" pitchFamily="34" charset="0"/>
-                <a:ea typeface="Cambria" pitchFamily="34" charset="-122"/>
-                <a:cs typeface="Cambria" pitchFamily="34" charset="-120"/>
-              </a:rPr>
-              <a:t>2</a:t>
-            </a:r>
-            <a:endParaRPr lang="ru-RU" sz="2600" dirty="0"/>
-          </a:p>
-        </p:txBody>
-      </p:sp>
-      <p:sp>
-        <p:nvSpPr>
-          <p:cNvPr id="9" name="Text 7"/>
-          <p:cNvSpPr txBox="1"/>
-          <p:nvPr/>
-        </p:nvSpPr>
-        <p:spPr>
-          <a:xfrm>
-            <a:off x="2772918" y="1847088"/>
-            <a:ext cx="1483614" cy="2432304"/>
-          </a:xfrm>
-          <a:prstGeom prst="rect">
-            <a:avLst/>
-          </a:prstGeom>
-          <a:noFill/>
-          <a:ln/>
-        </p:spPr>
-        <p:txBody>
-          <a:bodyPr wrap="square" lIns="0" tIns="0" rIns="0" bIns="0" rtlCol="0" anchor="t"/>
-          <a:lstStyle/>
-          <a:p>
-            <a:pPr algn="l" indent="0" marL="0">
-              <a:spcAft>
-                <a:spcPts val="300"/>
-              </a:spcAft>
-              <a:buNone/>
-            </a:pPr>
-            <a:r>
-              <a:rPr lang="ru-RU" altLang="en-US" sz="1400" b="1" dirty="0">
-                <a:solidFill>
-                  <a:schemeClr val="tx1"/>
-                </a:solidFill>
-              </a:rPr>
-              <a:t>Выше процент закрытия сделок</a:t>
-            </a:r>
-            <a:endParaRPr lang="ru-RU" sz="1400" dirty="0"/>
-          </a:p>
-          <a:p>
-            <a:pPr algn="l" indent="0" marL="0">
-              <a:spcAft>
-                <a:spcPts val="300"/>
-              </a:spcAft>
-              <a:buNone/>
-            </a:pPr>
-            <a:r>
-              <a:rPr lang="ru-RU" altLang="en-US" sz="1150" dirty="0">
+              <a:rPr lang="ru-RU" altLang="en-US" sz="800" i="1" dirty="0">
                 <a:solidFill>
                   <a:schemeClr val="accent3"/>
                 </a:solidFill>
               </a:rPr>
-              <a:t>Иностранные инвесторы спокойнее, когда знают, что есть правовая защита и решения по наследству.</a:t>
-            </a:r>
-            <a:endParaRPr lang="ru-RU" sz="1400" dirty="0"/>
-          </a:p>
-        </p:txBody>
-      </p:sp>
-      <p:sp>
-        <p:nvSpPr>
-          <p:cNvPr id="10" name="Shape 8"/>
-          <p:cNvSpPr/>
-          <p:nvPr/>
-        </p:nvSpPr>
-        <p:spPr>
-          <a:xfrm>
-            <a:off x="4686300" y="1188720"/>
-            <a:ext cx="1885950" cy="3246120"/>
-          </a:xfrm>
-          <a:prstGeom prst="rect">
-            <a:avLst/>
-          </a:prstGeom>
-          <a:solidFill>
-            <a:srgbClr val="F4F1EB"/>
-          </a:solidFill>
-          <a:ln w="12700">
-            <a:solidFill>
-              <a:srgbClr val="F4F1EB"/>
-            </a:solidFill>
-            <a:prstDash val="solid"/>
-          </a:ln>
-        </p:spPr>
-      </p:sp>
-      <p:sp>
-        <p:nvSpPr>
-          <p:cNvPr id="11" name="Text 9"/>
-          <p:cNvSpPr txBox="1"/>
-          <p:nvPr/>
-        </p:nvSpPr>
-        <p:spPr>
-          <a:xfrm>
-            <a:off x="4887468" y="1344168"/>
-            <a:ext cx="1483614" cy="457200"/>
-          </a:xfrm>
-          <a:prstGeom prst="rect">
-            <a:avLst/>
-          </a:prstGeom>
-          <a:noFill/>
-          <a:ln/>
-        </p:spPr>
-        <p:txBody>
-          <a:bodyPr wrap="square" lIns="0" tIns="0" rIns="0" bIns="0" rtlCol="0" anchor="ctr"/>
-          <a:lstStyle/>
-          <a:p>
-            <a:pPr algn="l" indent="0" marL="0">
-              <a:buNone/>
-            </a:pPr>
-            <a:r>
-              <a:rPr lang="ru-RU" altLang="en-US" sz="2600" b="1" dirty="0">
-                <a:solidFill>
-                  <a:schemeClr val="accent1"/>
-                </a:solidFill>
-                <a:latin typeface="Cambria" pitchFamily="34" charset="0"/>
-                <a:ea typeface="Cambria" pitchFamily="34" charset="-122"/>
-                <a:cs typeface="Cambria" pitchFamily="34" charset="-120"/>
-              </a:rPr>
-              <a:t>3</a:t>
-            </a:r>
-            <a:endParaRPr lang="ru-RU" sz="2600" dirty="0"/>
-          </a:p>
-        </p:txBody>
-      </p:sp>
-      <p:sp>
-        <p:nvSpPr>
-          <p:cNvPr id="12" name="Text 10"/>
-          <p:cNvSpPr txBox="1"/>
-          <p:nvPr/>
-        </p:nvSpPr>
-        <p:spPr>
-          <a:xfrm>
-            <a:off x="4887468" y="1847088"/>
-            <a:ext cx="1483614" cy="2432304"/>
-          </a:xfrm>
-          <a:prstGeom prst="rect">
-            <a:avLst/>
-          </a:prstGeom>
-          <a:noFill/>
-          <a:ln/>
-        </p:spPr>
-        <p:txBody>
-          <a:bodyPr wrap="square" lIns="0" tIns="0" rIns="0" bIns="0" rtlCol="0" anchor="t"/>
-          <a:lstStyle/>
-          <a:p>
-            <a:pPr algn="l" indent="0" marL="0">
-              <a:spcAft>
-                <a:spcPts val="300"/>
-              </a:spcAft>
-              <a:buNone/>
-            </a:pPr>
-            <a:r>
-              <a:rPr lang="ru-RU" altLang="en-US" sz="1400" b="1" dirty="0">
-                <a:solidFill>
-                  <a:schemeClr val="tx1"/>
-                </a:solidFill>
-              </a:rPr>
-              <a:t>Дополнительный VIP-сервис</a:t>
-            </a:r>
-            <a:endParaRPr lang="ru-RU" sz="1400" dirty="0"/>
-          </a:p>
-          <a:p>
-            <a:pPr algn="l" indent="0" marL="0">
-              <a:spcAft>
-                <a:spcPts val="300"/>
-              </a:spcAft>
-              <a:buNone/>
-            </a:pPr>
-            <a:r>
-              <a:rPr lang="ru-RU" altLang="en-US" sz="1150" dirty="0">
-                <a:solidFill>
-                  <a:schemeClr val="accent3"/>
-                </a:solidFill>
-              </a:rPr>
-              <a:t>Вы позиционируете себя как полноценного инвестиционного советника.</a:t>
-            </a:r>
-            <a:endParaRPr lang="ru-RU" sz="1400" dirty="0"/>
-          </a:p>
-        </p:txBody>
-      </p:sp>
-      <p:sp>
-        <p:nvSpPr>
-          <p:cNvPr id="13" name="Shape 11"/>
-          <p:cNvSpPr/>
-          <p:nvPr/>
-        </p:nvSpPr>
-        <p:spPr>
-          <a:xfrm>
-            <a:off x="6800850" y="1188720"/>
-            <a:ext cx="1885950" cy="3246120"/>
-          </a:xfrm>
-          <a:prstGeom prst="rect">
-            <a:avLst/>
-          </a:prstGeom>
-          <a:solidFill>
-            <a:srgbClr val="F4F1EB"/>
-          </a:solidFill>
-          <a:ln w="12700">
-            <a:solidFill>
-              <a:srgbClr val="F4F1EB"/>
-            </a:solidFill>
-            <a:prstDash val="solid"/>
-          </a:ln>
-        </p:spPr>
-      </p:sp>
-      <p:sp>
-        <p:nvSpPr>
-          <p:cNvPr id="14" name="Text 12"/>
-          <p:cNvSpPr txBox="1"/>
-          <p:nvPr/>
-        </p:nvSpPr>
-        <p:spPr>
-          <a:xfrm>
-            <a:off x="7002018" y="1344168"/>
-            <a:ext cx="1483614" cy="457200"/>
-          </a:xfrm>
-          <a:prstGeom prst="rect">
-            <a:avLst/>
-          </a:prstGeom>
-          <a:noFill/>
-          <a:ln/>
-        </p:spPr>
-        <p:txBody>
-          <a:bodyPr wrap="square" lIns="0" tIns="0" rIns="0" bIns="0" rtlCol="0" anchor="ctr"/>
-          <a:lstStyle/>
-          <a:p>
-            <a:pPr algn="l" indent="0" marL="0">
-              <a:buNone/>
-            </a:pPr>
-            <a:r>
-              <a:rPr lang="ru-RU" altLang="en-US" sz="2600" b="1" dirty="0">
-                <a:solidFill>
-                  <a:schemeClr val="accent1"/>
-                </a:solidFill>
-                <a:latin typeface="Cambria" pitchFamily="34" charset="0"/>
-                <a:ea typeface="Cambria" pitchFamily="34" charset="-122"/>
-                <a:cs typeface="Cambria" pitchFamily="34" charset="-120"/>
-              </a:rPr>
-              <a:t>4</a:t>
-            </a:r>
-            <a:endParaRPr lang="ru-RU" sz="2600" dirty="0"/>
-          </a:p>
-        </p:txBody>
-      </p:sp>
-      <p:sp>
-        <p:nvSpPr>
-          <p:cNvPr id="15" name="Text 13"/>
-          <p:cNvSpPr txBox="1"/>
-          <p:nvPr/>
-        </p:nvSpPr>
-        <p:spPr>
-          <a:xfrm>
-            <a:off x="7002018" y="1847088"/>
-            <a:ext cx="1483614" cy="2432304"/>
-          </a:xfrm>
-          <a:prstGeom prst="rect">
-            <a:avLst/>
-          </a:prstGeom>
-          <a:noFill/>
-          <a:ln/>
-        </p:spPr>
-        <p:txBody>
-          <a:bodyPr wrap="square" lIns="0" tIns="0" rIns="0" bIns="0" rtlCol="0" anchor="t"/>
-          <a:lstStyle/>
-          <a:p>
-            <a:pPr algn="l" indent="0" marL="0">
-              <a:spcAft>
-                <a:spcPts val="300"/>
-              </a:spcAft>
-              <a:buNone/>
-            </a:pPr>
-            <a:r>
-              <a:rPr lang="ru-RU" altLang="en-US" sz="1400" b="1" dirty="0">
-                <a:solidFill>
-                  <a:schemeClr val="tx1"/>
-                </a:solidFill>
-              </a:rPr>
-              <a:t>Дополнительный доход</a:t>
-            </a:r>
-            <a:endParaRPr lang="ru-RU" sz="1400" dirty="0"/>
-          </a:p>
-          <a:p>
-            <a:pPr algn="l" indent="0" marL="0">
-              <a:spcAft>
-                <a:spcPts val="300"/>
-              </a:spcAft>
-              <a:buNone/>
-            </a:pPr>
-            <a:r>
-              <a:rPr lang="ru-RU" altLang="en-US" sz="1150" dirty="0">
-                <a:solidFill>
-                  <a:schemeClr val="accent3"/>
-                </a:solidFill>
-              </a:rPr>
-              <a:t>Понятная и организованная реферальная структура, превращающая услугу в регулярный доход.</a:t>
-            </a:r>
-            <a:endParaRPr lang="ru-RU" sz="1400" dirty="0"/>
-          </a:p>
-        </p:txBody>
-      </p:sp>
-      <p:sp>
-        <p:nvSpPr>
-          <p:cNvPr id="16" name="Text 0"/>
+              <a:t>Пресс-релизы DIFC Courts 2017–2026 и статистический портал</a:t>
+            </a:r>
+            <a:endParaRPr lang="ru-RU" sz="800" dirty="0"/>
+          </a:p>
+        </p:txBody>
+      </p:sp>
+      <p:sp>
+        <p:nvSpPr>
+          <p:cNvPr id="10" name="Text 0"/>
           <p:cNvSpPr/>
           <p:nvPr>
             <p:ph idx="101" type="title" hasCustomPrompt="1"/>
@@ -5226,7 +7553,7 @@
                 <a:ea typeface="Cambria" pitchFamily="34" charset="-122"/>
                 <a:cs typeface="Cambria" pitchFamily="34" charset="-120"/>
               </a:rPr>
-              <a:t>Процесс очень прост</a:t>
+              <a:t>Семейный бизнес Залива в цифрах</a:t>
             </a:r>
             <a:endParaRPr lang="ru-RU" sz="2600" dirty="0"/>
           </a:p>
@@ -5262,7 +7589,7 @@
                   <a:schemeClr val="accent1"/>
                 </a:solidFill>
               </a:rPr>
-              <a:t>ПРОСТОЙ ПРОЦЕСС</a:t>
+              <a:t>ЦИФРЫ</a:t>
             </a:r>
             <a:endParaRPr lang="ru-RU" sz="1000" dirty="0"/>
           </a:p>
@@ -5276,16 +7603,18 @@
         </p:nvSpPr>
         <p:spPr>
           <a:xfrm>
-            <a:off x="731520" y="1600200"/>
-            <a:ext cx="7680960" cy="0"/>
-          </a:xfrm>
-          <a:prstGeom prst="line">
-            <a:avLst/>
-          </a:prstGeom>
-          <a:noFill/>
-          <a:ln w="9525">
+            <a:off x="457200" y="1188720"/>
+            <a:ext cx="1906524" cy="2926080"/>
+          </a:xfrm>
+          <a:prstGeom prst="rect">
+            <a:avLst/>
+          </a:prstGeom>
+          <a:solidFill>
+            <a:srgbClr val="F4F1EB"/>
+          </a:solidFill>
+          <a:ln w="12700">
             <a:solidFill>
-              <a:srgbClr val="D9B38C"/>
+              <a:srgbClr val="F4F1EB"/>
             </a:solidFill>
             <a:prstDash val="solid"/>
           </a:ln>
@@ -5293,24 +7622,119 @@
       </p:sp>
       <p:sp>
         <p:nvSpPr>
-          <p:cNvPr id="5" name="Shape 3"/>
+          <p:cNvPr id="5" name="Text 3"/>
+          <p:cNvSpPr txBox="1"/>
+          <p:nvPr/>
+        </p:nvSpPr>
+        <p:spPr>
+          <a:xfrm>
+            <a:off x="640080" y="1325880"/>
+            <a:ext cx="1540764" cy="914400"/>
+          </a:xfrm>
+          <a:prstGeom prst="rect">
+            <a:avLst/>
+          </a:prstGeom>
+          <a:noFill/>
+          <a:ln/>
+        </p:spPr>
+        <p:txBody>
+          <a:bodyPr wrap="square" lIns="0" tIns="0" rIns="0" bIns="0" rtlCol="0" anchor="ctr"/>
+          <a:lstStyle/>
+          <a:p>
+            <a:pPr algn="l" indent="0" marL="0">
+              <a:buNone/>
+            </a:pPr>
+            <a:r>
+              <a:rPr lang="ru-RU" altLang="en-US" sz="3600" b="1" dirty="0">
+                <a:solidFill>
+                  <a:schemeClr val="accent1"/>
+                </a:solidFill>
+                <a:latin typeface="Cambria" pitchFamily="34" charset="0"/>
+                <a:ea typeface="Cambria" pitchFamily="34" charset="-122"/>
+                <a:cs typeface="Cambria" pitchFamily="34" charset="-120"/>
+              </a:rPr>
+              <a:t>60%</a:t>
+            </a:r>
+            <a:endParaRPr lang="ru-RU" sz="3600" dirty="0"/>
+          </a:p>
+        </p:txBody>
+      </p:sp>
+      <p:sp>
+        <p:nvSpPr>
+          <p:cNvPr id="6" name="Text 4"/>
+          <p:cNvSpPr txBox="1"/>
+          <p:nvPr/>
+        </p:nvSpPr>
+        <p:spPr>
+          <a:xfrm>
+            <a:off x="640080" y="2286000"/>
+            <a:ext cx="1540764" cy="1737360"/>
+          </a:xfrm>
+          <a:prstGeom prst="rect">
+            <a:avLst/>
+          </a:prstGeom>
+          <a:noFill/>
+          <a:ln/>
+        </p:spPr>
+        <p:txBody>
+          <a:bodyPr wrap="square" lIns="0" tIns="0" rIns="0" bIns="0" rtlCol="0" anchor="t"/>
+          <a:lstStyle/>
+          <a:p>
+            <a:pPr algn="l" indent="0" marL="0">
+              <a:spcAft>
+                <a:spcPts val="300"/>
+              </a:spcAft>
+              <a:buNone/>
+            </a:pPr>
+            <a:r>
+              <a:rPr lang="ru-RU" altLang="en-US" sz="1250" b="1" dirty="0">
+                <a:solidFill>
+                  <a:schemeClr val="tx1"/>
+                </a:solidFill>
+              </a:rPr>
+              <a:t>ВВП стран Залива</a:t>
+            </a:r>
+            <a:endParaRPr lang="ru-RU" sz="1250" dirty="0"/>
+          </a:p>
+          <a:p>
+            <a:pPr algn="l" indent="0" marL="0">
+              <a:spcAft>
+                <a:spcPts val="300"/>
+              </a:spcAft>
+              <a:buNone/>
+            </a:pPr>
+            <a:r>
+              <a:rPr lang="ru-RU" altLang="en-US" sz="1000" dirty="0">
+                <a:solidFill>
+                  <a:schemeClr val="accent3"/>
+                </a:solidFill>
+              </a:rPr>
+              <a:t>создаётся семейными компаниями</a:t>
+            </a:r>
+            <a:endParaRPr lang="ru-RU" sz="1250" dirty="0"/>
+          </a:p>
+        </p:txBody>
+      </p:sp>
+      <p:sp>
+        <p:nvSpPr>
+          <p:cNvPr id="7" name="Shape 5"/>
           <p:cNvSpPr/>
           <p:nvPr/>
         </p:nvSpPr>
         <p:spPr>
           <a:xfrm>
-            <a:off x="457200" y="1325880"/>
-            <a:ext cx="548640" cy="548640"/>
-          </a:xfrm>
-          <a:prstGeom prst="ellipse">
+            <a:off x="2564892" y="1188720"/>
+            <a:ext cx="1906524" cy="2926080"/>
+          </a:xfrm>
+          <a:prstGeom prst="rect">
             <a:avLst/>
           </a:prstGeom>
           <a:solidFill>
-            <a:srgbClr val="0E2238"/>
+            <a:srgbClr val="F4F1EB"/>
           </a:solidFill>
           <a:ln w="12700">
             <a:solidFill>
-              <a:srgbClr val="B5723B"/>
+              <a:srgbClr val="F4F1EB"/>
             </a:solidFill>
             <a:prstDash val="solid"/>
           </a:ln>
@@ -5318,14 +7742,14 @@
       </p:sp>
       <p:sp>
         <p:nvSpPr>
-          <p:cNvPr id="6" name="Text 4"/>
+          <p:cNvPr id="8" name="Text 6"/>
           <p:cNvSpPr txBox="1"/>
           <p:nvPr/>
         </p:nvSpPr>
         <p:spPr>
           <a:xfrm>
-            <a:off x="457200" y="1325880"/>
-            <a:ext cx="548640" cy="548640"/>
+            <a:off x="2747772" y="1325880"/>
+            <a:ext cx="1540764" cy="914400"/>
           </a:xfrm>
           <a:prstGeom prst="rect">
             <a:avLst/>
@@ -5337,11 +7761,11 @@
           <a:bodyPr wrap="square" lIns="0" tIns="0" rIns="0" bIns="0" rtlCol="0" anchor="ctr"/>
           <a:lstStyle/>
           <a:p>
-            <a:pPr algn="ctr" indent="0" marL="0">
-              <a:buNone/>
-            </a:pPr>
-            <a:r>
-              <a:rPr lang="en-US" sz="1600" b="1" dirty="0">
+            <a:pPr algn="l" indent="0" marL="0">
+              <a:buNone/>
+            </a:pPr>
+            <a:r>
+              <a:rPr lang="ru-RU" altLang="en-US" sz="3600" b="1" dirty="0">
                 <a:solidFill>
                   <a:schemeClr val="accent1"/>
                 </a:solidFill>
@@ -5349,22 +7773,22 @@
                 <a:ea typeface="Cambria" pitchFamily="34" charset="-122"/>
                 <a:cs typeface="Cambria" pitchFamily="34" charset="-120"/>
               </a:rPr>
-              <a:t>1</a:t>
-            </a:r>
-            <a:endParaRPr lang="en-US" sz="1600" dirty="0"/>
-          </a:p>
-        </p:txBody>
-      </p:sp>
-      <p:sp>
-        <p:nvSpPr>
-          <p:cNvPr id="7" name="Text 5"/>
+              <a:t>80%</a:t>
+            </a:r>
+            <a:endParaRPr lang="ru-RU" sz="3600" dirty="0"/>
+          </a:p>
+        </p:txBody>
+      </p:sp>
+      <p:sp>
+        <p:nvSpPr>
+          <p:cNvPr id="9" name="Text 7"/>
           <p:cNvSpPr txBox="1"/>
           <p:nvPr/>
         </p:nvSpPr>
         <p:spPr>
           <a:xfrm>
-            <a:off x="457200" y="2057400"/>
-            <a:ext cx="1933956" cy="548640"/>
+            <a:off x="2747772" y="2286000"/>
+            <a:ext cx="1540764" cy="1737360"/>
           </a:xfrm>
           <a:prstGeom prst="rect">
             <a:avLst/>
@@ -5377,76 +7801,60 @@
           <a:lstStyle/>
           <a:p>
             <a:pPr algn="l" indent="0" marL="0">
-              <a:buNone/>
-            </a:pPr>
-            <a:r>
-              <a:rPr lang="ru-RU" altLang="en-US" sz="1300" b="1" dirty="0">
+              <a:spcAft>
+                <a:spcPts val="300"/>
+              </a:spcAft>
+              <a:buNone/>
+            </a:pPr>
+            <a:r>
+              <a:rPr lang="ru-RU" altLang="en-US" sz="1250" b="1" dirty="0">
                 <a:solidFill>
                   <a:schemeClr val="tx1"/>
                 </a:solidFill>
               </a:rPr>
-              <a:t>Вы представляете услугу</a:t>
-            </a:r>
-            <a:endParaRPr lang="ru-RU" sz="1300" dirty="0"/>
-          </a:p>
-        </p:txBody>
-      </p:sp>
-      <p:sp>
-        <p:nvSpPr>
-          <p:cNvPr id="8" name="Text 6"/>
-          <p:cNvSpPr txBox="1"/>
-          <p:nvPr/>
-        </p:nvSpPr>
-        <p:spPr>
-          <a:xfrm>
-            <a:off x="457200" y="2606040"/>
-            <a:ext cx="1933956" cy="1828800"/>
-          </a:xfrm>
-          <a:prstGeom prst="rect">
-            <a:avLst/>
-          </a:prstGeom>
-          <a:noFill/>
-          <a:ln/>
-        </p:spPr>
-        <p:txBody>
-          <a:bodyPr wrap="square" lIns="0" tIns="0" rIns="0" bIns="0" rtlCol="0" anchor="t"/>
-          <a:lstStyle/>
-          <a:p>
-            <a:pPr algn="l" indent="0" marL="0">
-              <a:buNone/>
-            </a:pPr>
-            <a:r>
-              <a:rPr lang="ru-RU" altLang="en-US" sz="1050" dirty="0">
+              <a:t>рабочей силы</a:t>
+            </a:r>
+            <a:endParaRPr lang="ru-RU" sz="1250" dirty="0"/>
+          </a:p>
+          <a:p>
+            <a:pPr algn="l" indent="0" marL="0">
+              <a:spcAft>
+                <a:spcPts val="300"/>
+              </a:spcAft>
+              <a:buNone/>
+            </a:pPr>
+            <a:r>
+              <a:rPr lang="ru-RU" altLang="en-US" sz="1000" dirty="0">
                 <a:solidFill>
                   <a:schemeClr val="accent3"/>
                 </a:solidFill>
               </a:rPr>
-              <a:t>Одна фраза в нужный момент плюс стандартное ознакомительное сообщение.</a:t>
-            </a:r>
-            <a:endParaRPr lang="ru-RU" sz="1050" dirty="0"/>
-          </a:p>
-        </p:txBody>
-      </p:sp>
-      <p:sp>
-        <p:nvSpPr>
-          <p:cNvPr id="9" name="Shape 7"/>
+              <a:t>занято в семейных компаниях</a:t>
+            </a:r>
+            <a:endParaRPr lang="ru-RU" sz="1250" dirty="0"/>
+          </a:p>
+        </p:txBody>
+      </p:sp>
+      <p:sp>
+        <p:nvSpPr>
+          <p:cNvPr id="10" name="Shape 8"/>
           <p:cNvSpPr/>
           <p:nvPr/>
         </p:nvSpPr>
         <p:spPr>
           <a:xfrm>
-            <a:off x="2555748" y="1325880"/>
-            <a:ext cx="548640" cy="548640"/>
-          </a:xfrm>
-          <a:prstGeom prst="ellipse">
+            <a:off x="4672584" y="1188720"/>
+            <a:ext cx="1906524" cy="2926080"/>
+          </a:xfrm>
+          <a:prstGeom prst="rect">
             <a:avLst/>
           </a:prstGeom>
           <a:solidFill>
-            <a:srgbClr val="0E2238"/>
+            <a:srgbClr val="F4F1EB"/>
           </a:solidFill>
           <a:ln w="12700">
             <a:solidFill>
-              <a:srgbClr val="B5723B"/>
+              <a:srgbClr val="F4F1EB"/>
             </a:solidFill>
             <a:prstDash val="solid"/>
           </a:ln>
@@ -5454,14 +7862,14 @@
       </p:sp>
       <p:sp>
         <p:nvSpPr>
-          <p:cNvPr id="10" name="Text 8"/>
+          <p:cNvPr id="11" name="Text 9"/>
           <p:cNvSpPr txBox="1"/>
           <p:nvPr/>
         </p:nvSpPr>
         <p:spPr>
           <a:xfrm>
-            <a:off x="2555748" y="1325880"/>
-            <a:ext cx="548640" cy="548640"/>
+            <a:off x="4855464" y="1325880"/>
+            <a:ext cx="1540764" cy="914400"/>
           </a:xfrm>
           <a:prstGeom prst="rect">
             <a:avLst/>
@@ -5473,11 +7881,11 @@
           <a:bodyPr wrap="square" lIns="0" tIns="0" rIns="0" bIns="0" rtlCol="0" anchor="ctr"/>
           <a:lstStyle/>
           <a:p>
-            <a:pPr algn="ctr" indent="0" marL="0">
-              <a:buNone/>
-            </a:pPr>
-            <a:r>
-              <a:rPr lang="en-US" sz="1600" b="1" dirty="0">
+            <a:pPr algn="l" indent="0" marL="0">
+              <a:buNone/>
+            </a:pPr>
+            <a:r>
+              <a:rPr lang="ru-RU" altLang="en-US" sz="3600" b="1" dirty="0">
                 <a:solidFill>
                   <a:schemeClr val="accent1"/>
                 </a:solidFill>
@@ -5485,45 +7893,9 @@
                 <a:ea typeface="Cambria" pitchFamily="34" charset="-122"/>
                 <a:cs typeface="Cambria" pitchFamily="34" charset="-120"/>
               </a:rPr>
-              <a:t>2</a:t>
-            </a:r>
-            <a:endParaRPr lang="en-US" sz="1600" dirty="0"/>
-          </a:p>
-        </p:txBody>
-      </p:sp>
-      <p:sp>
-        <p:nvSpPr>
-          <p:cNvPr id="11" name="Text 9"/>
-          <p:cNvSpPr txBox="1"/>
-          <p:nvPr/>
-        </p:nvSpPr>
-        <p:spPr>
-          <a:xfrm>
-            <a:off x="2555748" y="2057400"/>
-            <a:ext cx="1933956" cy="548640"/>
-          </a:xfrm>
-          <a:prstGeom prst="rect">
-            <a:avLst/>
-          </a:prstGeom>
-          <a:noFill/>
-          <a:ln/>
-        </p:spPr>
-        <p:txBody>
-          <a:bodyPr wrap="square" lIns="0" tIns="0" rIns="0" bIns="0" rtlCol="0" anchor="t"/>
-          <a:lstStyle/>
-          <a:p>
-            <a:pPr algn="l" indent="0" marL="0">
-              <a:buNone/>
-            </a:pPr>
-            <a:r>
-              <a:rPr lang="ru-RU" altLang="en-US" sz="1300" b="1" dirty="0">
-                <a:solidFill>
-                  <a:schemeClr val="tx1"/>
-                </a:solidFill>
-              </a:rPr>
-              <a:t>Мы берём на себя всю правовую сторону</a:t>
-            </a:r>
-            <a:endParaRPr lang="ru-RU" sz="1300" dirty="0"/>
+              <a:t>90%</a:t>
+            </a:r>
+            <a:endParaRPr lang="ru-RU" sz="3600" dirty="0"/>
           </a:p>
         </p:txBody>
       </p:sp>
@@ -5535,8 +7907,8 @@
         </p:nvSpPr>
         <p:spPr>
           <a:xfrm>
-            <a:off x="2555748" y="2606040"/>
-            <a:ext cx="1933956" cy="1828800"/>
+            <a:off x="4855464" y="2286000"/>
+            <a:ext cx="1540764" cy="1737360"/>
           </a:xfrm>
           <a:prstGeom prst="rect">
             <a:avLst/>
@@ -5549,17 +7921,37 @@
           <a:lstStyle/>
           <a:p>
             <a:pPr algn="l" indent="0" marL="0">
-              <a:buNone/>
-            </a:pPr>
-            <a:r>
-              <a:rPr lang="ru-RU" altLang="en-US" sz="1050" dirty="0">
+              <a:spcAft>
+                <a:spcPts val="300"/>
+              </a:spcAft>
+              <a:buNone/>
+            </a:pPr>
+            <a:r>
+              <a:rPr lang="ru-RU" altLang="en-US" sz="1250" b="1" dirty="0">
+                <a:solidFill>
+                  <a:schemeClr val="tx1"/>
+                </a:solidFill>
+              </a:rPr>
+              <a:t>частного сектора ОАЭ и Саудовской Аравии</a:t>
+            </a:r>
+            <a:endParaRPr lang="ru-RU" sz="1250" dirty="0"/>
+          </a:p>
+          <a:p>
+            <a:pPr algn="l" indent="0" marL="0">
+              <a:spcAft>
+                <a:spcPts val="300"/>
+              </a:spcAft>
+              <a:buNone/>
+            </a:pPr>
+            <a:r>
+              <a:rPr lang="ru-RU" altLang="en-US" sz="1000" dirty="0">
                 <a:solidFill>
                   <a:schemeClr val="accent3"/>
                 </a:solidFill>
               </a:rPr>
-              <a:t>Консультация, оценка рисков, составление, перевод, нотариальное заверение, регистрация.</a:t>
-            </a:r>
-            <a:endParaRPr lang="ru-RU" sz="1050" dirty="0"/>
+              <a:t>принадлежит семьям</a:t>
+            </a:r>
+            <a:endParaRPr lang="ru-RU" sz="1250" dirty="0"/>
           </a:p>
         </p:txBody>
       </p:sp>
@@ -5571,18 +7963,18 @@
         </p:nvSpPr>
         <p:spPr>
           <a:xfrm>
-            <a:off x="4654296" y="1325880"/>
-            <a:ext cx="548640" cy="548640"/>
-          </a:xfrm>
-          <a:prstGeom prst="ellipse">
+            <a:off x="6780276" y="1188720"/>
+            <a:ext cx="1906524" cy="2926080"/>
+          </a:xfrm>
+          <a:prstGeom prst="rect">
             <a:avLst/>
           </a:prstGeom>
           <a:solidFill>
-            <a:srgbClr val="0E2238"/>
+            <a:srgbClr val="F4F1EB"/>
           </a:solidFill>
           <a:ln w="12700">
             <a:solidFill>
-              <a:srgbClr val="B5723B"/>
+              <a:srgbClr val="F4F1EB"/>
             </a:solidFill>
             <a:prstDash val="solid"/>
           </a:ln>
@@ -5596,8 +7988,8 @@
         </p:nvSpPr>
         <p:spPr>
           <a:xfrm>
-            <a:off x="4654296" y="1325880"/>
-            <a:ext cx="548640" cy="548640"/>
+            <a:off x="6963156" y="1325880"/>
+            <a:ext cx="1540764" cy="914400"/>
           </a:xfrm>
           <a:prstGeom prst="rect">
             <a:avLst/>
@@ -5609,11 +8001,11 @@
           <a:bodyPr wrap="square" lIns="0" tIns="0" rIns="0" bIns="0" rtlCol="0" anchor="ctr"/>
           <a:lstStyle/>
           <a:p>
-            <a:pPr algn="ctr" indent="0" marL="0">
-              <a:buNone/>
-            </a:pPr>
-            <a:r>
-              <a:rPr lang="en-US" sz="1600" b="1" dirty="0">
+            <a:pPr algn="l" indent="0" marL="0">
+              <a:buNone/>
+            </a:pPr>
+            <a:r>
+              <a:rPr lang="ru-RU" altLang="en-US" sz="3600" b="1" dirty="0">
                 <a:solidFill>
                   <a:schemeClr val="accent1"/>
                 </a:solidFill>
@@ -5621,9 +8013,9 @@
                 <a:ea typeface="Cambria" pitchFamily="34" charset="-122"/>
                 <a:cs typeface="Cambria" pitchFamily="34" charset="-120"/>
               </a:rPr>
-              <a:t>3</a:t>
-            </a:r>
-            <a:endParaRPr lang="en-US" sz="1600" dirty="0"/>
+              <a:t>$1T</a:t>
+            </a:r>
+            <a:endParaRPr lang="ru-RU" sz="3600" dirty="0"/>
           </a:p>
         </p:txBody>
       </p:sp>
@@ -5635,8 +8027,8 @@
         </p:nvSpPr>
         <p:spPr>
           <a:xfrm>
-            <a:off x="4654296" y="2057400"/>
-            <a:ext cx="1933956" cy="548640"/>
+            <a:off x="6963156" y="2286000"/>
+            <a:ext cx="1540764" cy="1737360"/>
           </a:xfrm>
           <a:prstGeom prst="rect">
             <a:avLst/>
@@ -5649,17 +8041,37 @@
           <a:lstStyle/>
           <a:p>
             <a:pPr algn="l" indent="0" marL="0">
-              <a:buNone/>
-            </a:pPr>
-            <a:r>
-              <a:rPr lang="ru-RU" altLang="en-US" sz="1300" b="1" dirty="0">
+              <a:spcAft>
+                <a:spcPts val="300"/>
+              </a:spcAft>
+              <a:buNone/>
+            </a:pPr>
+            <a:r>
+              <a:rPr lang="ru-RU" altLang="en-US" sz="1250" b="1" dirty="0">
                 <a:solidFill>
                   <a:schemeClr val="tx1"/>
                 </a:solidFill>
               </a:rPr>
-              <a:t>Наша команда ведёт клиента от начала до конца</a:t>
-            </a:r>
-            <a:endParaRPr lang="ru-RU" sz="1300" dirty="0"/>
+              <a:t>активов перейдёт между поколениями к 2030 г.</a:t>
+            </a:r>
+            <a:endParaRPr lang="ru-RU" sz="1250" dirty="0"/>
+          </a:p>
+          <a:p>
+            <a:pPr algn="l" indent="0" marL="0">
+              <a:spcAft>
+                <a:spcPts val="300"/>
+              </a:spcAft>
+              <a:buNone/>
+            </a:pPr>
+            <a:r>
+              <a:rPr lang="ru-RU" altLang="en-US" sz="1000" dirty="0">
+                <a:solidFill>
+                  <a:schemeClr val="accent3"/>
+                </a:solidFill>
+              </a:rPr>
+              <a:t>по странам Залива</a:t>
+            </a:r>
+            <a:endParaRPr lang="ru-RU" sz="1250" dirty="0"/>
           </a:p>
         </p:txBody>
       </p:sp>
@@ -5671,173 +8083,37 @@
         </p:nvSpPr>
         <p:spPr>
           <a:xfrm>
-            <a:off x="4654296" y="2606040"/>
-            <a:ext cx="1933956" cy="1828800"/>
-          </a:xfrm>
-          <a:prstGeom prst="rect">
-            <a:avLst/>
-          </a:prstGeom>
-          <a:noFill/>
-          <a:ln/>
-        </p:spPr>
-        <p:txBody>
-          <a:bodyPr wrap="square" lIns="0" tIns="0" rIns="0" bIns="0" rtlCol="0" anchor="t"/>
-          <a:lstStyle/>
-          <a:p>
-            <a:pPr algn="l" indent="0" marL="0">
-              <a:buNone/>
-            </a:pPr>
-            <a:r>
-              <a:rPr lang="ru-RU" altLang="en-US" sz="1050" dirty="0">
+            <a:off x="457200" y="4187952"/>
+            <a:ext cx="8229600" cy="384048"/>
+          </a:xfrm>
+          <a:prstGeom prst="rect">
+            <a:avLst/>
+          </a:prstGeom>
+          <a:noFill/>
+          <a:ln/>
+        </p:spPr>
+        <p:txBody>
+          <a:bodyPr wrap="square" lIns="0" tIns="0" rIns="0" bIns="0" rtlCol="0" anchor="ctr"/>
+          <a:lstStyle/>
+          <a:p>
+            <a:pPr algn="l" indent="0" marL="0">
+              <a:buNone/>
+            </a:pPr>
+            <a:r>
+              <a:rPr lang="ru-RU" altLang="en-US" sz="800" i="1" dirty="0">
                 <a:solidFill>
                   <a:schemeClr val="accent3"/>
                 </a:solidFill>
               </a:rPr>
-              <a:t>Первый контакт в течение одного рабочего дня, регулярные обновления для вас и клиента.</a:t>
-            </a:r>
-            <a:endParaRPr lang="ru-RU" sz="1050" dirty="0"/>
-          </a:p>
-        </p:txBody>
-      </p:sp>
-      <p:sp>
-        <p:nvSpPr>
-          <p:cNvPr id="17" name="Shape 15"/>
-          <p:cNvSpPr/>
-          <p:nvPr/>
-        </p:nvSpPr>
-        <p:spPr>
-          <a:xfrm>
-            <a:off x="6752844" y="1325880"/>
-            <a:ext cx="548640" cy="548640"/>
-          </a:xfrm>
-          <a:prstGeom prst="ellipse">
-            <a:avLst/>
-          </a:prstGeom>
-          <a:solidFill>
-            <a:srgbClr val="0E2238"/>
-          </a:solidFill>
-          <a:ln w="12700">
-            <a:solidFill>
-              <a:srgbClr val="B5723B"/>
-            </a:solidFill>
-            <a:prstDash val="solid"/>
-          </a:ln>
-        </p:spPr>
-      </p:sp>
-      <p:sp>
-        <p:nvSpPr>
-          <p:cNvPr id="18" name="Text 16"/>
-          <p:cNvSpPr txBox="1"/>
-          <p:nvPr/>
-        </p:nvSpPr>
-        <p:spPr>
-          <a:xfrm>
-            <a:off x="6752844" y="1325880"/>
-            <a:ext cx="548640" cy="548640"/>
-          </a:xfrm>
-          <a:prstGeom prst="rect">
-            <a:avLst/>
-          </a:prstGeom>
-          <a:noFill/>
-          <a:ln/>
-        </p:spPr>
-        <p:txBody>
-          <a:bodyPr wrap="square" lIns="0" tIns="0" rIns="0" bIns="0" rtlCol="0" anchor="ctr"/>
-          <a:lstStyle/>
-          <a:p>
-            <a:pPr algn="ctr" indent="0" marL="0">
-              <a:buNone/>
-            </a:pPr>
-            <a:r>
-              <a:rPr lang="en-US" sz="1600" b="1" dirty="0">
-                <a:solidFill>
-                  <a:schemeClr val="accent1"/>
-                </a:solidFill>
-                <a:latin typeface="Cambria" pitchFamily="34" charset="0"/>
-                <a:ea typeface="Cambria" pitchFamily="34" charset="-122"/>
-                <a:cs typeface="Cambria" pitchFamily="34" charset="-120"/>
-              </a:rPr>
-              <a:t>4</a:t>
-            </a:r>
-            <a:endParaRPr lang="en-US" sz="1600" dirty="0"/>
-          </a:p>
-        </p:txBody>
-      </p:sp>
-      <p:sp>
-        <p:nvSpPr>
-          <p:cNvPr id="19" name="Text 17"/>
-          <p:cNvSpPr txBox="1"/>
-          <p:nvPr/>
-        </p:nvSpPr>
-        <p:spPr>
-          <a:xfrm>
-            <a:off x="6752844" y="2057400"/>
-            <a:ext cx="1933956" cy="548640"/>
-          </a:xfrm>
-          <a:prstGeom prst="rect">
-            <a:avLst/>
-          </a:prstGeom>
-          <a:noFill/>
-          <a:ln/>
-        </p:spPr>
-        <p:txBody>
-          <a:bodyPr wrap="square" lIns="0" tIns="0" rIns="0" bIns="0" rtlCol="0" anchor="t"/>
-          <a:lstStyle/>
-          <a:p>
-            <a:pPr algn="l" indent="0" marL="0">
-              <a:buNone/>
-            </a:pPr>
-            <a:r>
-              <a:rPr lang="ru-RU" altLang="en-US" sz="1300" b="1" dirty="0">
-                <a:solidFill>
-                  <a:schemeClr val="tx1"/>
-                </a:solidFill>
-              </a:rPr>
-              <a:t>Вы в курсе дел без какой-либо юридической ответственности</a:t>
-            </a:r>
-            <a:endParaRPr lang="ru-RU" sz="1300" dirty="0"/>
-          </a:p>
-        </p:txBody>
-      </p:sp>
-      <p:sp>
-        <p:nvSpPr>
-          <p:cNvPr id="20" name="Text 18"/>
-          <p:cNvSpPr txBox="1"/>
-          <p:nvPr/>
-        </p:nvSpPr>
-        <p:spPr>
-          <a:xfrm>
-            <a:off x="6752844" y="2606040"/>
-            <a:ext cx="1933956" cy="1828800"/>
-          </a:xfrm>
-          <a:prstGeom prst="rect">
-            <a:avLst/>
-          </a:prstGeom>
-          <a:noFill/>
-          <a:ln/>
-        </p:spPr>
-        <p:txBody>
-          <a:bodyPr wrap="square" lIns="0" tIns="0" rIns="0" bIns="0" rtlCol="0" anchor="t"/>
-          <a:lstStyle/>
-          <a:p>
-            <a:pPr algn="l" indent="0" marL="0">
-              <a:buNone/>
-            </a:pPr>
-            <a:r>
-              <a:rPr lang="ru-RU" altLang="en-US" sz="1050" dirty="0">
-                <a:solidFill>
-                  <a:schemeClr val="accent3"/>
-                </a:solidFill>
-              </a:rPr>
-              <a:t>Ежемесячный отчёт и комиссия, выплачиваемая по соглашению.</a:t>
-            </a:r>
-            <a:endParaRPr lang="ru-RU" sz="1050" dirty="0"/>
-          </a:p>
-        </p:txBody>
-      </p:sp>
-      <p:sp>
-        <p:nvSpPr>
-          <p:cNvPr id="21" name="Text 0"/>
+              <a:t>Gulf News, фев. 2023 (Jersey Finance); Khaleej Times, май 2026 (Georgetown McDonough, программа в Дубае).</a:t>
+            </a:r>
+            <a:endParaRPr lang="ru-RU" sz="800" dirty="0"/>
+          </a:p>
+        </p:txBody>
+      </p:sp>
+      <p:sp>
+        <p:nvSpPr>
+          <p:cNvPr id="17" name="Text 0"/>
           <p:cNvSpPr/>
           <p:nvPr>
             <p:ph idx="101" type="title" hasCustomPrompt="1"/>
@@ -5968,7 +8244,7 @@
                 <a:ea typeface="Cambria" pitchFamily="34" charset="-122"/>
                 <a:cs typeface="Cambria" pitchFamily="34" charset="-120"/>
               </a:rPr>
-              <a:t>Ваша роль и наша</a:t>
+              <a:t>Что получает ваш клиент</a:t>
             </a:r>
             <a:endParaRPr lang="ru-RU" sz="2600" dirty="0"/>
           </a:p>
@@ -6004,7 +8280,7 @@
                   <a:schemeClr val="accent1"/>
                 </a:solidFill>
               </a:rPr>
-              <a:t>РАСПРЕДЕЛЕНИЕ РОЛЕЙ</a:t>
+              <a:t>УСЛУГА</a:t>
             </a:r>
             <a:endParaRPr lang="ru-RU" sz="1000" dirty="0"/>
           </a:p>
@@ -6019,68 +8295,7 @@
         <p:spPr>
           <a:xfrm>
             <a:off x="457200" y="1188720"/>
-            <a:ext cx="4000500" cy="548640"/>
-          </a:xfrm>
-          <a:prstGeom prst="rect">
-            <a:avLst/>
-          </a:prstGeom>
-          <a:solidFill>
-            <a:srgbClr val="0E2238"/>
-          </a:solidFill>
-          <a:ln w="12700">
-            <a:solidFill>
-              <a:srgbClr val="0E2238"/>
-            </a:solidFill>
-            <a:prstDash val="solid"/>
-          </a:ln>
-        </p:spPr>
-      </p:sp>
-      <p:sp>
-        <p:nvSpPr>
-          <p:cNvPr id="5" name="Text 3"/>
-          <p:cNvSpPr txBox="1"/>
-          <p:nvPr/>
-        </p:nvSpPr>
-        <p:spPr>
-          <a:xfrm>
-            <a:off x="594360" y="1188720"/>
-            <a:ext cx="3726180" cy="548640"/>
-          </a:xfrm>
-          <a:prstGeom prst="rect">
-            <a:avLst/>
-          </a:prstGeom>
-          <a:noFill/>
-          <a:ln/>
-        </p:spPr>
-        <p:txBody>
-          <a:bodyPr wrap="square" lIns="0" tIns="0" rIns="0" bIns="0" rtlCol="0" anchor="ctr"/>
-          <a:lstStyle/>
-          <a:p>
-            <a:pPr algn="l" indent="0" marL="0">
-              <a:buNone/>
-            </a:pPr>
-            <a:r>
-              <a:rPr lang="ru-RU" altLang="en-US" sz="1300" b="1" dirty="0">
-                <a:solidFill>
-                  <a:schemeClr val="accent2"/>
-                </a:solidFill>
-              </a:rPr>
-              <a:t>Агентство</a:t>
-            </a:r>
-            <a:endParaRPr lang="ru-RU" sz="1300" dirty="0"/>
-          </a:p>
-        </p:txBody>
-      </p:sp>
-      <p:sp>
-        <p:nvSpPr>
-          <p:cNvPr id="6" name="Shape 4"/>
-          <p:cNvSpPr/>
-          <p:nvPr/>
-        </p:nvSpPr>
-        <p:spPr>
-          <a:xfrm>
-            <a:off x="457200" y="1737360"/>
-            <a:ext cx="4000500" cy="2697480"/>
+            <a:ext cx="1885950" cy="3246120"/>
           </a:xfrm>
           <a:prstGeom prst="rect">
             <a:avLst/>
@@ -6096,16 +8311,40 @@
           </a:ln>
         </p:spPr>
       </p:sp>
-      <p:sp>
-        <p:nvSpPr>
-          <p:cNvPr id="7" name="Text 5"/>
+      <p:pic>
+        <p:nvPicPr>
+          <p:cNvPr id="5" name="icon FaFileSignature" descr="preencoded.png">    </p:cNvPr>
+          <p:cNvPicPr>
+            <a:picLocks noChangeAspect="1"/>
+          </p:cNvPicPr>
+          <p:nvPr/>
+        </p:nvPicPr>
+        <p:blipFill>
+          <a:blip r:embed="rId1"/>
+          <a:stretch>
+            <a:fillRect/>
+          </a:stretch>
+        </p:blipFill>
+        <p:spPr>
+          <a:xfrm>
+            <a:off x="658368" y="1389888"/>
+            <a:ext cx="310896" cy="310896"/>
+          </a:xfrm>
+          <a:prstGeom prst="rect">
+            <a:avLst/>
+          </a:prstGeom>
+        </p:spPr>
+      </p:pic>
+      <p:sp>
+        <p:nvSpPr>
+          <p:cNvPr id="6" name="Text 3"/>
           <p:cNvSpPr txBox="1"/>
           <p:nvPr/>
         </p:nvSpPr>
         <p:spPr>
           <a:xfrm>
-            <a:off x="594360" y="1874520"/>
-            <a:ext cx="3726180" cy="2468880"/>
+            <a:off x="658368" y="1828800"/>
+            <a:ext cx="1483614" cy="2450592"/>
           </a:xfrm>
           <a:prstGeom prst="rect">
             <a:avLst/>
@@ -6117,150 +8356,51 @@
           <a:bodyPr wrap="square" lIns="0" tIns="0" rIns="0" bIns="0" rtlCol="0" anchor="t"/>
           <a:lstStyle/>
           <a:p>
-            <a:pPr algn="l" marL="152400" indent="-152400">
+            <a:pPr algn="l" indent="0" marL="0">
               <a:spcAft>
-                <a:spcPts val="500"/>
+                <a:spcPts val="300"/>
               </a:spcAft>
-              <a:buSzPct val="100000"/>
-              <a:buChar char="•"/>
-            </a:pPr>
-            <a:r>
-              <a:rPr lang="ru-RU" altLang="en-US" sz="1100" dirty="0">
-                <a:solidFill>
-                  <a:schemeClr val="tx2"/>
-                </a:solidFill>
-              </a:rPr>
-              <a:t>Представляет услугу и направляет клиента</a:t>
-            </a:r>
-            <a:endParaRPr lang="ru-RU" sz="1100" dirty="0"/>
-          </a:p>
-          <a:p>
-            <a:pPr algn="l" marL="152400" indent="-152400">
+              <a:buNone/>
+            </a:pPr>
+            <a:r>
+              <a:rPr lang="ru-RU" altLang="en-US" sz="1400" b="1" dirty="0">
+                <a:solidFill>
+                  <a:schemeClr val="tx1"/>
+                </a:solidFill>
+              </a:rPr>
+              <a:t>Действительное завещание, внесённое в реестр</a:t>
+            </a:r>
+            <a:endParaRPr lang="ru-RU" sz="1400" dirty="0"/>
+          </a:p>
+          <a:p>
+            <a:pPr algn="l" indent="0" marL="0">
               <a:spcAft>
-                <a:spcPts val="500"/>
+                <a:spcPts val="300"/>
               </a:spcAft>
-              <a:buSzPct val="100000"/>
-              <a:buChar char="•"/>
-            </a:pPr>
-            <a:r>
-              <a:rPr lang="ru-RU" altLang="en-US" sz="1100" dirty="0">
-                <a:solidFill>
-                  <a:schemeClr val="tx2"/>
-                </a:solidFill>
-              </a:rPr>
-              <a:t>Представляет её как дополнительную ценность в своём предложении</a:t>
-            </a:r>
-            <a:endParaRPr lang="ru-RU" sz="1100" dirty="0"/>
-          </a:p>
-          <a:p>
-            <a:pPr algn="l" marL="152400" indent="-152400">
-              <a:spcAft>
-                <a:spcPts val="500"/>
-              </a:spcAft>
-              <a:buSzPct val="100000"/>
-              <a:buChar char="•"/>
-            </a:pPr>
-            <a:r>
-              <a:rPr lang="ru-RU" altLang="en-US" sz="1100" dirty="0">
-                <a:solidFill>
-                  <a:schemeClr val="tx2"/>
-                </a:solidFill>
-              </a:rPr>
-              <a:t>Не даёт юридических консультаций и не гарантирует результатов</a:t>
-            </a:r>
-            <a:endParaRPr lang="ru-RU" sz="1100" dirty="0"/>
-          </a:p>
-          <a:p>
-            <a:pPr algn="l" marL="152400" indent="-152400">
-              <a:spcAft>
-                <a:spcPts val="500"/>
-              </a:spcAft>
-              <a:buSzPct val="100000"/>
-              <a:buChar char="•"/>
-            </a:pPr>
-            <a:r>
-              <a:rPr lang="ru-RU" altLang="en-US" sz="1100" dirty="0">
-                <a:solidFill>
-                  <a:schemeClr val="tx2"/>
-                </a:solidFill>
-              </a:rPr>
-              <a:t>Получает реферальное вознаграждение</a:t>
-            </a:r>
-            <a:endParaRPr lang="ru-RU" sz="1100" dirty="0"/>
-          </a:p>
-        </p:txBody>
-      </p:sp>
-      <p:sp>
-        <p:nvSpPr>
-          <p:cNvPr id="8" name="Shape 6"/>
+              <a:buNone/>
+            </a:pPr>
+            <a:r>
+              <a:rPr lang="ru-RU" altLang="en-US" sz="1150" dirty="0">
+                <a:solidFill>
+                  <a:schemeClr val="accent3"/>
+                </a:solidFill>
+              </a:rPr>
+              <a:t>Совместимое с судами Дубая, Абу-Даби, DIFC или ADGM в зависимости от случая.</a:t>
+            </a:r>
+            <a:endParaRPr lang="ru-RU" sz="1400" dirty="0"/>
+          </a:p>
+        </p:txBody>
+      </p:sp>
+      <p:sp>
+        <p:nvSpPr>
+          <p:cNvPr id="7" name="Shape 4"/>
           <p:cNvSpPr/>
           <p:nvPr/>
         </p:nvSpPr>
         <p:spPr>
           <a:xfrm>
-            <a:off x="4686300" y="1188720"/>
-            <a:ext cx="4000500" cy="548640"/>
-          </a:xfrm>
-          <a:prstGeom prst="rect">
-            <a:avLst/>
-          </a:prstGeom>
-          <a:solidFill>
-            <a:srgbClr val="B5723B"/>
-          </a:solidFill>
-          <a:ln w="12700">
-            <a:solidFill>
-              <a:srgbClr val="B5723B"/>
-            </a:solidFill>
-            <a:prstDash val="solid"/>
-          </a:ln>
-        </p:spPr>
-      </p:sp>
-      <p:sp>
-        <p:nvSpPr>
-          <p:cNvPr id="9" name="Text 7"/>
-          <p:cNvSpPr txBox="1"/>
-          <p:nvPr/>
-        </p:nvSpPr>
-        <p:spPr>
-          <a:xfrm>
-            <a:off x="4823460" y="1188720"/>
-            <a:ext cx="3726180" cy="548640"/>
-          </a:xfrm>
-          <a:prstGeom prst="rect">
-            <a:avLst/>
-          </a:prstGeom>
-          <a:noFill/>
-          <a:ln/>
-        </p:spPr>
-        <p:txBody>
-          <a:bodyPr wrap="square" lIns="0" tIns="0" rIns="0" bIns="0" rtlCol="0" anchor="ctr"/>
-          <a:lstStyle/>
-          <a:p>
-            <a:pPr algn="l" indent="0" marL="0">
-              <a:buNone/>
-            </a:pPr>
-            <a:r>
-              <a:rPr lang="ru-RU" altLang="en-US" sz="1300" b="1" dirty="0">
-                <a:solidFill>
-                  <a:schemeClr val="tx1"/>
-                </a:solidFill>
-              </a:rPr>
-              <a:t>Rashid Alkaitoob Advocates</a:t>
-            </a:r>
-            <a:endParaRPr lang="ru-RU" sz="1300" dirty="0"/>
-          </a:p>
-        </p:txBody>
-      </p:sp>
-      <p:sp>
-        <p:nvSpPr>
-          <p:cNvPr id="10" name="Shape 8"/>
-          <p:cNvSpPr/>
-          <p:nvPr/>
-        </p:nvSpPr>
-        <p:spPr>
-          <a:xfrm>
-            <a:off x="4686300" y="1737360"/>
-            <a:ext cx="4000500" cy="2697480"/>
+            <a:off x="2571750" y="1188720"/>
+            <a:ext cx="1885950" cy="3246120"/>
           </a:xfrm>
           <a:prstGeom prst="rect">
             <a:avLst/>
@@ -6276,16 +8416,40 @@
           </a:ln>
         </p:spPr>
       </p:sp>
-      <p:sp>
-        <p:nvSpPr>
-          <p:cNvPr id="11" name="Text 9"/>
+      <p:pic>
+        <p:nvPicPr>
+          <p:cNvPr id="8" name="icon FaHouse" descr="preencoded.png">    </p:cNvPr>
+          <p:cNvPicPr>
+            <a:picLocks noChangeAspect="1"/>
+          </p:cNvPicPr>
+          <p:nvPr/>
+        </p:nvPicPr>
+        <p:blipFill>
+          <a:blip r:embed="rId2"/>
+          <a:stretch>
+            <a:fillRect/>
+          </a:stretch>
+        </p:blipFill>
+        <p:spPr>
+          <a:xfrm>
+            <a:off x="2772918" y="1389888"/>
+            <a:ext cx="310896" cy="310896"/>
+          </a:xfrm>
+          <a:prstGeom prst="rect">
+            <a:avLst/>
+          </a:prstGeom>
+        </p:spPr>
+      </p:pic>
+      <p:sp>
+        <p:nvSpPr>
+          <p:cNvPr id="9" name="Text 5"/>
           <p:cNvSpPr txBox="1"/>
           <p:nvPr/>
         </p:nvSpPr>
         <p:spPr>
           <a:xfrm>
-            <a:off x="4823460" y="1874520"/>
-            <a:ext cx="3726180" cy="2468880"/>
+            <a:off x="2772918" y="1828800"/>
+            <a:ext cx="1483614" cy="2450592"/>
           </a:xfrm>
           <a:prstGeom prst="rect">
             <a:avLst/>
@@ -6297,82 +8461,254 @@
           <a:bodyPr wrap="square" lIns="0" tIns="0" rIns="0" bIns="0" rtlCol="0" anchor="t"/>
           <a:lstStyle/>
           <a:p>
-            <a:pPr algn="l" marL="152400" indent="-152400">
+            <a:pPr algn="l" indent="0" marL="0">
               <a:spcAft>
-                <a:spcPts val="500"/>
+                <a:spcPts val="300"/>
               </a:spcAft>
-              <a:buSzPct val="100000"/>
-              <a:buChar char="•"/>
-            </a:pPr>
-            <a:r>
-              <a:rPr lang="ru-RU" altLang="en-US" sz="1100" dirty="0">
-                <a:solidFill>
-                  <a:schemeClr val="tx2"/>
-                </a:solidFill>
-              </a:rPr>
-              <a:t>Юридическая консультация и составление завещания</a:t>
-            </a:r>
-            <a:endParaRPr lang="ru-RU" sz="1100" dirty="0"/>
-          </a:p>
-          <a:p>
-            <a:pPr algn="l" marL="152400" indent="-152400">
+              <a:buNone/>
+            </a:pPr>
+            <a:r>
+              <a:rPr lang="ru-RU" altLang="en-US" sz="1400" b="1" dirty="0">
+                <a:solidFill>
+                  <a:schemeClr val="tx1"/>
+                </a:solidFill>
+              </a:rPr>
+              <a:t>Защищённые недвижимость и счета</a:t>
+            </a:r>
+            <a:endParaRPr lang="ru-RU" sz="1400" dirty="0"/>
+          </a:p>
+          <a:p>
+            <a:pPr algn="l" indent="0" marL="0">
               <a:spcAft>
-                <a:spcPts val="500"/>
+                <a:spcPts val="300"/>
               </a:spcAft>
-              <a:buSzPct val="100000"/>
-              <a:buChar char="•"/>
-            </a:pPr>
-            <a:r>
-              <a:rPr lang="ru-RU" altLang="en-US" sz="1100" dirty="0">
-                <a:solidFill>
-                  <a:schemeClr val="tx2"/>
-                </a:solidFill>
-              </a:rPr>
-              <a:t>Регистрация и взаимодействие с органами</a:t>
-            </a:r>
-            <a:endParaRPr lang="ru-RU" sz="1100" dirty="0"/>
-          </a:p>
-          <a:p>
-            <a:pPr algn="l" marL="152400" indent="-152400">
+              <a:buNone/>
+            </a:pPr>
+            <a:r>
+              <a:rPr lang="ru-RU" altLang="en-US" sz="1150" dirty="0">
+                <a:solidFill>
+                  <a:schemeClr val="accent3"/>
+                </a:solidFill>
+              </a:rPr>
+              <a:t>Механизмы, предотвращающие заморозку и закрепляющие порядок наследования.</a:t>
+            </a:r>
+            <a:endParaRPr lang="ru-RU" sz="1400" dirty="0"/>
+          </a:p>
+        </p:txBody>
+      </p:sp>
+      <p:sp>
+        <p:nvSpPr>
+          <p:cNvPr id="10" name="Shape 6"/>
+          <p:cNvSpPr/>
+          <p:nvPr/>
+        </p:nvSpPr>
+        <p:spPr>
+          <a:xfrm>
+            <a:off x="4686300" y="1188720"/>
+            <a:ext cx="1885950" cy="3246120"/>
+          </a:xfrm>
+          <a:prstGeom prst="rect">
+            <a:avLst/>
+          </a:prstGeom>
+          <a:solidFill>
+            <a:srgbClr val="F4F1EB"/>
+          </a:solidFill>
+          <a:ln w="12700">
+            <a:solidFill>
+              <a:srgbClr val="F4F1EB"/>
+            </a:solidFill>
+            <a:prstDash val="solid"/>
+          </a:ln>
+        </p:spPr>
+      </p:sp>
+      <p:pic>
+        <p:nvPicPr>
+          <p:cNvPr id="11" name="icon FaChildren" descr="preencoded.png">    </p:cNvPr>
+          <p:cNvPicPr>
+            <a:picLocks noChangeAspect="1"/>
+          </p:cNvPicPr>
+          <p:nvPr/>
+        </p:nvPicPr>
+        <p:blipFill>
+          <a:blip r:embed="rId3"/>
+          <a:stretch>
+            <a:fillRect/>
+          </a:stretch>
+        </p:blipFill>
+        <p:spPr>
+          <a:xfrm>
+            <a:off x="4887468" y="1389888"/>
+            <a:ext cx="310896" cy="310896"/>
+          </a:xfrm>
+          <a:prstGeom prst="rect">
+            <a:avLst/>
+          </a:prstGeom>
+        </p:spPr>
+      </p:pic>
+      <p:sp>
+        <p:nvSpPr>
+          <p:cNvPr id="12" name="Text 7"/>
+          <p:cNvSpPr txBox="1"/>
+          <p:nvPr/>
+        </p:nvSpPr>
+        <p:spPr>
+          <a:xfrm>
+            <a:off x="4887468" y="1828800"/>
+            <a:ext cx="1483614" cy="2450592"/>
+          </a:xfrm>
+          <a:prstGeom prst="rect">
+            <a:avLst/>
+          </a:prstGeom>
+          <a:noFill/>
+          <a:ln/>
+        </p:spPr>
+        <p:txBody>
+          <a:bodyPr wrap="square" lIns="0" tIns="0" rIns="0" bIns="0" rtlCol="0" anchor="t"/>
+          <a:lstStyle/>
+          <a:p>
+            <a:pPr algn="l" indent="0" marL="0">
               <a:spcAft>
-                <a:spcPts val="500"/>
+                <a:spcPts val="300"/>
               </a:spcAft>
-              <a:buSzPct val="100000"/>
-              <a:buChar char="•"/>
-            </a:pPr>
-            <a:r>
-              <a:rPr lang="ru-RU" altLang="en-US" sz="1100" dirty="0">
-                <a:solidFill>
-                  <a:schemeClr val="tx2"/>
-                </a:solidFill>
-              </a:rPr>
-              <a:t>Защищает брокера от любой юридической ответственности</a:t>
-            </a:r>
-            <a:endParaRPr lang="ru-RU" sz="1100" dirty="0"/>
-          </a:p>
-          <a:p>
-            <a:pPr algn="l" marL="152400" indent="-152400">
+              <a:buNone/>
+            </a:pPr>
+            <a:r>
+              <a:rPr lang="ru-RU" altLang="en-US" sz="1400" b="1" dirty="0">
+                <a:solidFill>
+                  <a:schemeClr val="tx1"/>
+                </a:solidFill>
+              </a:rPr>
+              <a:t>Защищённые семья и дети</a:t>
+            </a:r>
+            <a:endParaRPr lang="ru-RU" sz="1400" dirty="0"/>
+          </a:p>
+          <a:p>
+            <a:pPr algn="l" indent="0" marL="0">
               <a:spcAft>
-                <a:spcPts val="500"/>
+                <a:spcPts val="300"/>
               </a:spcAft>
-              <a:buSzPct val="100000"/>
-              <a:buChar char="•"/>
-            </a:pPr>
-            <a:r>
-              <a:rPr lang="ru-RU" altLang="en-US" sz="1100" dirty="0">
-                <a:solidFill>
-                  <a:schemeClr val="tx2"/>
-                </a:solidFill>
-              </a:rPr>
-              <a:t>Сервис уровня консьерж на четырёх языках</a:t>
-            </a:r>
-            <a:endParaRPr lang="ru-RU" sz="1100" dirty="0"/>
-          </a:p>
-        </p:txBody>
-      </p:sp>
-      <p:sp>
-        <p:nvSpPr>
-          <p:cNvPr id="12" name="Text 0"/>
+              <a:buNone/>
+            </a:pPr>
+            <a:r>
+              <a:rPr lang="ru-RU" altLang="en-US" sz="1150" dirty="0">
+                <a:solidFill>
+                  <a:schemeClr val="accent3"/>
+                </a:solidFill>
+              </a:rPr>
+              <a:t>Назначенные опекуны и определённые наследники в ОАЭ и за рубежом.</a:t>
+            </a:r>
+            <a:endParaRPr lang="ru-RU" sz="1400" dirty="0"/>
+          </a:p>
+        </p:txBody>
+      </p:sp>
+      <p:sp>
+        <p:nvSpPr>
+          <p:cNvPr id="13" name="Shape 8"/>
+          <p:cNvSpPr/>
+          <p:nvPr/>
+        </p:nvSpPr>
+        <p:spPr>
+          <a:xfrm>
+            <a:off x="6800850" y="1188720"/>
+            <a:ext cx="1885950" cy="3246120"/>
+          </a:xfrm>
+          <a:prstGeom prst="rect">
+            <a:avLst/>
+          </a:prstGeom>
+          <a:solidFill>
+            <a:srgbClr val="F4F1EB"/>
+          </a:solidFill>
+          <a:ln w="12700">
+            <a:solidFill>
+              <a:srgbClr val="F4F1EB"/>
+            </a:solidFill>
+            <a:prstDash val="solid"/>
+          </a:ln>
+        </p:spPr>
+      </p:sp>
+      <p:pic>
+        <p:nvPicPr>
+          <p:cNvPr id="14" name="icon FaSitemap" descr="preencoded.png">    </p:cNvPr>
+          <p:cNvPicPr>
+            <a:picLocks noChangeAspect="1"/>
+          </p:cNvPicPr>
+          <p:nvPr/>
+        </p:nvPicPr>
+        <p:blipFill>
+          <a:blip r:embed="rId4"/>
+          <a:stretch>
+            <a:fillRect/>
+          </a:stretch>
+        </p:blipFill>
+        <p:spPr>
+          <a:xfrm>
+            <a:off x="7002018" y="1389888"/>
+            <a:ext cx="310896" cy="310896"/>
+          </a:xfrm>
+          <a:prstGeom prst="rect">
+            <a:avLst/>
+          </a:prstGeom>
+        </p:spPr>
+      </p:pic>
+      <p:sp>
+        <p:nvSpPr>
+          <p:cNvPr id="15" name="Text 9"/>
+          <p:cNvSpPr txBox="1"/>
+          <p:nvPr/>
+        </p:nvSpPr>
+        <p:spPr>
+          <a:xfrm>
+            <a:off x="7002018" y="1828800"/>
+            <a:ext cx="1483614" cy="2450592"/>
+          </a:xfrm>
+          <a:prstGeom prst="rect">
+            <a:avLst/>
+          </a:prstGeom>
+          <a:noFill/>
+          <a:ln/>
+        </p:spPr>
+        <p:txBody>
+          <a:bodyPr wrap="square" lIns="0" tIns="0" rIns="0" bIns="0" rtlCol="0" anchor="t"/>
+          <a:lstStyle/>
+          <a:p>
+            <a:pPr algn="l" indent="0" marL="0">
+              <a:spcAft>
+                <a:spcPts val="300"/>
+              </a:spcAft>
+              <a:buNone/>
+            </a:pPr>
+            <a:r>
+              <a:rPr lang="ru-RU" altLang="en-US" sz="1400" b="1" dirty="0">
+                <a:solidFill>
+                  <a:schemeClr val="tx1"/>
+                </a:solidFill>
+              </a:rPr>
+              <a:t>Корпоративное структурирование и структурирование активов</a:t>
+            </a:r>
+            <a:endParaRPr lang="ru-RU" sz="1400" dirty="0"/>
+          </a:p>
+          <a:p>
+            <a:pPr algn="l" indent="0" marL="0">
+              <a:spcAft>
+                <a:spcPts val="300"/>
+              </a:spcAft>
+              <a:buNone/>
+            </a:pPr>
+            <a:r>
+              <a:rPr lang="ru-RU" altLang="en-US" sz="1150" dirty="0">
+                <a:solidFill>
+                  <a:schemeClr val="accent3"/>
+                </a:solidFill>
+              </a:rPr>
+              <a:t>Холдинг, SPV или фонд в зависимости от размера инвестиций.</a:t>
+            </a:r>
+            <a:endParaRPr lang="ru-RU" sz="1400" dirty="0"/>
+          </a:p>
+        </p:txBody>
+      </p:sp>
+      <p:sp>
+        <p:nvSpPr>
+          <p:cNvPr id="16" name="Text 0"/>
           <p:cNvSpPr/>
           <p:nvPr>
             <p:ph idx="101" type="title" hasCustomPrompt="1"/>
@@ -6503,7 +8839,7 @@
                 <a:ea typeface="Cambria" pitchFamily="34" charset="-122"/>
                 <a:cs typeface="Cambria" pitchFamily="34" charset="-120"/>
               </a:rPr>
-              <a:t>Мы запускаем вас сразу</a:t>
+              <a:t>Что получает ваша компания</a:t>
             </a:r>
             <a:endParaRPr lang="ru-RU" sz="2600" dirty="0"/>
           </a:p>
@@ -6539,7 +8875,7 @@
                   <a:schemeClr val="accent1"/>
                 </a:solidFill>
               </a:rPr>
-              <a:t>ЧТО МЫ ДАЁМ ВАШЕЙ КОМАНДЕ</a:t>
+              <a:t>ЦЕННОСТЬ ДЛЯ ПАРТНЁРА</a:t>
             </a:r>
             <a:endParaRPr lang="ru-RU" sz="1000" dirty="0"/>
           </a:p>
@@ -6554,9 +8890,9 @@
         <p:spPr>
           <a:xfrm>
             <a:off x="457200" y="1188720"/>
-            <a:ext cx="457200" cy="457200"/>
-          </a:xfrm>
-          <a:prstGeom prst="ellipse">
+            <a:ext cx="1885950" cy="3246120"/>
+          </a:xfrm>
+          <a:prstGeom prst="rect">
             <a:avLst/>
           </a:prstGeom>
           <a:solidFill>
@@ -6570,40 +8906,55 @@
           </a:ln>
         </p:spPr>
       </p:sp>
-      <p:pic>
-        <p:nvPicPr>
-          <p:cNvPr id="5" name="icon FaChalkboardUser" descr="preencoded.png">    </p:cNvPr>
-          <p:cNvPicPr>
-            <a:picLocks noChangeAspect="1"/>
-          </p:cNvPicPr>
-          <p:nvPr/>
-        </p:nvPicPr>
-        <p:blipFill>
-          <a:blip r:embed="rId1"/>
-          <a:stretch>
-            <a:fillRect/>
-          </a:stretch>
-        </p:blipFill>
-        <p:spPr>
-          <a:xfrm>
-            <a:off x="548640" y="1280160"/>
-            <a:ext cx="274320" cy="274320"/>
-          </a:xfrm>
-          <a:prstGeom prst="rect">
-            <a:avLst/>
-          </a:prstGeom>
-        </p:spPr>
-      </p:pic>
-      <p:sp>
-        <p:nvSpPr>
-          <p:cNvPr id="6" name="Text 3"/>
+      <p:sp>
+        <p:nvSpPr>
+          <p:cNvPr id="5" name="Text 3"/>
           <p:cNvSpPr txBox="1"/>
           <p:nvPr/>
         </p:nvSpPr>
         <p:spPr>
           <a:xfrm>
-            <a:off x="1097280" y="1170432"/>
-            <a:ext cx="4480560" cy="749808"/>
+            <a:off x="658368" y="1344168"/>
+            <a:ext cx="1483614" cy="457200"/>
+          </a:xfrm>
+          <a:prstGeom prst="rect">
+            <a:avLst/>
+          </a:prstGeom>
+          <a:noFill/>
+          <a:ln/>
+        </p:spPr>
+        <p:txBody>
+          <a:bodyPr wrap="square" lIns="0" tIns="0" rIns="0" bIns="0" rtlCol="0" anchor="ctr"/>
+          <a:lstStyle/>
+          <a:p>
+            <a:pPr algn="l" indent="0" marL="0">
+              <a:buNone/>
+            </a:pPr>
+            <a:r>
+              <a:rPr lang="ru-RU" altLang="en-US" sz="2600" b="1" dirty="0">
+                <a:solidFill>
+                  <a:schemeClr val="accent1"/>
+                </a:solidFill>
+                <a:latin typeface="Cambria" pitchFamily="34" charset="0"/>
+                <a:ea typeface="Cambria" pitchFamily="34" charset="-122"/>
+                <a:cs typeface="Cambria" pitchFamily="34" charset="-120"/>
+              </a:rPr>
+              <a:t>1</a:t>
+            </a:r>
+            <a:endParaRPr lang="ru-RU" sz="2600" dirty="0"/>
+          </a:p>
+        </p:txBody>
+      </p:sp>
+      <p:sp>
+        <p:nvSpPr>
+          <p:cNvPr id="6" name="Text 4"/>
+          <p:cNvSpPr txBox="1"/>
+          <p:nvPr/>
+        </p:nvSpPr>
+        <p:spPr>
+          <a:xfrm>
+            <a:off x="658368" y="1847088"/>
+            <a:ext cx="1483614" cy="2432304"/>
           </a:xfrm>
           <a:prstGeom prst="rect">
             <a:avLst/>
@@ -6617,51 +8968,51 @@
           <a:p>
             <a:pPr algn="l" indent="0" marL="0">
               <a:spcAft>
-                <a:spcPts val="200"/>
+                <a:spcPts val="300"/>
               </a:spcAft>
               <a:buNone/>
             </a:pPr>
             <a:r>
-              <a:rPr lang="ru-RU" altLang="en-US" sz="1300" b="1" dirty="0">
+              <a:rPr lang="ru-RU" altLang="en-US" sz="1400" b="1" dirty="0">
                 <a:solidFill>
                   <a:schemeClr val="tx1"/>
                 </a:solidFill>
               </a:rPr>
-              <a:t>Бесплатный семинар для вашего отдела продаж</a:t>
-            </a:r>
-            <a:endParaRPr lang="ru-RU" sz="1300" dirty="0"/>
+              <a:t>Доверие клиента</a:t>
+            </a:r>
+            <a:endParaRPr lang="ru-RU" sz="1400" dirty="0"/>
           </a:p>
           <a:p>
             <a:pPr algn="l" indent="0" marL="0">
               <a:spcAft>
-                <a:spcPts val="200"/>
+                <a:spcPts val="300"/>
               </a:spcAft>
               <a:buNone/>
             </a:pPr>
             <a:r>
-              <a:rPr lang="ru-RU" altLang="en-US" sz="1100" dirty="0">
+              <a:rPr lang="ru-RU" altLang="en-US" sz="1150" dirty="0">
                 <a:solidFill>
                   <a:schemeClr val="accent3"/>
                 </a:solidFill>
               </a:rPr>
-              <a:t>Под названием «Как защитить иностранных инвесторов в ОАЭ».</a:t>
-            </a:r>
-            <a:endParaRPr lang="ru-RU" sz="1300" dirty="0"/>
-          </a:p>
-        </p:txBody>
-      </p:sp>
-      <p:sp>
-        <p:nvSpPr>
-          <p:cNvPr id="7" name="Shape 4"/>
+              <a:t>Клиент видит брокера, который заботится о защите, а не только о продаже.</a:t>
+            </a:r>
+            <a:endParaRPr lang="ru-RU" sz="1400" dirty="0"/>
+          </a:p>
+        </p:txBody>
+      </p:sp>
+      <p:sp>
+        <p:nvSpPr>
+          <p:cNvPr id="7" name="Shape 5"/>
           <p:cNvSpPr/>
           <p:nvPr/>
         </p:nvSpPr>
         <p:spPr>
           <a:xfrm>
-            <a:off x="457200" y="2011680"/>
-            <a:ext cx="457200" cy="457200"/>
-          </a:xfrm>
-          <a:prstGeom prst="ellipse">
+            <a:off x="2571750" y="1188720"/>
+            <a:ext cx="1885950" cy="3246120"/>
+          </a:xfrm>
+          <a:prstGeom prst="rect">
             <a:avLst/>
           </a:prstGeom>
           <a:solidFill>
@@ -6675,40 +9026,55 @@
           </a:ln>
         </p:spPr>
       </p:sp>
-      <p:pic>
-        <p:nvPicPr>
-          <p:cNvPr id="8" name="icon FaComments" descr="preencoded.png">    </p:cNvPr>
-          <p:cNvPicPr>
-            <a:picLocks noChangeAspect="1"/>
-          </p:cNvPicPr>
-          <p:nvPr/>
-        </p:nvPicPr>
-        <p:blipFill>
-          <a:blip r:embed="rId2"/>
-          <a:stretch>
-            <a:fillRect/>
-          </a:stretch>
-        </p:blipFill>
-        <p:spPr>
-          <a:xfrm>
-            <a:off x="548640" y="2103120"/>
-            <a:ext cx="274320" cy="274320"/>
-          </a:xfrm>
-          <a:prstGeom prst="rect">
-            <a:avLst/>
-          </a:prstGeom>
-        </p:spPr>
-      </p:pic>
-      <p:sp>
-        <p:nvSpPr>
-          <p:cNvPr id="9" name="Text 5"/>
+      <p:sp>
+        <p:nvSpPr>
+          <p:cNvPr id="8" name="Text 6"/>
           <p:cNvSpPr txBox="1"/>
           <p:nvPr/>
         </p:nvSpPr>
         <p:spPr>
           <a:xfrm>
-            <a:off x="1097280" y="1993392"/>
-            <a:ext cx="4480560" cy="749808"/>
+            <a:off x="2772918" y="1344168"/>
+            <a:ext cx="1483614" cy="457200"/>
+          </a:xfrm>
+          <a:prstGeom prst="rect">
+            <a:avLst/>
+          </a:prstGeom>
+          <a:noFill/>
+          <a:ln/>
+        </p:spPr>
+        <p:txBody>
+          <a:bodyPr wrap="square" lIns="0" tIns="0" rIns="0" bIns="0" rtlCol="0" anchor="ctr"/>
+          <a:lstStyle/>
+          <a:p>
+            <a:pPr algn="l" indent="0" marL="0">
+              <a:buNone/>
+            </a:pPr>
+            <a:r>
+              <a:rPr lang="ru-RU" altLang="en-US" sz="2600" b="1" dirty="0">
+                <a:solidFill>
+                  <a:schemeClr val="accent1"/>
+                </a:solidFill>
+                <a:latin typeface="Cambria" pitchFamily="34" charset="0"/>
+                <a:ea typeface="Cambria" pitchFamily="34" charset="-122"/>
+                <a:cs typeface="Cambria" pitchFamily="34" charset="-120"/>
+              </a:rPr>
+              <a:t>2</a:t>
+            </a:r>
+            <a:endParaRPr lang="ru-RU" sz="2600" dirty="0"/>
+          </a:p>
+        </p:txBody>
+      </p:sp>
+      <p:sp>
+        <p:nvSpPr>
+          <p:cNvPr id="9" name="Text 7"/>
+          <p:cNvSpPr txBox="1"/>
+          <p:nvPr/>
+        </p:nvSpPr>
+        <p:spPr>
+          <a:xfrm>
+            <a:off x="2772918" y="1847088"/>
+            <a:ext cx="1483614" cy="2432304"/>
           </a:xfrm>
           <a:prstGeom prst="rect">
             <a:avLst/>
@@ -6722,51 +9088,51 @@
           <a:p>
             <a:pPr algn="l" indent="0" marL="0">
               <a:spcAft>
-                <a:spcPts val="200"/>
+                <a:spcPts val="300"/>
               </a:spcAft>
               <a:buNone/>
             </a:pPr>
             <a:r>
-              <a:rPr lang="ru-RU" altLang="en-US" sz="1300" b="1" dirty="0">
+              <a:rPr lang="ru-RU" altLang="en-US" sz="1400" b="1" dirty="0">
                 <a:solidFill>
                   <a:schemeClr val="tx1"/>
                 </a:solidFill>
               </a:rPr>
-              <a:t>Бесплатная первая консультация для ваших клиентов</a:t>
-            </a:r>
-            <a:endParaRPr lang="ru-RU" sz="1300" dirty="0"/>
+              <a:t>Выше процент закрытия сделок</a:t>
+            </a:r>
+            <a:endParaRPr lang="ru-RU" sz="1400" dirty="0"/>
           </a:p>
           <a:p>
             <a:pPr algn="l" indent="0" marL="0">
               <a:spcAft>
-                <a:spcPts val="200"/>
+                <a:spcPts val="300"/>
               </a:spcAft>
               <a:buNone/>
             </a:pPr>
             <a:r>
-              <a:rPr lang="ru-RU" altLang="en-US" sz="1100" dirty="0">
+              <a:rPr lang="ru-RU" altLang="en-US" sz="1150" dirty="0">
                 <a:solidFill>
                   <a:schemeClr val="accent3"/>
                 </a:solidFill>
               </a:rPr>
-              <a:t>Чтобы объяснить варианты, подходящие каждому клиенту.</a:t>
-            </a:r>
-            <a:endParaRPr lang="ru-RU" sz="1300" dirty="0"/>
-          </a:p>
-        </p:txBody>
-      </p:sp>
-      <p:sp>
-        <p:nvSpPr>
-          <p:cNvPr id="10" name="Shape 6"/>
+              <a:t>Иностранные инвесторы спокойнее, когда знают, что есть правовая защита и решения по наследству.</a:t>
+            </a:r>
+            <a:endParaRPr lang="ru-RU" sz="1400" dirty="0"/>
+          </a:p>
+        </p:txBody>
+      </p:sp>
+      <p:sp>
+        <p:nvSpPr>
+          <p:cNvPr id="10" name="Shape 8"/>
           <p:cNvSpPr/>
           <p:nvPr/>
         </p:nvSpPr>
         <p:spPr>
           <a:xfrm>
-            <a:off x="457200" y="2834640"/>
-            <a:ext cx="457200" cy="457200"/>
-          </a:xfrm>
-          <a:prstGeom prst="ellipse">
+            <a:off x="4686300" y="1188720"/>
+            <a:ext cx="1885950" cy="3246120"/>
+          </a:xfrm>
+          <a:prstGeom prst="rect">
             <a:avLst/>
           </a:prstGeom>
           <a:solidFill>
@@ -6780,40 +9146,55 @@
           </a:ln>
         </p:spPr>
       </p:sp>
-      <p:pic>
-        <p:nvPicPr>
-          <p:cNvPr id="11" name="icon FaFolderOpen" descr="preencoded.png">    </p:cNvPr>
-          <p:cNvPicPr>
-            <a:picLocks noChangeAspect="1"/>
-          </p:cNvPicPr>
-          <p:nvPr/>
-        </p:nvPicPr>
-        <p:blipFill>
-          <a:blip r:embed="rId3"/>
-          <a:stretch>
-            <a:fillRect/>
-          </a:stretch>
-        </p:blipFill>
-        <p:spPr>
-          <a:xfrm>
-            <a:off x="548640" y="2926080"/>
-            <a:ext cx="274320" cy="274320"/>
-          </a:xfrm>
-          <a:prstGeom prst="rect">
-            <a:avLst/>
-          </a:prstGeom>
-        </p:spPr>
-      </p:pic>
-      <p:sp>
-        <p:nvSpPr>
-          <p:cNvPr id="12" name="Text 7"/>
+      <p:sp>
+        <p:nvSpPr>
+          <p:cNvPr id="11" name="Text 9"/>
           <p:cNvSpPr txBox="1"/>
           <p:nvPr/>
         </p:nvSpPr>
         <p:spPr>
           <a:xfrm>
-            <a:off x="1097280" y="2816352"/>
-            <a:ext cx="4480560" cy="749808"/>
+            <a:off x="4887468" y="1344168"/>
+            <a:ext cx="1483614" cy="457200"/>
+          </a:xfrm>
+          <a:prstGeom prst="rect">
+            <a:avLst/>
+          </a:prstGeom>
+          <a:noFill/>
+          <a:ln/>
+        </p:spPr>
+        <p:txBody>
+          <a:bodyPr wrap="square" lIns="0" tIns="0" rIns="0" bIns="0" rtlCol="0" anchor="ctr"/>
+          <a:lstStyle/>
+          <a:p>
+            <a:pPr algn="l" indent="0" marL="0">
+              <a:buNone/>
+            </a:pPr>
+            <a:r>
+              <a:rPr lang="ru-RU" altLang="en-US" sz="2600" b="1" dirty="0">
+                <a:solidFill>
+                  <a:schemeClr val="accent1"/>
+                </a:solidFill>
+                <a:latin typeface="Cambria" pitchFamily="34" charset="0"/>
+                <a:ea typeface="Cambria" pitchFamily="34" charset="-122"/>
+                <a:cs typeface="Cambria" pitchFamily="34" charset="-120"/>
+              </a:rPr>
+              <a:t>3</a:t>
+            </a:r>
+            <a:endParaRPr lang="ru-RU" sz="2600" dirty="0"/>
+          </a:p>
+        </p:txBody>
+      </p:sp>
+      <p:sp>
+        <p:nvSpPr>
+          <p:cNvPr id="12" name="Text 10"/>
+          <p:cNvSpPr txBox="1"/>
+          <p:nvPr/>
+        </p:nvSpPr>
+        <p:spPr>
+          <a:xfrm>
+            <a:off x="4887468" y="1847088"/>
+            <a:ext cx="1483614" cy="2432304"/>
           </a:xfrm>
           <a:prstGeom prst="rect">
             <a:avLst/>
@@ -6827,51 +9208,51 @@
           <a:p>
             <a:pPr algn="l" indent="0" marL="0">
               <a:spcAft>
-                <a:spcPts val="200"/>
+                <a:spcPts val="300"/>
               </a:spcAft>
               <a:buNone/>
             </a:pPr>
             <a:r>
-              <a:rPr lang="ru-RU" altLang="en-US" sz="1300" b="1" dirty="0">
+              <a:rPr lang="ru-RU" altLang="en-US" sz="1400" b="1" dirty="0">
                 <a:solidFill>
                   <a:schemeClr val="tx1"/>
                 </a:solidFill>
               </a:rPr>
-              <a:t>Готовые маркетинговые материалы</a:t>
-            </a:r>
-            <a:endParaRPr lang="ru-RU" sz="1300" dirty="0"/>
+              <a:t>Дополнительный VIP-сервис</a:t>
+            </a:r>
+            <a:endParaRPr lang="ru-RU" sz="1400" dirty="0"/>
           </a:p>
           <a:p>
             <a:pPr algn="l" indent="0" marL="0">
               <a:spcAft>
-                <a:spcPts val="200"/>
+                <a:spcPts val="300"/>
               </a:spcAft>
               <a:buNone/>
             </a:pPr>
             <a:r>
-              <a:rPr lang="ru-RU" altLang="en-US" sz="1100" dirty="0">
+              <a:rPr lang="ru-RU" altLang="en-US" sz="1150" dirty="0">
                 <a:solidFill>
                   <a:schemeClr val="accent3"/>
                 </a:solidFill>
               </a:rPr>
-              <a:t>Брошюра, текст для WhatsApp, FAQ и презентация.</a:t>
-            </a:r>
-            <a:endParaRPr lang="ru-RU" sz="1300" dirty="0"/>
-          </a:p>
-        </p:txBody>
-      </p:sp>
-      <p:sp>
-        <p:nvSpPr>
-          <p:cNvPr id="13" name="Shape 8"/>
+              <a:t>Вы позиционируете себя как полноценного инвестиционного советника.</a:t>
+            </a:r>
+            <a:endParaRPr lang="ru-RU" sz="1400" dirty="0"/>
+          </a:p>
+        </p:txBody>
+      </p:sp>
+      <p:sp>
+        <p:nvSpPr>
+          <p:cNvPr id="13" name="Shape 11"/>
           <p:cNvSpPr/>
           <p:nvPr/>
         </p:nvSpPr>
         <p:spPr>
           <a:xfrm>
-            <a:off x="457200" y="3657600"/>
-            <a:ext cx="457200" cy="457200"/>
-          </a:xfrm>
-          <a:prstGeom prst="ellipse">
+            <a:off x="6800850" y="1188720"/>
+            <a:ext cx="1885950" cy="3246120"/>
+          </a:xfrm>
+          <a:prstGeom prst="rect">
             <a:avLst/>
           </a:prstGeom>
           <a:solidFill>
@@ -6885,159 +9266,32 @@
           </a:ln>
         </p:spPr>
       </p:sp>
-      <p:pic>
-        <p:nvPicPr>
-          <p:cNvPr id="14" name="icon FaCrown" descr="preencoded.png">    </p:cNvPr>
-          <p:cNvPicPr>
-            <a:picLocks noChangeAspect="1"/>
-          </p:cNvPicPr>
-          <p:nvPr/>
-        </p:nvPicPr>
-        <p:blipFill>
-          <a:blip r:embed="rId4"/>
-          <a:stretch>
-            <a:fillRect/>
-          </a:stretch>
-        </p:blipFill>
-        <p:spPr>
-          <a:xfrm>
-            <a:off x="548640" y="3749040"/>
-            <a:ext cx="274320" cy="274320"/>
-          </a:xfrm>
-          <a:prstGeom prst="rect">
-            <a:avLst/>
-          </a:prstGeom>
-        </p:spPr>
-      </p:pic>
-      <p:sp>
-        <p:nvSpPr>
-          <p:cNvPr id="15" name="Text 9"/>
+      <p:sp>
+        <p:nvSpPr>
+          <p:cNvPr id="14" name="Text 12"/>
           <p:cNvSpPr txBox="1"/>
           <p:nvPr/>
         </p:nvSpPr>
         <p:spPr>
           <a:xfrm>
-            <a:off x="1097280" y="3639312"/>
-            <a:ext cx="4480560" cy="749808"/>
-          </a:xfrm>
-          <a:prstGeom prst="rect">
-            <a:avLst/>
-          </a:prstGeom>
-          <a:noFill/>
-          <a:ln/>
-        </p:spPr>
-        <p:txBody>
-          <a:bodyPr wrap="square" lIns="0" tIns="0" rIns="0" bIns="0" rtlCol="0" anchor="t"/>
-          <a:lstStyle/>
-          <a:p>
-            <a:pPr algn="l" indent="0" marL="0">
-              <a:spcAft>
-                <a:spcPts val="200"/>
-              </a:spcAft>
-              <a:buNone/>
-            </a:pPr>
-            <a:r>
-              <a:rPr lang="ru-RU" altLang="en-US" sz="1300" b="1" dirty="0">
-                <a:solidFill>
-                  <a:schemeClr val="tx1"/>
-                </a:solidFill>
-              </a:rPr>
-              <a:t>Консьерж-сервис для ваших ключевых клиентов</a:t>
-            </a:r>
-            <a:endParaRPr lang="ru-RU" sz="1300" dirty="0"/>
-          </a:p>
-          <a:p>
-            <a:pPr algn="l" indent="0" marL="0">
-              <a:spcAft>
-                <a:spcPts val="200"/>
-              </a:spcAft>
-              <a:buNone/>
-            </a:pPr>
-            <a:r>
-              <a:rPr lang="ru-RU" altLang="en-US" sz="1100" dirty="0">
-                <a:solidFill>
-                  <a:schemeClr val="accent3"/>
-                </a:solidFill>
-              </a:rPr>
-              <a:t>Встречи в офисе или дома у клиента, VIP-сопровождение, ускоренная регистрация.</a:t>
-            </a:r>
-            <a:endParaRPr lang="ru-RU" sz="1300" dirty="0"/>
-          </a:p>
-        </p:txBody>
-      </p:sp>
-      <p:sp>
-        <p:nvSpPr>
-          <p:cNvPr id="16" name="Shape 10"/>
-          <p:cNvSpPr/>
-          <p:nvPr/>
-        </p:nvSpPr>
-        <p:spPr>
-          <a:xfrm>
-            <a:off x="5943600" y="1188720"/>
-            <a:ext cx="2743200" cy="3246120"/>
-          </a:xfrm>
-          <a:prstGeom prst="rect">
-            <a:avLst/>
-          </a:prstGeom>
-          <a:solidFill>
-            <a:srgbClr val="0E2238"/>
-          </a:solidFill>
-          <a:ln w="12700">
-            <a:solidFill>
-              <a:srgbClr val="0E2238"/>
-            </a:solidFill>
-            <a:prstDash val="solid"/>
-          </a:ln>
-        </p:spPr>
-      </p:sp>
-      <p:sp>
-        <p:nvSpPr>
-          <p:cNvPr id="17" name="Shape 11"/>
-          <p:cNvSpPr/>
-          <p:nvPr/>
-        </p:nvSpPr>
-        <p:spPr>
-          <a:xfrm>
-            <a:off x="6053328" y="1298448"/>
-            <a:ext cx="2523744" cy="3026664"/>
-          </a:xfrm>
-          <a:prstGeom prst="rect">
-            <a:avLst/>
-          </a:prstGeom>
-          <a:ln w="9525">
-            <a:solidFill>
-              <a:srgbClr val="B5723B"/>
-            </a:solidFill>
-            <a:prstDash val="solid"/>
-          </a:ln>
-        </p:spPr>
-      </p:sp>
-      <p:sp>
-        <p:nvSpPr>
-          <p:cNvPr id="18" name="Text 12"/>
-          <p:cNvSpPr txBox="1"/>
-          <p:nvPr/>
-        </p:nvSpPr>
-        <p:spPr>
-          <a:xfrm>
-            <a:off x="6263640" y="1508760"/>
-            <a:ext cx="2103120" cy="731520"/>
-          </a:xfrm>
-          <a:prstGeom prst="rect">
-            <a:avLst/>
-          </a:prstGeom>
-          <a:noFill/>
-          <a:ln/>
-        </p:spPr>
-        <p:txBody>
-          <a:bodyPr wrap="square" lIns="0" tIns="0" rIns="0" bIns="0" rtlCol="0" anchor="t"/>
-          <a:lstStyle/>
-          <a:p>
-            <a:pPr algn="l" indent="0" marL="0">
-              <a:buNone/>
-            </a:pPr>
-            <a:r>
-              <a:rPr lang="ru-RU" altLang="en-US" sz="1600" b="1" dirty="0">
+            <a:off x="7002018" y="1344168"/>
+            <a:ext cx="1483614" cy="457200"/>
+          </a:xfrm>
+          <a:prstGeom prst="rect">
+            <a:avLst/>
+          </a:prstGeom>
+          <a:noFill/>
+          <a:ln/>
+        </p:spPr>
+        <p:txBody>
+          <a:bodyPr wrap="square" lIns="0" tIns="0" rIns="0" bIns="0" rtlCol="0" anchor="ctr"/>
+          <a:lstStyle/>
+          <a:p>
+            <a:pPr algn="l" indent="0" marL="0">
+              <a:buNone/>
+            </a:pPr>
+            <a:r>
+              <a:rPr lang="ru-RU" altLang="en-US" sz="2600" b="1" dirty="0">
                 <a:solidFill>
                   <a:schemeClr val="accent1"/>
                 </a:solidFill>
@@ -7045,22 +9299,22 @@
                 <a:ea typeface="Cambria" pitchFamily="34" charset="-122"/>
                 <a:cs typeface="Cambria" pitchFamily="34" charset="-120"/>
               </a:rPr>
-              <a:t>Лучший момент</a:t>
-            </a:r>
-            <a:endParaRPr lang="ru-RU" sz="1600" dirty="0"/>
-          </a:p>
-        </p:txBody>
-      </p:sp>
-      <p:sp>
-        <p:nvSpPr>
-          <p:cNvPr id="19" name="Text 13"/>
+              <a:t>4</a:t>
+            </a:r>
+            <a:endParaRPr lang="ru-RU" sz="2600" dirty="0"/>
+          </a:p>
+        </p:txBody>
+      </p:sp>
+      <p:sp>
+        <p:nvSpPr>
+          <p:cNvPr id="15" name="Text 13"/>
           <p:cNvSpPr txBox="1"/>
           <p:nvPr/>
         </p:nvSpPr>
         <p:spPr>
           <a:xfrm>
-            <a:off x="6263640" y="2286000"/>
-            <a:ext cx="2103120" cy="1920240"/>
+            <a:off x="7002018" y="1847088"/>
+            <a:ext cx="1483614" cy="2432304"/>
           </a:xfrm>
           <a:prstGeom prst="rect">
             <a:avLst/>
@@ -7073,23 +9327,43 @@
           <a:lstStyle/>
           <a:p>
             <a:pPr algn="l" indent="0" marL="0">
+              <a:spcAft>
+                <a:spcPts val="300"/>
+              </a:spcAft>
+              <a:buNone/>
+            </a:pPr>
+            <a:r>
+              <a:rPr lang="ru-RU" altLang="en-US" sz="1400" b="1" dirty="0">
+                <a:solidFill>
+                  <a:schemeClr val="tx1"/>
+                </a:solidFill>
+              </a:rPr>
+              <a:t>Дополнительный доход</a:t>
+            </a:r>
+            <a:endParaRPr lang="ru-RU" sz="1400" dirty="0"/>
+          </a:p>
+          <a:p>
+            <a:pPr algn="l" indent="0" marL="0">
+              <a:spcAft>
+                <a:spcPts val="300"/>
+              </a:spcAft>
               <a:buNone/>
             </a:pPr>
             <a:r>
               <a:rPr lang="ru-RU" altLang="en-US" sz="1150" dirty="0">
                 <a:solidFill>
-                  <a:schemeClr val="bg2"/>
-                </a:solidFill>
-              </a:rPr>
-              <a:t>После бронирования, при подписании SPA, после передачи объекта или при обсуждении долгосрочных инвестиций.</a:t>
-            </a:r>
-            <a:endParaRPr lang="ru-RU" sz="1150" dirty="0"/>
-          </a:p>
-        </p:txBody>
-      </p:sp>
-      <p:sp>
-        <p:nvSpPr>
-          <p:cNvPr id="20" name="Text 0"/>
+                  <a:schemeClr val="accent3"/>
+                </a:solidFill>
+              </a:rPr>
+              <a:t>Понятная и организованная реферальная структура, превращающая услугу в регулярный доход.</a:t>
+            </a:r>
+            <a:endParaRPr lang="ru-RU" sz="1400" dirty="0"/>
+          </a:p>
+        </p:txBody>
+      </p:sp>
+      <p:sp>
+        <p:nvSpPr>
+          <p:cNvPr id="16" name="Text 0"/>
           <p:cNvSpPr/>
           <p:nvPr>
             <p:ph idx="101" type="title" hasCustomPrompt="1"/>
@@ -7220,7 +9494,7 @@
                 <a:ea typeface="Cambria" pitchFamily="34" charset="-122"/>
                 <a:cs typeface="Cambria" pitchFamily="34" charset="-120"/>
               </a:rPr>
-              <a:t>Соглашение вкратце</a:t>
+              <a:t>Процесс очень прост</a:t>
             </a:r>
             <a:endParaRPr lang="ru-RU" sz="2600" dirty="0"/>
           </a:p>
@@ -7256,7 +9530,7 @@
                   <a:schemeClr val="accent1"/>
                 </a:solidFill>
               </a:rPr>
-              <a:t>ПРАВОВАЯ СТРУКТУРА</a:t>
+              <a:t>ПРОСТОЙ ПРОЦЕСС</a:t>
             </a:r>
             <a:endParaRPr lang="ru-RU" sz="1000" dirty="0"/>
           </a:p>
@@ -7270,57 +9544,95 @@
         </p:nvSpPr>
         <p:spPr>
           <a:xfrm>
-            <a:off x="457200" y="1188720"/>
-            <a:ext cx="457200" cy="457200"/>
+            <a:off x="731520" y="1600200"/>
+            <a:ext cx="7680960" cy="0"/>
+          </a:xfrm>
+          <a:prstGeom prst="line">
+            <a:avLst/>
+          </a:prstGeom>
+          <a:noFill/>
+          <a:ln w="9525">
+            <a:solidFill>
+              <a:srgbClr val="D9B38C"/>
+            </a:solidFill>
+            <a:prstDash val="solid"/>
+          </a:ln>
+        </p:spPr>
+      </p:sp>
+      <p:sp>
+        <p:nvSpPr>
+          <p:cNvPr id="5" name="Shape 3"/>
+          <p:cNvSpPr/>
+          <p:nvPr/>
+        </p:nvSpPr>
+        <p:spPr>
+          <a:xfrm>
+            <a:off x="457200" y="1325880"/>
+            <a:ext cx="548640" cy="548640"/>
           </a:xfrm>
           <a:prstGeom prst="ellipse">
             <a:avLst/>
           </a:prstGeom>
           <a:solidFill>
-            <a:srgbClr val="F4F1EB"/>
+            <a:srgbClr val="0E2238"/>
           </a:solidFill>
           <a:ln w="12700">
             <a:solidFill>
-              <a:srgbClr val="F4F1EB"/>
+              <a:srgbClr val="B5723B"/>
             </a:solidFill>
             <a:prstDash val="solid"/>
           </a:ln>
         </p:spPr>
       </p:sp>
-      <p:pic>
-        <p:nvPicPr>
-          <p:cNvPr id="5" name="icon FaArrowRightArrowLeft" descr="preencoded.png">    </p:cNvPr>
-          <p:cNvPicPr>
-            <a:picLocks noChangeAspect="1"/>
-          </p:cNvPicPr>
-          <p:nvPr/>
-        </p:nvPicPr>
-        <p:blipFill>
-          <a:blip r:embed="rId1"/>
-          <a:stretch>
-            <a:fillRect/>
-          </a:stretch>
-        </p:blipFill>
-        <p:spPr>
-          <a:xfrm>
-            <a:off x="548640" y="1280160"/>
-            <a:ext cx="274320" cy="274320"/>
-          </a:xfrm>
-          <a:prstGeom prst="rect">
-            <a:avLst/>
-          </a:prstGeom>
-        </p:spPr>
-      </p:pic>
-      <p:sp>
-        <p:nvSpPr>
-          <p:cNvPr id="6" name="Text 3"/>
+      <p:sp>
+        <p:nvSpPr>
+          <p:cNvPr id="6" name="Text 4"/>
           <p:cNvSpPr txBox="1"/>
           <p:nvPr/>
         </p:nvSpPr>
         <p:spPr>
           <a:xfrm>
-            <a:off x="1097280" y="1170432"/>
-            <a:ext cx="7589520" cy="585216"/>
+            <a:off x="457200" y="1325880"/>
+            <a:ext cx="548640" cy="548640"/>
+          </a:xfrm>
+          <a:prstGeom prst="rect">
+            <a:avLst/>
+          </a:prstGeom>
+          <a:noFill/>
+          <a:ln/>
+        </p:spPr>
+        <p:txBody>
+          <a:bodyPr wrap="square" lIns="0" tIns="0" rIns="0" bIns="0" rtlCol="0" anchor="ctr"/>
+          <a:lstStyle/>
+          <a:p>
+            <a:pPr algn="ctr" indent="0" marL="0">
+              <a:buNone/>
+            </a:pPr>
+            <a:r>
+              <a:rPr lang="en-US" sz="1600" b="1" dirty="0">
+                <a:solidFill>
+                  <a:schemeClr val="accent1"/>
+                </a:solidFill>
+                <a:latin typeface="Cambria" pitchFamily="34" charset="0"/>
+                <a:ea typeface="Cambria" pitchFamily="34" charset="-122"/>
+                <a:cs typeface="Cambria" pitchFamily="34" charset="-120"/>
+              </a:rPr>
+              <a:t>1</a:t>
+            </a:r>
+            <a:endParaRPr lang="en-US" sz="1600" dirty="0"/>
+          </a:p>
+        </p:txBody>
+      </p:sp>
+      <p:sp>
+        <p:nvSpPr>
+          <p:cNvPr id="7" name="Text 5"/>
+          <p:cNvSpPr txBox="1"/>
+          <p:nvPr/>
+        </p:nvSpPr>
+        <p:spPr>
+          <a:xfrm>
+            <a:off x="457200" y="2057400"/>
+            <a:ext cx="1933956" cy="548640"/>
           </a:xfrm>
           <a:prstGeom prst="rect">
             <a:avLst/>
@@ -7333,9 +9645,6 @@
           <a:lstStyle/>
           <a:p>
             <a:pPr algn="l" indent="0" marL="0">
-              <a:spcAft>
-                <a:spcPts val="200"/>
-              </a:spcAft>
               <a:buNone/>
             </a:pPr>
             <a:r>
@@ -7344,88 +9653,122 @@
                   <a:schemeClr val="tx1"/>
                 </a:solidFill>
               </a:rPr>
-              <a:t>Механизм направления клиентов</a:t>
+              <a:t>Вы представляете услугу</a:t>
             </a:r>
             <a:endParaRPr lang="ru-RU" sz="1300" dirty="0"/>
           </a:p>
-          <a:p>
-            <a:pPr algn="l" indent="0" marL="0">
-              <a:spcAft>
-                <a:spcPts val="200"/>
-              </a:spcAft>
-              <a:buNone/>
-            </a:pPr>
-            <a:r>
-              <a:rPr lang="ru-RU" altLang="en-US" sz="1100" dirty="0">
+        </p:txBody>
+      </p:sp>
+      <p:sp>
+        <p:nvSpPr>
+          <p:cNvPr id="8" name="Text 6"/>
+          <p:cNvSpPr txBox="1"/>
+          <p:nvPr/>
+        </p:nvSpPr>
+        <p:spPr>
+          <a:xfrm>
+            <a:off x="457200" y="2606040"/>
+            <a:ext cx="1933956" cy="1828800"/>
+          </a:xfrm>
+          <a:prstGeom prst="rect">
+            <a:avLst/>
+          </a:prstGeom>
+          <a:noFill/>
+          <a:ln/>
+        </p:spPr>
+        <p:txBody>
+          <a:bodyPr wrap="square" lIns="0" tIns="0" rIns="0" bIns="0" rtlCol="0" anchor="t"/>
+          <a:lstStyle/>
+          <a:p>
+            <a:pPr algn="l" indent="0" marL="0">
+              <a:buNone/>
+            </a:pPr>
+            <a:r>
+              <a:rPr lang="ru-RU" altLang="en-US" sz="1050" dirty="0">
                 <a:solidFill>
                   <a:schemeClr val="accent3"/>
                 </a:solidFill>
               </a:rPr>
-              <a:t>Стандартное представление и контакт с нашей стороны в течение одного рабочего дня.</a:t>
-            </a:r>
-            <a:endParaRPr lang="ru-RU" sz="1300" dirty="0"/>
-          </a:p>
-        </p:txBody>
-      </p:sp>
-      <p:sp>
-        <p:nvSpPr>
-          <p:cNvPr id="7" name="Shape 4"/>
+              <a:t>Одна фраза в нужный момент плюс стандартное ознакомительное сообщение.</a:t>
+            </a:r>
+            <a:endParaRPr lang="ru-RU" sz="1050" dirty="0"/>
+          </a:p>
+        </p:txBody>
+      </p:sp>
+      <p:sp>
+        <p:nvSpPr>
+          <p:cNvPr id="9" name="Shape 7"/>
           <p:cNvSpPr/>
           <p:nvPr/>
         </p:nvSpPr>
         <p:spPr>
           <a:xfrm>
-            <a:off x="457200" y="1847088"/>
-            <a:ext cx="457200" cy="457200"/>
+            <a:off x="2555748" y="1325880"/>
+            <a:ext cx="548640" cy="548640"/>
           </a:xfrm>
           <a:prstGeom prst="ellipse">
             <a:avLst/>
           </a:prstGeom>
           <a:solidFill>
-            <a:srgbClr val="F4F1EB"/>
+            <a:srgbClr val="0E2238"/>
           </a:solidFill>
           <a:ln w="12700">
             <a:solidFill>
-              <a:srgbClr val="F4F1EB"/>
+              <a:srgbClr val="B5723B"/>
             </a:solidFill>
             <a:prstDash val="solid"/>
           </a:ln>
         </p:spPr>
       </p:sp>
-      <p:pic>
-        <p:nvPicPr>
-          <p:cNvPr id="8" name="icon FaPercent" descr="preencoded.png">    </p:cNvPr>
-          <p:cNvPicPr>
-            <a:picLocks noChangeAspect="1"/>
-          </p:cNvPicPr>
-          <p:nvPr/>
-        </p:nvPicPr>
-        <p:blipFill>
-          <a:blip r:embed="rId2"/>
-          <a:stretch>
-            <a:fillRect/>
-          </a:stretch>
-        </p:blipFill>
-        <p:spPr>
-          <a:xfrm>
-            <a:off x="548640" y="1938528"/>
-            <a:ext cx="274320" cy="274320"/>
-          </a:xfrm>
-          <a:prstGeom prst="rect">
-            <a:avLst/>
-          </a:prstGeom>
-        </p:spPr>
-      </p:pic>
-      <p:sp>
-        <p:nvSpPr>
-          <p:cNvPr id="9" name="Text 5"/>
+      <p:sp>
+        <p:nvSpPr>
+          <p:cNvPr id="10" name="Text 8"/>
           <p:cNvSpPr txBox="1"/>
           <p:nvPr/>
         </p:nvSpPr>
         <p:spPr>
           <a:xfrm>
-            <a:off x="1097280" y="1828800"/>
-            <a:ext cx="7589520" cy="585216"/>
+            <a:off x="2555748" y="1325880"/>
+            <a:ext cx="548640" cy="548640"/>
+          </a:xfrm>
+          <a:prstGeom prst="rect">
+            <a:avLst/>
+          </a:prstGeom>
+          <a:noFill/>
+          <a:ln/>
+        </p:spPr>
+        <p:txBody>
+          <a:bodyPr wrap="square" lIns="0" tIns="0" rIns="0" bIns="0" rtlCol="0" anchor="ctr"/>
+          <a:lstStyle/>
+          <a:p>
+            <a:pPr algn="ctr" indent="0" marL="0">
+              <a:buNone/>
+            </a:pPr>
+            <a:r>
+              <a:rPr lang="en-US" sz="1600" b="1" dirty="0">
+                <a:solidFill>
+                  <a:schemeClr val="accent1"/>
+                </a:solidFill>
+                <a:latin typeface="Cambria" pitchFamily="34" charset="0"/>
+                <a:ea typeface="Cambria" pitchFamily="34" charset="-122"/>
+                <a:cs typeface="Cambria" pitchFamily="34" charset="-120"/>
+              </a:rPr>
+              <a:t>2</a:t>
+            </a:r>
+            <a:endParaRPr lang="en-US" sz="1600" dirty="0"/>
+          </a:p>
+        </p:txBody>
+      </p:sp>
+      <p:sp>
+        <p:nvSpPr>
+          <p:cNvPr id="11" name="Text 9"/>
+          <p:cNvSpPr txBox="1"/>
+          <p:nvPr/>
+        </p:nvSpPr>
+        <p:spPr>
+          <a:xfrm>
+            <a:off x="2555748" y="2057400"/>
+            <a:ext cx="1933956" cy="548640"/>
           </a:xfrm>
           <a:prstGeom prst="rect">
             <a:avLst/>
@@ -7438,9 +9781,6 @@
           <a:lstStyle/>
           <a:p>
             <a:pPr algn="l" indent="0" marL="0">
-              <a:spcAft>
-                <a:spcPts val="200"/>
-              </a:spcAft>
               <a:buNone/>
             </a:pPr>
             <a:r>
@@ -7449,88 +9789,122 @@
                   <a:schemeClr val="tx1"/>
                 </a:solidFill>
               </a:rPr>
-              <a:t>Размер комиссии и выплата</a:t>
+              <a:t>Мы берём на себя всю правовую сторону</a:t>
             </a:r>
             <a:endParaRPr lang="ru-RU" sz="1300" dirty="0"/>
           </a:p>
-          <a:p>
-            <a:pPr algn="l" indent="0" marL="0">
-              <a:spcAft>
-                <a:spcPts val="200"/>
-              </a:spcAft>
-              <a:buNone/>
-            </a:pPr>
-            <a:r>
-              <a:rPr lang="ru-RU" altLang="en-US" sz="1100" dirty="0">
+        </p:txBody>
+      </p:sp>
+      <p:sp>
+        <p:nvSpPr>
+          <p:cNvPr id="12" name="Text 10"/>
+          <p:cNvSpPr txBox="1"/>
+          <p:nvPr/>
+        </p:nvSpPr>
+        <p:spPr>
+          <a:xfrm>
+            <a:off x="2555748" y="2606040"/>
+            <a:ext cx="1933956" cy="1828800"/>
+          </a:xfrm>
+          <a:prstGeom prst="rect">
+            <a:avLst/>
+          </a:prstGeom>
+          <a:noFill/>
+          <a:ln/>
+        </p:spPr>
+        <p:txBody>
+          <a:bodyPr wrap="square" lIns="0" tIns="0" rIns="0" bIns="0" rtlCol="0" anchor="t"/>
+          <a:lstStyle/>
+          <a:p>
+            <a:pPr algn="l" indent="0" marL="0">
+              <a:buNone/>
+            </a:pPr>
+            <a:r>
+              <a:rPr lang="ru-RU" altLang="en-US" sz="1050" dirty="0">
                 <a:solidFill>
                   <a:schemeClr val="accent3"/>
                 </a:solidFill>
               </a:rPr>
-              <a:t>Фиксированный процент или сумма за клиента, выплачивается ежемесячно.</a:t>
-            </a:r>
-            <a:endParaRPr lang="ru-RU" sz="1300" dirty="0"/>
-          </a:p>
-        </p:txBody>
-      </p:sp>
-      <p:sp>
-        <p:nvSpPr>
-          <p:cNvPr id="10" name="Shape 6"/>
+              <a:t>Консультация, оценка рисков, составление, перевод, нотариальное заверение, регистрация.</a:t>
+            </a:r>
+            <a:endParaRPr lang="ru-RU" sz="1050" dirty="0"/>
+          </a:p>
+        </p:txBody>
+      </p:sp>
+      <p:sp>
+        <p:nvSpPr>
+          <p:cNvPr id="13" name="Shape 11"/>
           <p:cNvSpPr/>
           <p:nvPr/>
         </p:nvSpPr>
         <p:spPr>
           <a:xfrm>
-            <a:off x="457200" y="2505456"/>
-            <a:ext cx="457200" cy="457200"/>
+            <a:off x="4654296" y="1325880"/>
+            <a:ext cx="548640" cy="548640"/>
           </a:xfrm>
           <a:prstGeom prst="ellipse">
             <a:avLst/>
           </a:prstGeom>
           <a:solidFill>
-            <a:srgbClr val="F4F1EB"/>
+            <a:srgbClr val="0E2238"/>
           </a:solidFill>
           <a:ln w="12700">
             <a:solidFill>
-              <a:srgbClr val="F4F1EB"/>
+              <a:srgbClr val="B5723B"/>
             </a:solidFill>
             <a:prstDash val="solid"/>
           </a:ln>
         </p:spPr>
       </p:sp>
-      <p:pic>
-        <p:nvPicPr>
-          <p:cNvPr id="11" name="icon FaLock" descr="preencoded.png">    </p:cNvPr>
-          <p:cNvPicPr>
-            <a:picLocks noChangeAspect="1"/>
-          </p:cNvPicPr>
-          <p:nvPr/>
-        </p:nvPicPr>
-        <p:blipFill>
-          <a:blip r:embed="rId3"/>
-          <a:stretch>
-            <a:fillRect/>
-          </a:stretch>
-        </p:blipFill>
-        <p:spPr>
-          <a:xfrm>
-            <a:off x="548640" y="2596896"/>
-            <a:ext cx="274320" cy="274320"/>
-          </a:xfrm>
-          <a:prstGeom prst="rect">
-            <a:avLst/>
-          </a:prstGeom>
-        </p:spPr>
-      </p:pic>
-      <p:sp>
-        <p:nvSpPr>
-          <p:cNvPr id="12" name="Text 7"/>
+      <p:sp>
+        <p:nvSpPr>
+          <p:cNvPr id="14" name="Text 12"/>
           <p:cNvSpPr txBox="1"/>
           <p:nvPr/>
         </p:nvSpPr>
         <p:spPr>
           <a:xfrm>
-            <a:off x="1097280" y="2487168"/>
-            <a:ext cx="7589520" cy="585216"/>
+            <a:off x="4654296" y="1325880"/>
+            <a:ext cx="548640" cy="548640"/>
+          </a:xfrm>
+          <a:prstGeom prst="rect">
+            <a:avLst/>
+          </a:prstGeom>
+          <a:noFill/>
+          <a:ln/>
+        </p:spPr>
+        <p:txBody>
+          <a:bodyPr wrap="square" lIns="0" tIns="0" rIns="0" bIns="0" rtlCol="0" anchor="ctr"/>
+          <a:lstStyle/>
+          <a:p>
+            <a:pPr algn="ctr" indent="0" marL="0">
+              <a:buNone/>
+            </a:pPr>
+            <a:r>
+              <a:rPr lang="en-US" sz="1600" b="1" dirty="0">
+                <a:solidFill>
+                  <a:schemeClr val="accent1"/>
+                </a:solidFill>
+                <a:latin typeface="Cambria" pitchFamily="34" charset="0"/>
+                <a:ea typeface="Cambria" pitchFamily="34" charset="-122"/>
+                <a:cs typeface="Cambria" pitchFamily="34" charset="-120"/>
+              </a:rPr>
+              <a:t>3</a:t>
+            </a:r>
+            <a:endParaRPr lang="en-US" sz="1600" dirty="0"/>
+          </a:p>
+        </p:txBody>
+      </p:sp>
+      <p:sp>
+        <p:nvSpPr>
+          <p:cNvPr id="15" name="Text 13"/>
+          <p:cNvSpPr txBox="1"/>
+          <p:nvPr/>
+        </p:nvSpPr>
+        <p:spPr>
+          <a:xfrm>
+            <a:off x="4654296" y="2057400"/>
+            <a:ext cx="1933956" cy="548640"/>
           </a:xfrm>
           <a:prstGeom prst="rect">
             <a:avLst/>
@@ -7543,9 +9917,6 @@
           <a:lstStyle/>
           <a:p>
             <a:pPr algn="l" indent="0" marL="0">
-              <a:spcAft>
-                <a:spcPts val="200"/>
-              </a:spcAft>
               <a:buNone/>
             </a:pPr>
             <a:r>
@@ -7554,88 +9925,122 @@
                   <a:schemeClr val="tx1"/>
                 </a:solidFill>
               </a:rPr>
-              <a:t>Конфиденциальность и защита данных</a:t>
+              <a:t>Наша команда ведёт клиента от начала до конца</a:t>
             </a:r>
             <a:endParaRPr lang="ru-RU" sz="1300" dirty="0"/>
           </a:p>
-          <a:p>
-            <a:pPr algn="l" indent="0" marL="0">
-              <a:spcAft>
-                <a:spcPts val="200"/>
-              </a:spcAft>
-              <a:buNone/>
-            </a:pPr>
-            <a:r>
-              <a:rPr lang="ru-RU" altLang="en-US" sz="1100" dirty="0">
+        </p:txBody>
+      </p:sp>
+      <p:sp>
+        <p:nvSpPr>
+          <p:cNvPr id="16" name="Text 14"/>
+          <p:cNvSpPr txBox="1"/>
+          <p:nvPr/>
+        </p:nvSpPr>
+        <p:spPr>
+          <a:xfrm>
+            <a:off x="4654296" y="2606040"/>
+            <a:ext cx="1933956" cy="1828800"/>
+          </a:xfrm>
+          <a:prstGeom prst="rect">
+            <a:avLst/>
+          </a:prstGeom>
+          <a:noFill/>
+          <a:ln/>
+        </p:spPr>
+        <p:txBody>
+          <a:bodyPr wrap="square" lIns="0" tIns="0" rIns="0" bIns="0" rtlCol="0" anchor="t"/>
+          <a:lstStyle/>
+          <a:p>
+            <a:pPr algn="l" indent="0" marL="0">
+              <a:buNone/>
+            </a:pPr>
+            <a:r>
+              <a:rPr lang="ru-RU" altLang="en-US" sz="1050" dirty="0">
                 <a:solidFill>
                   <a:schemeClr val="accent3"/>
                 </a:solidFill>
               </a:rPr>
-              <a:t>NDA и полная защита данных ваших клиентов.</a:t>
-            </a:r>
-            <a:endParaRPr lang="ru-RU" sz="1300" dirty="0"/>
-          </a:p>
-        </p:txBody>
-      </p:sp>
-      <p:sp>
-        <p:nvSpPr>
-          <p:cNvPr id="13" name="Shape 8"/>
+              <a:t>Первый контакт в течение одного рабочего дня, регулярные обновления для вас и клиента.</a:t>
+            </a:r>
+            <a:endParaRPr lang="ru-RU" sz="1050" dirty="0"/>
+          </a:p>
+        </p:txBody>
+      </p:sp>
+      <p:sp>
+        <p:nvSpPr>
+          <p:cNvPr id="17" name="Shape 15"/>
           <p:cNvSpPr/>
           <p:nvPr/>
         </p:nvSpPr>
         <p:spPr>
           <a:xfrm>
-            <a:off x="457200" y="3163824"/>
-            <a:ext cx="457200" cy="457200"/>
+            <a:off x="6752844" y="1325880"/>
+            <a:ext cx="548640" cy="548640"/>
           </a:xfrm>
           <a:prstGeom prst="ellipse">
             <a:avLst/>
           </a:prstGeom>
           <a:solidFill>
-            <a:srgbClr val="F4F1EB"/>
+            <a:srgbClr val="0E2238"/>
           </a:solidFill>
           <a:ln w="12700">
             <a:solidFill>
-              <a:srgbClr val="F4F1EB"/>
+              <a:srgbClr val="B5723B"/>
             </a:solidFill>
             <a:prstDash val="solid"/>
           </a:ln>
         </p:spPr>
       </p:sp>
-      <p:pic>
-        <p:nvPicPr>
-          <p:cNvPr id="14" name="icon FaUserShield" descr="preencoded.png">    </p:cNvPr>
-          <p:cNvPicPr>
-            <a:picLocks noChangeAspect="1"/>
-          </p:cNvPicPr>
-          <p:nvPr/>
-        </p:nvPicPr>
-        <p:blipFill>
-          <a:blip r:embed="rId4"/>
-          <a:stretch>
-            <a:fillRect/>
-          </a:stretch>
-        </p:blipFill>
-        <p:spPr>
-          <a:xfrm>
-            <a:off x="548640" y="3255264"/>
-            <a:ext cx="274320" cy="274320"/>
-          </a:xfrm>
-          <a:prstGeom prst="rect">
-            <a:avLst/>
-          </a:prstGeom>
-        </p:spPr>
-      </p:pic>
-      <p:sp>
-        <p:nvSpPr>
-          <p:cNvPr id="15" name="Text 9"/>
+      <p:sp>
+        <p:nvSpPr>
+          <p:cNvPr id="18" name="Text 16"/>
           <p:cNvSpPr txBox="1"/>
           <p:nvPr/>
         </p:nvSpPr>
         <p:spPr>
           <a:xfrm>
-            <a:off x="1097280" y="3145536"/>
-            <a:ext cx="7589520" cy="585216"/>
+            <a:off x="6752844" y="1325880"/>
+            <a:ext cx="548640" cy="548640"/>
+          </a:xfrm>
+          <a:prstGeom prst="rect">
+            <a:avLst/>
+          </a:prstGeom>
+          <a:noFill/>
+          <a:ln/>
+        </p:spPr>
+        <p:txBody>
+          <a:bodyPr wrap="square" lIns="0" tIns="0" rIns="0" bIns="0" rtlCol="0" anchor="ctr"/>
+          <a:lstStyle/>
+          <a:p>
+            <a:pPr algn="ctr" indent="0" marL="0">
+              <a:buNone/>
+            </a:pPr>
+            <a:r>
+              <a:rPr lang="en-US" sz="1600" b="1" dirty="0">
+                <a:solidFill>
+                  <a:schemeClr val="accent1"/>
+                </a:solidFill>
+                <a:latin typeface="Cambria" pitchFamily="34" charset="0"/>
+                <a:ea typeface="Cambria" pitchFamily="34" charset="-122"/>
+                <a:cs typeface="Cambria" pitchFamily="34" charset="-120"/>
+              </a:rPr>
+              <a:t>4</a:t>
+            </a:r>
+            <a:endParaRPr lang="en-US" sz="1600" dirty="0"/>
+          </a:p>
+        </p:txBody>
+      </p:sp>
+      <p:sp>
+        <p:nvSpPr>
+          <p:cNvPr id="19" name="Text 17"/>
+          <p:cNvSpPr txBox="1"/>
+          <p:nvPr/>
+        </p:nvSpPr>
+        <p:spPr>
+          <a:xfrm>
+            <a:off x="6752844" y="2057400"/>
+            <a:ext cx="1933956" cy="548640"/>
           </a:xfrm>
           <a:prstGeom prst="rect">
             <a:avLst/>
@@ -7648,9 +10053,6 @@
           <a:lstStyle/>
           <a:p>
             <a:pPr algn="l" indent="0" marL="0">
-              <a:spcAft>
-                <a:spcPts val="200"/>
-              </a:spcAft>
               <a:buNone/>
             </a:pPr>
             <a:r>
@@ -7659,137 +10061,51 @@
                   <a:schemeClr val="tx1"/>
                 </a:solidFill>
               </a:rPr>
-              <a:t>Никакой юридической ответственности для вас</a:t>
+              <a:t>Вы в курсе дел без какой-либо юридической ответственности</a:t>
             </a:r>
             <a:endParaRPr lang="ru-RU" sz="1300" dirty="0"/>
           </a:p>
-          <a:p>
-            <a:pPr algn="l" indent="0" marL="0">
-              <a:spcAft>
-                <a:spcPts val="200"/>
-              </a:spcAft>
-              <a:buNone/>
-            </a:pPr>
-            <a:r>
-              <a:rPr lang="ru-RU" altLang="en-US" sz="1100" dirty="0">
+        </p:txBody>
+      </p:sp>
+      <p:sp>
+        <p:nvSpPr>
+          <p:cNvPr id="20" name="Text 18"/>
+          <p:cNvSpPr txBox="1"/>
+          <p:nvPr/>
+        </p:nvSpPr>
+        <p:spPr>
+          <a:xfrm>
+            <a:off x="6752844" y="2606040"/>
+            <a:ext cx="1933956" cy="1828800"/>
+          </a:xfrm>
+          <a:prstGeom prst="rect">
+            <a:avLst/>
+          </a:prstGeom>
+          <a:noFill/>
+          <a:ln/>
+        </p:spPr>
+        <p:txBody>
+          <a:bodyPr wrap="square" lIns="0" tIns="0" rIns="0" bIns="0" rtlCol="0" anchor="t"/>
+          <a:lstStyle/>
+          <a:p>
+            <a:pPr algn="l" indent="0" marL="0">
+              <a:buNone/>
+            </a:pPr>
+            <a:r>
+              <a:rPr lang="ru-RU" altLang="en-US" sz="1050" dirty="0">
                 <a:solidFill>
                   <a:schemeClr val="accent3"/>
                 </a:solidFill>
               </a:rPr>
-              <a:t>Вы не даёте юридических консультаций; всю профессиональную ответственность несём мы.</a:t>
-            </a:r>
-            <a:endParaRPr lang="ru-RU" sz="1300" dirty="0"/>
-          </a:p>
-        </p:txBody>
-      </p:sp>
-      <p:sp>
-        <p:nvSpPr>
-          <p:cNvPr id="16" name="Shape 10"/>
-          <p:cNvSpPr/>
-          <p:nvPr/>
-        </p:nvSpPr>
-        <p:spPr>
-          <a:xfrm>
-            <a:off x="457200" y="3822192"/>
-            <a:ext cx="457200" cy="457200"/>
-          </a:xfrm>
-          <a:prstGeom prst="ellipse">
-            <a:avLst/>
-          </a:prstGeom>
-          <a:solidFill>
-            <a:srgbClr val="F4F1EB"/>
-          </a:solidFill>
-          <a:ln w="12700">
-            <a:solidFill>
-              <a:srgbClr val="F4F1EB"/>
-            </a:solidFill>
-            <a:prstDash val="solid"/>
-          </a:ln>
-        </p:spPr>
-      </p:sp>
-      <p:pic>
-        <p:nvPicPr>
-          <p:cNvPr id="17" name="icon FaBan" descr="preencoded.png">    </p:cNvPr>
-          <p:cNvPicPr>
-            <a:picLocks noChangeAspect="1"/>
-          </p:cNvPicPr>
-          <p:nvPr/>
-        </p:nvPicPr>
-        <p:blipFill>
-          <a:blip r:embed="rId5"/>
-          <a:stretch>
-            <a:fillRect/>
-          </a:stretch>
-        </p:blipFill>
-        <p:spPr>
-          <a:xfrm>
-            <a:off x="548640" y="3913632"/>
-            <a:ext cx="274320" cy="274320"/>
-          </a:xfrm>
-          <a:prstGeom prst="rect">
-            <a:avLst/>
-          </a:prstGeom>
-        </p:spPr>
-      </p:pic>
-      <p:sp>
-        <p:nvSpPr>
-          <p:cNvPr id="18" name="Text 11"/>
-          <p:cNvSpPr txBox="1"/>
-          <p:nvPr/>
-        </p:nvSpPr>
-        <p:spPr>
-          <a:xfrm>
-            <a:off x="1097280" y="3803904"/>
-            <a:ext cx="7589520" cy="585216"/>
-          </a:xfrm>
-          <a:prstGeom prst="rect">
-            <a:avLst/>
-          </a:prstGeom>
-          <a:noFill/>
-          <a:ln/>
-        </p:spPr>
-        <p:txBody>
-          <a:bodyPr wrap="square" lIns="0" tIns="0" rIns="0" bIns="0" rtlCol="0" anchor="t"/>
-          <a:lstStyle/>
-          <a:p>
-            <a:pPr algn="l" indent="0" marL="0">
-              <a:spcAft>
-                <a:spcPts val="200"/>
-              </a:spcAft>
-              <a:buNone/>
-            </a:pPr>
-            <a:r>
-              <a:rPr lang="ru-RU" altLang="en-US" sz="1300" b="1" dirty="0">
-                <a:solidFill>
-                  <a:schemeClr val="tx1"/>
-                </a:solidFill>
-              </a:rPr>
-              <a:t>Запрет обхода (non-circumvention)</a:t>
-            </a:r>
-            <a:endParaRPr lang="ru-RU" sz="1300" dirty="0"/>
-          </a:p>
-          <a:p>
-            <a:pPr algn="l" indent="0" marL="0">
-              <a:spcAft>
-                <a:spcPts val="200"/>
-              </a:spcAft>
-              <a:buNone/>
-            </a:pPr>
-            <a:r>
-              <a:rPr lang="ru-RU" altLang="en-US" sz="1100" dirty="0">
-                <a:solidFill>
-                  <a:schemeClr val="accent3"/>
-                </a:solidFill>
-              </a:rPr>
-              <a:t>Ваши отношения с клиентами защищены на протяжении всего партнёрства.</a:t>
-            </a:r>
-            <a:endParaRPr lang="ru-RU" sz="1300" dirty="0"/>
-          </a:p>
-        </p:txBody>
-      </p:sp>
-      <p:sp>
-        <p:nvSpPr>
-          <p:cNvPr id="19" name="Text 0"/>
+              <a:t>Ежемесячный отчёт и комиссия, выплачиваемая по соглашению.</a:t>
+            </a:r>
+            <a:endParaRPr lang="ru-RU" sz="1050" dirty="0"/>
+          </a:p>
+        </p:txBody>
+      </p:sp>
+      <p:sp>
+        <p:nvSpPr>
+          <p:cNvPr id="21" name="Text 0"/>
           <p:cNvSpPr/>
           <p:nvPr>
             <p:ph idx="101" type="title" hasCustomPrompt="1"/>
